--- a/RISCVstage1.pptx
+++ b/RISCVstage1.pptx
@@ -112,6 +112,435 @@
 </p:presentation>
 </file>
 
+<file path=ppt/revisionInfo.xml><?xml version="1.0" encoding="utf-8"?>
+<p1510:revInfo xmlns:a="http://schemas.openxmlformats.org/drawingml/2006/main" xmlns:r="http://schemas.openxmlformats.org/officeDocument/2006/relationships" xmlns:p1510="http://schemas.microsoft.com/office/powerpoint/2015/10/main">
+  <p1510:revLst>
+    <p1510:client id="{166DD0B5-D942-4567-8F05-3DE6A7D9EE97}" v="13" dt="2026-03-05T21:24:27.036"/>
+  </p1510:revLst>
+</p1510:revInfo>
+</file>
+
+<file path=ppt/changesInfos/changesInfo1.xml><?xml version="1.0" encoding="utf-8"?>
+<pc:chgInfo xmlns:a="http://schemas.openxmlformats.org/drawingml/2006/main" xmlns:r="http://schemas.openxmlformats.org/officeDocument/2006/relationships" xmlns:ac="http://schemas.microsoft.com/office/drawing/2013/main/command" xmlns:pc="http://schemas.microsoft.com/office/powerpoint/2013/main/command">
+  <pc:docChgLst>
+    <pc:chgData name="York, George W CIV USAF USAFA DF/DFEC" userId="1fb5875a-4594-4db2-80fb-f0db3de11280" providerId="ADAL" clId="{09330963-85FD-4C99-A81B-94D0EE5CFFEB}"/>
+    <pc:docChg chg="undo custSel modSld">
+      <pc:chgData name="York, George W CIV USAF USAFA DF/DFEC" userId="1fb5875a-4594-4db2-80fb-f0db3de11280" providerId="ADAL" clId="{09330963-85FD-4C99-A81B-94D0EE5CFFEB}" dt="2026-03-05T22:27:59.360" v="86" actId="478"/>
+      <pc:docMkLst>
+        <pc:docMk/>
+      </pc:docMkLst>
+      <pc:sldChg chg="addSp delSp modSp mod">
+        <pc:chgData name="York, George W CIV USAF USAFA DF/DFEC" userId="1fb5875a-4594-4db2-80fb-f0db3de11280" providerId="ADAL" clId="{09330963-85FD-4C99-A81B-94D0EE5CFFEB}" dt="2026-03-05T22:27:59.360" v="86" actId="478"/>
+        <pc:sldMkLst>
+          <pc:docMk/>
+          <pc:sldMk cId="1501170907" sldId="256"/>
+        </pc:sldMkLst>
+        <pc:spChg chg="add mod">
+          <ac:chgData name="York, George W CIV USAF USAFA DF/DFEC" userId="1fb5875a-4594-4db2-80fb-f0db3de11280" providerId="ADAL" clId="{09330963-85FD-4C99-A81B-94D0EE5CFFEB}" dt="2026-03-05T21:11:58.592" v="13" actId="1076"/>
+          <ac:spMkLst>
+            <pc:docMk/>
+            <pc:sldMk cId="1501170907" sldId="256"/>
+            <ac:spMk id="2" creationId="{8150CAF1-DAFF-41B1-37D9-3AA58EDF71DA}"/>
+          </ac:spMkLst>
+        </pc:spChg>
+        <pc:spChg chg="add mod">
+          <ac:chgData name="York, George W CIV USAF USAFA DF/DFEC" userId="1fb5875a-4594-4db2-80fb-f0db3de11280" providerId="ADAL" clId="{09330963-85FD-4C99-A81B-94D0EE5CFFEB}" dt="2026-03-05T21:12:23.121" v="17" actId="20577"/>
+          <ac:spMkLst>
+            <pc:docMk/>
+            <pc:sldMk cId="1501170907" sldId="256"/>
+            <ac:spMk id="30" creationId="{B8ACE971-B3B8-76F7-BEAC-B98AF5AE845F}"/>
+          </ac:spMkLst>
+        </pc:spChg>
+        <pc:spChg chg="add del mod">
+          <ac:chgData name="York, George W CIV USAF USAFA DF/DFEC" userId="1fb5875a-4594-4db2-80fb-f0db3de11280" providerId="ADAL" clId="{09330963-85FD-4C99-A81B-94D0EE5CFFEB}" dt="2026-03-05T21:15:51.480" v="42" actId="478"/>
+          <ac:spMkLst>
+            <pc:docMk/>
+            <pc:sldMk cId="1501170907" sldId="256"/>
+            <ac:spMk id="34" creationId="{DE4C4D7D-AB22-873C-1654-A047EABD08AA}"/>
+          </ac:spMkLst>
+        </pc:spChg>
+        <pc:spChg chg="add mod">
+          <ac:chgData name="York, George W CIV USAF USAFA DF/DFEC" userId="1fb5875a-4594-4db2-80fb-f0db3de11280" providerId="ADAL" clId="{09330963-85FD-4C99-A81B-94D0EE5CFFEB}" dt="2026-03-05T21:13:34.047" v="26" actId="1076"/>
+          <ac:spMkLst>
+            <pc:docMk/>
+            <pc:sldMk cId="1501170907" sldId="256"/>
+            <ac:spMk id="36" creationId="{61EEB1E0-6493-4023-ADC1-CE06FABB4ECF}"/>
+          </ac:spMkLst>
+        </pc:spChg>
+        <pc:spChg chg="add del mod">
+          <ac:chgData name="York, George W CIV USAF USAFA DF/DFEC" userId="1fb5875a-4594-4db2-80fb-f0db3de11280" providerId="ADAL" clId="{09330963-85FD-4C99-A81B-94D0EE5CFFEB}" dt="2026-03-05T21:20:36.103" v="60" actId="478"/>
+          <ac:spMkLst>
+            <pc:docMk/>
+            <pc:sldMk cId="1501170907" sldId="256"/>
+            <ac:spMk id="61" creationId="{CD12388E-047A-38FF-64C0-0457D8523D0C}"/>
+          </ac:spMkLst>
+        </pc:spChg>
+        <pc:spChg chg="del mod">
+          <ac:chgData name="York, George W CIV USAF USAFA DF/DFEC" userId="1fb5875a-4594-4db2-80fb-f0db3de11280" providerId="ADAL" clId="{09330963-85FD-4C99-A81B-94D0EE5CFFEB}" dt="2026-03-05T22:27:59.360" v="86" actId="478"/>
+          <ac:spMkLst>
+            <pc:docMk/>
+            <pc:sldMk cId="1501170907" sldId="256"/>
+            <ac:spMk id="145" creationId="{D48BF948-61BF-AC37-8597-388094170D18}"/>
+          </ac:spMkLst>
+        </pc:spChg>
+        <pc:spChg chg="del mod">
+          <ac:chgData name="York, George W CIV USAF USAFA DF/DFEC" userId="1fb5875a-4594-4db2-80fb-f0db3de11280" providerId="ADAL" clId="{09330963-85FD-4C99-A81B-94D0EE5CFFEB}" dt="2026-03-05T22:27:59.360" v="86" actId="478"/>
+          <ac:spMkLst>
+            <pc:docMk/>
+            <pc:sldMk cId="1501170907" sldId="256"/>
+            <ac:spMk id="146" creationId="{69719632-7E59-F7B2-AEF4-E4C30AA0AEF2}"/>
+          </ac:spMkLst>
+        </pc:spChg>
+        <pc:spChg chg="del mod">
+          <ac:chgData name="York, George W CIV USAF USAFA DF/DFEC" userId="1fb5875a-4594-4db2-80fb-f0db3de11280" providerId="ADAL" clId="{09330963-85FD-4C99-A81B-94D0EE5CFFEB}" dt="2026-03-05T22:27:59.360" v="86" actId="478"/>
+          <ac:spMkLst>
+            <pc:docMk/>
+            <pc:sldMk cId="1501170907" sldId="256"/>
+            <ac:spMk id="148" creationId="{6432B689-7D1C-F807-6B45-D8272427DA3A}"/>
+          </ac:spMkLst>
+        </pc:spChg>
+        <pc:spChg chg="del mod">
+          <ac:chgData name="York, George W CIV USAF USAFA DF/DFEC" userId="1fb5875a-4594-4db2-80fb-f0db3de11280" providerId="ADAL" clId="{09330963-85FD-4C99-A81B-94D0EE5CFFEB}" dt="2026-03-05T22:27:59.360" v="86" actId="478"/>
+          <ac:spMkLst>
+            <pc:docMk/>
+            <pc:sldMk cId="1501170907" sldId="256"/>
+            <ac:spMk id="149" creationId="{831B5896-D57B-4667-02CD-6AAF11DEE5E2}"/>
+          </ac:spMkLst>
+        </pc:spChg>
+        <pc:spChg chg="del mod">
+          <ac:chgData name="York, George W CIV USAF USAFA DF/DFEC" userId="1fb5875a-4594-4db2-80fb-f0db3de11280" providerId="ADAL" clId="{09330963-85FD-4C99-A81B-94D0EE5CFFEB}" dt="2026-03-05T22:27:59.360" v="86" actId="478"/>
+          <ac:spMkLst>
+            <pc:docMk/>
+            <pc:sldMk cId="1501170907" sldId="256"/>
+            <ac:spMk id="151" creationId="{BC6DDD09-EA41-1470-2429-DBE27164913F}"/>
+          </ac:spMkLst>
+        </pc:spChg>
+        <pc:spChg chg="del mod">
+          <ac:chgData name="York, George W CIV USAF USAFA DF/DFEC" userId="1fb5875a-4594-4db2-80fb-f0db3de11280" providerId="ADAL" clId="{09330963-85FD-4C99-A81B-94D0EE5CFFEB}" dt="2026-03-05T22:27:59.360" v="86" actId="478"/>
+          <ac:spMkLst>
+            <pc:docMk/>
+            <pc:sldMk cId="1501170907" sldId="256"/>
+            <ac:spMk id="155" creationId="{75FA3F6B-D94A-A494-28FD-7D4F921979A2}"/>
+          </ac:spMkLst>
+        </pc:spChg>
+        <pc:spChg chg="mod">
+          <ac:chgData name="York, George W CIV USAF USAFA DF/DFEC" userId="1fb5875a-4594-4db2-80fb-f0db3de11280" providerId="ADAL" clId="{09330963-85FD-4C99-A81B-94D0EE5CFFEB}" dt="2026-03-05T21:12:30.792" v="18" actId="1076"/>
+          <ac:spMkLst>
+            <pc:docMk/>
+            <pc:sldMk cId="1501170907" sldId="256"/>
+            <ac:spMk id="160" creationId="{3BF5B236-4D8B-849D-0CDF-2CB1B5EE7284}"/>
+          </ac:spMkLst>
+        </pc:spChg>
+        <pc:spChg chg="mod">
+          <ac:chgData name="York, George W CIV USAF USAFA DF/DFEC" userId="1fb5875a-4594-4db2-80fb-f0db3de11280" providerId="ADAL" clId="{09330963-85FD-4C99-A81B-94D0EE5CFFEB}" dt="2026-03-05T21:12:39.311" v="19" actId="1076"/>
+          <ac:spMkLst>
+            <pc:docMk/>
+            <pc:sldMk cId="1501170907" sldId="256"/>
+            <ac:spMk id="161" creationId="{0E9784F2-B3AB-C0FA-FDFE-48C83AB9B12E}"/>
+          </ac:spMkLst>
+        </pc:spChg>
+        <pc:spChg chg="mod">
+          <ac:chgData name="York, George W CIV USAF USAFA DF/DFEC" userId="1fb5875a-4594-4db2-80fb-f0db3de11280" providerId="ADAL" clId="{09330963-85FD-4C99-A81B-94D0EE5CFFEB}" dt="2026-03-05T21:13:59.105" v="29" actId="1076"/>
+          <ac:spMkLst>
+            <pc:docMk/>
+            <pc:sldMk cId="1501170907" sldId="256"/>
+            <ac:spMk id="270" creationId="{E335D321-53C8-872A-430E-7732E67F0A79}"/>
+          </ac:spMkLst>
+        </pc:spChg>
+        <pc:spChg chg="del mod">
+          <ac:chgData name="York, George W CIV USAF USAFA DF/DFEC" userId="1fb5875a-4594-4db2-80fb-f0db3de11280" providerId="ADAL" clId="{09330963-85FD-4C99-A81B-94D0EE5CFFEB}" dt="2026-03-05T21:13:17.042" v="24" actId="478"/>
+          <ac:spMkLst>
+            <pc:docMk/>
+            <pc:sldMk cId="1501170907" sldId="256"/>
+            <ac:spMk id="273" creationId="{53C6712A-701A-7D00-06ED-4806B8BE36CF}"/>
+          </ac:spMkLst>
+        </pc:spChg>
+        <pc:grpChg chg="add mod">
+          <ac:chgData name="York, George W CIV USAF USAFA DF/DFEC" userId="1fb5875a-4594-4db2-80fb-f0db3de11280" providerId="ADAL" clId="{09330963-85FD-4C99-A81B-94D0EE5CFFEB}" dt="2026-03-05T21:12:20.312" v="15" actId="1076"/>
+          <ac:grpSpMkLst>
+            <pc:docMk/>
+            <pc:sldMk cId="1501170907" sldId="256"/>
+            <ac:grpSpMk id="3" creationId="{F0E20165-74AC-DD4D-AA48-ADD102893E58}"/>
+          </ac:grpSpMkLst>
+        </pc:grpChg>
+        <pc:grpChg chg="add mod">
+          <ac:chgData name="York, George W CIV USAF USAFA DF/DFEC" userId="1fb5875a-4594-4db2-80fb-f0db3de11280" providerId="ADAL" clId="{09330963-85FD-4C99-A81B-94D0EE5CFFEB}" dt="2026-03-05T21:24:47.725" v="84" actId="14100"/>
+          <ac:grpSpMkLst>
+            <pc:docMk/>
+            <pc:sldMk cId="1501170907" sldId="256"/>
+            <ac:grpSpMk id="86" creationId="{B7C242C4-9BDE-35B9-11F3-F09FF7C08848}"/>
+          </ac:grpSpMkLst>
+        </pc:grpChg>
+        <pc:picChg chg="add mod ord">
+          <ac:chgData name="York, George W CIV USAF USAFA DF/DFEC" userId="1fb5875a-4594-4db2-80fb-f0db3de11280" providerId="ADAL" clId="{09330963-85FD-4C99-A81B-94D0EE5CFFEB}" dt="2026-03-05T21:23:26.837" v="71" actId="14100"/>
+          <ac:picMkLst>
+            <pc:docMk/>
+            <pc:sldMk cId="1501170907" sldId="256"/>
+            <ac:picMk id="75" creationId="{D45FA400-FFFB-FCFC-1CEA-7CA1E4519E91}"/>
+          </ac:picMkLst>
+        </pc:picChg>
+        <pc:picChg chg="add mod">
+          <ac:chgData name="York, George W CIV USAF USAFA DF/DFEC" userId="1fb5875a-4594-4db2-80fb-f0db3de11280" providerId="ADAL" clId="{09330963-85FD-4C99-A81B-94D0EE5CFFEB}" dt="2026-03-05T21:24:27.036" v="80" actId="164"/>
+          <ac:picMkLst>
+            <pc:docMk/>
+            <pc:sldMk cId="1501170907" sldId="256"/>
+            <ac:picMk id="77" creationId="{ADA4DBF6-5BC1-7443-F4A8-C37F2A616150}"/>
+          </ac:picMkLst>
+        </pc:picChg>
+        <pc:cxnChg chg="mod">
+          <ac:chgData name="York, George W CIV USAF USAFA DF/DFEC" userId="1fb5875a-4594-4db2-80fb-f0db3de11280" providerId="ADAL" clId="{09330963-85FD-4C99-A81B-94D0EE5CFFEB}" dt="2026-03-05T21:12:10.392" v="14"/>
+          <ac:cxnSpMkLst>
+            <pc:docMk/>
+            <pc:sldMk cId="1501170907" sldId="256"/>
+            <ac:cxnSpMk id="10" creationId="{F8960DDE-F577-2D0B-E329-28A527662C2D}"/>
+          </ac:cxnSpMkLst>
+        </pc:cxnChg>
+        <pc:cxnChg chg="mod">
+          <ac:chgData name="York, George W CIV USAF USAFA DF/DFEC" userId="1fb5875a-4594-4db2-80fb-f0db3de11280" providerId="ADAL" clId="{09330963-85FD-4C99-A81B-94D0EE5CFFEB}" dt="2026-03-05T21:12:10.392" v="14"/>
+          <ac:cxnSpMkLst>
+            <pc:docMk/>
+            <pc:sldMk cId="1501170907" sldId="256"/>
+            <ac:cxnSpMk id="17" creationId="{0A06088D-98A3-A19E-21B7-06392BDC9225}"/>
+          </ac:cxnSpMkLst>
+        </pc:cxnChg>
+        <pc:cxnChg chg="mod">
+          <ac:chgData name="York, George W CIV USAF USAFA DF/DFEC" userId="1fb5875a-4594-4db2-80fb-f0db3de11280" providerId="ADAL" clId="{09330963-85FD-4C99-A81B-94D0EE5CFFEB}" dt="2026-03-05T21:12:10.392" v="14"/>
+          <ac:cxnSpMkLst>
+            <pc:docMk/>
+            <pc:sldMk cId="1501170907" sldId="256"/>
+            <ac:cxnSpMk id="18" creationId="{67D1D89E-75CE-1BE7-C5F4-51F595DF5A7B}"/>
+          </ac:cxnSpMkLst>
+        </pc:cxnChg>
+        <pc:cxnChg chg="mod">
+          <ac:chgData name="York, George W CIV USAF USAFA DF/DFEC" userId="1fb5875a-4594-4db2-80fb-f0db3de11280" providerId="ADAL" clId="{09330963-85FD-4C99-A81B-94D0EE5CFFEB}" dt="2026-03-05T21:12:10.392" v="14"/>
+          <ac:cxnSpMkLst>
+            <pc:docMk/>
+            <pc:sldMk cId="1501170907" sldId="256"/>
+            <ac:cxnSpMk id="20" creationId="{19DBD266-1003-B3C8-0754-4799002739F2}"/>
+          </ac:cxnSpMkLst>
+        </pc:cxnChg>
+        <pc:cxnChg chg="mod">
+          <ac:chgData name="York, George W CIV USAF USAFA DF/DFEC" userId="1fb5875a-4594-4db2-80fb-f0db3de11280" providerId="ADAL" clId="{09330963-85FD-4C99-A81B-94D0EE5CFFEB}" dt="2026-03-05T21:12:10.392" v="14"/>
+          <ac:cxnSpMkLst>
+            <pc:docMk/>
+            <pc:sldMk cId="1501170907" sldId="256"/>
+            <ac:cxnSpMk id="21" creationId="{E21776EC-071F-B571-C86B-0A0DA830C4B3}"/>
+          </ac:cxnSpMkLst>
+        </pc:cxnChg>
+        <pc:cxnChg chg="mod">
+          <ac:chgData name="York, George W CIV USAF USAFA DF/DFEC" userId="1fb5875a-4594-4db2-80fb-f0db3de11280" providerId="ADAL" clId="{09330963-85FD-4C99-A81B-94D0EE5CFFEB}" dt="2026-03-05T21:12:10.392" v="14"/>
+          <ac:cxnSpMkLst>
+            <pc:docMk/>
+            <pc:sldMk cId="1501170907" sldId="256"/>
+            <ac:cxnSpMk id="23" creationId="{AC7113F7-BE3F-C063-EF42-353858130E84}"/>
+          </ac:cxnSpMkLst>
+        </pc:cxnChg>
+        <pc:cxnChg chg="add mod">
+          <ac:chgData name="York, George W CIV USAF USAFA DF/DFEC" userId="1fb5875a-4594-4db2-80fb-f0db3de11280" providerId="ADAL" clId="{09330963-85FD-4C99-A81B-94D0EE5CFFEB}" dt="2026-03-05T21:12:20.312" v="15" actId="1076"/>
+          <ac:cxnSpMkLst>
+            <pc:docMk/>
+            <pc:sldMk cId="1501170907" sldId="256"/>
+            <ac:cxnSpMk id="26" creationId="{444F7234-410C-25D4-213C-932ED214CEA2}"/>
+          </ac:cxnSpMkLst>
+        </pc:cxnChg>
+        <pc:cxnChg chg="add mod">
+          <ac:chgData name="York, George W CIV USAF USAFA DF/DFEC" userId="1fb5875a-4594-4db2-80fb-f0db3de11280" providerId="ADAL" clId="{09330963-85FD-4C99-A81B-94D0EE5CFFEB}" dt="2026-03-05T21:12:20.312" v="15" actId="1076"/>
+          <ac:cxnSpMkLst>
+            <pc:docMk/>
+            <pc:sldMk cId="1501170907" sldId="256"/>
+            <ac:cxnSpMk id="28" creationId="{B33DC5DC-F120-3662-5DC9-4D6D8B08EBA0}"/>
+          </ac:cxnSpMkLst>
+        </pc:cxnChg>
+        <pc:cxnChg chg="add del mod">
+          <ac:chgData name="York, George W CIV USAF USAFA DF/DFEC" userId="1fb5875a-4594-4db2-80fb-f0db3de11280" providerId="ADAL" clId="{09330963-85FD-4C99-A81B-94D0EE5CFFEB}" dt="2026-03-05T21:15:51.480" v="42" actId="478"/>
+          <ac:cxnSpMkLst>
+            <pc:docMk/>
+            <pc:sldMk cId="1501170907" sldId="256"/>
+            <ac:cxnSpMk id="32" creationId="{8895D4E5-DF4D-8C09-B4C9-D88B1A2AA2A4}"/>
+          </ac:cxnSpMkLst>
+        </pc:cxnChg>
+        <pc:cxnChg chg="add mod">
+          <ac:chgData name="York, George W CIV USAF USAFA DF/DFEC" userId="1fb5875a-4594-4db2-80fb-f0db3de11280" providerId="ADAL" clId="{09330963-85FD-4C99-A81B-94D0EE5CFFEB}" dt="2026-03-05T21:13:34.047" v="26" actId="1076"/>
+          <ac:cxnSpMkLst>
+            <pc:docMk/>
+            <pc:sldMk cId="1501170907" sldId="256"/>
+            <ac:cxnSpMk id="35" creationId="{D8C6D111-8409-B69D-7F4D-1EAFFBC86D2F}"/>
+          </ac:cxnSpMkLst>
+        </pc:cxnChg>
+        <pc:cxnChg chg="add mod">
+          <ac:chgData name="York, George W CIV USAF USAFA DF/DFEC" userId="1fb5875a-4594-4db2-80fb-f0db3de11280" providerId="ADAL" clId="{09330963-85FD-4C99-A81B-94D0EE5CFFEB}" dt="2026-03-05T21:14:17.674" v="32" actId="1076"/>
+          <ac:cxnSpMkLst>
+            <pc:docMk/>
+            <pc:sldMk cId="1501170907" sldId="256"/>
+            <ac:cxnSpMk id="37" creationId="{EF44754E-6632-B039-2821-0640C926BB12}"/>
+          </ac:cxnSpMkLst>
+        </pc:cxnChg>
+        <pc:cxnChg chg="add mod">
+          <ac:chgData name="York, George W CIV USAF USAFA DF/DFEC" userId="1fb5875a-4594-4db2-80fb-f0db3de11280" providerId="ADAL" clId="{09330963-85FD-4C99-A81B-94D0EE5CFFEB}" dt="2026-03-05T21:15:10.043" v="36" actId="692"/>
+          <ac:cxnSpMkLst>
+            <pc:docMk/>
+            <pc:sldMk cId="1501170907" sldId="256"/>
+            <ac:cxnSpMk id="38" creationId="{C974F664-B6FE-876B-6F6D-6B0987070041}"/>
+          </ac:cxnSpMkLst>
+        </pc:cxnChg>
+        <pc:cxnChg chg="add mod">
+          <ac:chgData name="York, George W CIV USAF USAFA DF/DFEC" userId="1fb5875a-4594-4db2-80fb-f0db3de11280" providerId="ADAL" clId="{09330963-85FD-4C99-A81B-94D0EE5CFFEB}" dt="2026-03-05T21:15:45.472" v="41" actId="692"/>
+          <ac:cxnSpMkLst>
+            <pc:docMk/>
+            <pc:sldMk cId="1501170907" sldId="256"/>
+            <ac:cxnSpMk id="52" creationId="{5EB535AF-BDE4-1847-B2CC-ED37430A4C46}"/>
+          </ac:cxnSpMkLst>
+        </pc:cxnChg>
+        <pc:cxnChg chg="add mod">
+          <ac:chgData name="York, George W CIV USAF USAFA DF/DFEC" userId="1fb5875a-4594-4db2-80fb-f0db3de11280" providerId="ADAL" clId="{09330963-85FD-4C99-A81B-94D0EE5CFFEB}" dt="2026-03-05T21:16:15.495" v="46" actId="1076"/>
+          <ac:cxnSpMkLst>
+            <pc:docMk/>
+            <pc:sldMk cId="1501170907" sldId="256"/>
+            <ac:cxnSpMk id="54" creationId="{2E8C08F4-6B7C-4580-23CA-753663A3987B}"/>
+          </ac:cxnSpMkLst>
+        </pc:cxnChg>
+        <pc:cxnChg chg="add mod">
+          <ac:chgData name="York, George W CIV USAF USAFA DF/DFEC" userId="1fb5875a-4594-4db2-80fb-f0db3de11280" providerId="ADAL" clId="{09330963-85FD-4C99-A81B-94D0EE5CFFEB}" dt="2026-03-05T21:16:20.354" v="48" actId="1076"/>
+          <ac:cxnSpMkLst>
+            <pc:docMk/>
+            <pc:sldMk cId="1501170907" sldId="256"/>
+            <ac:cxnSpMk id="57" creationId="{A9066061-6913-FC84-2215-495F7DB70ED3}"/>
+          </ac:cxnSpMkLst>
+        </pc:cxnChg>
+        <pc:cxnChg chg="add mod">
+          <ac:chgData name="York, George W CIV USAF USAFA DF/DFEC" userId="1fb5875a-4594-4db2-80fb-f0db3de11280" providerId="ADAL" clId="{09330963-85FD-4C99-A81B-94D0EE5CFFEB}" dt="2026-03-05T21:18:29.403" v="50" actId="1076"/>
+          <ac:cxnSpMkLst>
+            <pc:docMk/>
+            <pc:sldMk cId="1501170907" sldId="256"/>
+            <ac:cxnSpMk id="58" creationId="{FC65ADDE-BA27-5782-2BA6-2E54CBD9C0C4}"/>
+          </ac:cxnSpMkLst>
+        </pc:cxnChg>
+        <pc:cxnChg chg="add mod">
+          <ac:chgData name="York, George W CIV USAF USAFA DF/DFEC" userId="1fb5875a-4594-4db2-80fb-f0db3de11280" providerId="ADAL" clId="{09330963-85FD-4C99-A81B-94D0EE5CFFEB}" dt="2026-03-05T21:18:34.939" v="52" actId="1076"/>
+          <ac:cxnSpMkLst>
+            <pc:docMk/>
+            <pc:sldMk cId="1501170907" sldId="256"/>
+            <ac:cxnSpMk id="59" creationId="{66D85414-7527-6B63-2578-61E5AA31E7EA}"/>
+          </ac:cxnSpMkLst>
+        </pc:cxnChg>
+        <pc:cxnChg chg="add mod">
+          <ac:chgData name="York, George W CIV USAF USAFA DF/DFEC" userId="1fb5875a-4594-4db2-80fb-f0db3de11280" providerId="ADAL" clId="{09330963-85FD-4C99-A81B-94D0EE5CFFEB}" dt="2026-03-05T21:23:44.005" v="73" actId="1076"/>
+          <ac:cxnSpMkLst>
+            <pc:docMk/>
+            <pc:sldMk cId="1501170907" sldId="256"/>
+            <ac:cxnSpMk id="76" creationId="{9921C9C5-2DFB-C76A-4D92-6A511FF5BBF4}"/>
+          </ac:cxnSpMkLst>
+        </pc:cxnChg>
+        <pc:cxnChg chg="add del mod">
+          <ac:chgData name="York, George W CIV USAF USAFA DF/DFEC" userId="1fb5875a-4594-4db2-80fb-f0db3de11280" providerId="ADAL" clId="{09330963-85FD-4C99-A81B-94D0EE5CFFEB}" dt="2026-03-05T21:24:08.939" v="77" actId="478"/>
+          <ac:cxnSpMkLst>
+            <pc:docMk/>
+            <pc:sldMk cId="1501170907" sldId="256"/>
+            <ac:cxnSpMk id="78" creationId="{FBA0773D-8AFC-1525-DCA5-0C9963B90E6F}"/>
+          </ac:cxnSpMkLst>
+        </pc:cxnChg>
+        <pc:cxnChg chg="add mod">
+          <ac:chgData name="York, George W CIV USAF USAFA DF/DFEC" userId="1fb5875a-4594-4db2-80fb-f0db3de11280" providerId="ADAL" clId="{09330963-85FD-4C99-A81B-94D0EE5CFFEB}" dt="2026-03-05T21:24:27.036" v="80" actId="164"/>
+          <ac:cxnSpMkLst>
+            <pc:docMk/>
+            <pc:sldMk cId="1501170907" sldId="256"/>
+            <ac:cxnSpMk id="79" creationId="{861176B7-9B3B-7106-C3CD-F90CCEF592F1}"/>
+          </ac:cxnSpMkLst>
+        </pc:cxnChg>
+        <pc:cxnChg chg="add mod">
+          <ac:chgData name="York, George W CIV USAF USAFA DF/DFEC" userId="1fb5875a-4594-4db2-80fb-f0db3de11280" providerId="ADAL" clId="{09330963-85FD-4C99-A81B-94D0EE5CFFEB}" dt="2026-03-05T21:24:27.036" v="80" actId="164"/>
+          <ac:cxnSpMkLst>
+            <pc:docMk/>
+            <pc:sldMk cId="1501170907" sldId="256"/>
+            <ac:cxnSpMk id="80" creationId="{6AA41B44-529F-F6BF-0A9B-4AD3BD64CCCA}"/>
+          </ac:cxnSpMkLst>
+        </pc:cxnChg>
+        <pc:cxnChg chg="mod">
+          <ac:chgData name="York, George W CIV USAF USAFA DF/DFEC" userId="1fb5875a-4594-4db2-80fb-f0db3de11280" providerId="ADAL" clId="{09330963-85FD-4C99-A81B-94D0EE5CFFEB}" dt="2026-03-05T21:23:38.557" v="72" actId="1076"/>
+          <ac:cxnSpMkLst>
+            <pc:docMk/>
+            <pc:sldMk cId="1501170907" sldId="256"/>
+            <ac:cxnSpMk id="105" creationId="{96194351-1F6F-6ECD-551A-2B077972FE1F}"/>
+          </ac:cxnSpMkLst>
+        </pc:cxnChg>
+        <pc:cxnChg chg="mod">
+          <ac:chgData name="York, George W CIV USAF USAFA DF/DFEC" userId="1fb5875a-4594-4db2-80fb-f0db3de11280" providerId="ADAL" clId="{09330963-85FD-4C99-A81B-94D0EE5CFFEB}" dt="2026-03-05T21:14:11.375" v="30" actId="1076"/>
+          <ac:cxnSpMkLst>
+            <pc:docMk/>
+            <pc:sldMk cId="1501170907" sldId="256"/>
+            <ac:cxnSpMk id="152" creationId="{0B969FF2-6DAD-23DC-28B8-ACF737E02DB2}"/>
+          </ac:cxnSpMkLst>
+        </pc:cxnChg>
+        <pc:cxnChg chg="del mod">
+          <ac:chgData name="York, George W CIV USAF USAFA DF/DFEC" userId="1fb5875a-4594-4db2-80fb-f0db3de11280" providerId="ADAL" clId="{09330963-85FD-4C99-A81B-94D0EE5CFFEB}" dt="2026-03-05T22:27:59.360" v="86" actId="478"/>
+          <ac:cxnSpMkLst>
+            <pc:docMk/>
+            <pc:sldMk cId="1501170907" sldId="256"/>
+            <ac:cxnSpMk id="153" creationId="{F030B5C6-68FA-2DA5-919A-5B353DA9C1A8}"/>
+          </ac:cxnSpMkLst>
+        </pc:cxnChg>
+        <pc:cxnChg chg="del mod">
+          <ac:chgData name="York, George W CIV USAF USAFA DF/DFEC" userId="1fb5875a-4594-4db2-80fb-f0db3de11280" providerId="ADAL" clId="{09330963-85FD-4C99-A81B-94D0EE5CFFEB}" dt="2026-03-05T22:27:59.360" v="86" actId="478"/>
+          <ac:cxnSpMkLst>
+            <pc:docMk/>
+            <pc:sldMk cId="1501170907" sldId="256"/>
+            <ac:cxnSpMk id="154" creationId="{9779A5A3-D9AC-4884-E09E-088355A5273D}"/>
+          </ac:cxnSpMkLst>
+        </pc:cxnChg>
+        <pc:cxnChg chg="del">
+          <ac:chgData name="York, George W CIV USAF USAFA DF/DFEC" userId="1fb5875a-4594-4db2-80fb-f0db3de11280" providerId="ADAL" clId="{09330963-85FD-4C99-A81B-94D0EE5CFFEB}" dt="2026-03-05T21:13:13.039" v="23" actId="478"/>
+          <ac:cxnSpMkLst>
+            <pc:docMk/>
+            <pc:sldMk cId="1501170907" sldId="256"/>
+            <ac:cxnSpMk id="156" creationId="{4E8E377D-848A-C4CD-E531-28E5114DF352}"/>
+          </ac:cxnSpMkLst>
+        </pc:cxnChg>
+        <pc:cxnChg chg="del mod">
+          <ac:chgData name="York, George W CIV USAF USAFA DF/DFEC" userId="1fb5875a-4594-4db2-80fb-f0db3de11280" providerId="ADAL" clId="{09330963-85FD-4C99-A81B-94D0EE5CFFEB}" dt="2026-03-05T21:24:50.919" v="85" actId="478"/>
+          <ac:cxnSpMkLst>
+            <pc:docMk/>
+            <pc:sldMk cId="1501170907" sldId="256"/>
+            <ac:cxnSpMk id="245" creationId="{44285445-3673-F463-34B1-B7F351676027}"/>
+          </ac:cxnSpMkLst>
+        </pc:cxnChg>
+        <pc:cxnChg chg="mod">
+          <ac:chgData name="York, George W CIV USAF USAFA DF/DFEC" userId="1fb5875a-4594-4db2-80fb-f0db3de11280" providerId="ADAL" clId="{09330963-85FD-4C99-A81B-94D0EE5CFFEB}" dt="2026-03-05T21:13:59.105" v="29" actId="1076"/>
+          <ac:cxnSpMkLst>
+            <pc:docMk/>
+            <pc:sldMk cId="1501170907" sldId="256"/>
+            <ac:cxnSpMk id="269" creationId="{87860765-22E8-2DBF-0155-43937E1810EB}"/>
+          </ac:cxnSpMkLst>
+        </pc:cxnChg>
+        <pc:cxnChg chg="del">
+          <ac:chgData name="York, George W CIV USAF USAFA DF/DFEC" userId="1fb5875a-4594-4db2-80fb-f0db3de11280" providerId="ADAL" clId="{09330963-85FD-4C99-A81B-94D0EE5CFFEB}" dt="2026-03-05T21:13:39.174" v="27" actId="478"/>
+          <ac:cxnSpMkLst>
+            <pc:docMk/>
+            <pc:sldMk cId="1501170907" sldId="256"/>
+            <ac:cxnSpMk id="272" creationId="{E65CDBEF-0F4B-94ED-0527-0710DF016776}"/>
+          </ac:cxnSpMkLst>
+        </pc:cxnChg>
+        <pc:cxnChg chg="mod">
+          <ac:chgData name="York, George W CIV USAF USAFA DF/DFEC" userId="1fb5875a-4594-4db2-80fb-f0db3de11280" providerId="ADAL" clId="{09330963-85FD-4C99-A81B-94D0EE5CFFEB}" dt="2026-03-05T21:16:07.070" v="44" actId="1076"/>
+          <ac:cxnSpMkLst>
+            <pc:docMk/>
+            <pc:sldMk cId="1501170907" sldId="256"/>
+            <ac:cxnSpMk id="275" creationId="{FF5E826E-C5DA-266A-3DEA-9D97594449EE}"/>
+          </ac:cxnSpMkLst>
+        </pc:cxnChg>
+        <pc:cxnChg chg="mod">
+          <ac:chgData name="York, George W CIV USAF USAFA DF/DFEC" userId="1fb5875a-4594-4db2-80fb-f0db3de11280" providerId="ADAL" clId="{09330963-85FD-4C99-A81B-94D0EE5CFFEB}" dt="2026-03-05T21:16:01.985" v="43" actId="1076"/>
+          <ac:cxnSpMkLst>
+            <pc:docMk/>
+            <pc:sldMk cId="1501170907" sldId="256"/>
+            <ac:cxnSpMk id="276" creationId="{370ACF3C-5A72-31AC-3830-8B43C336935F}"/>
+          </ac:cxnSpMkLst>
+        </pc:cxnChg>
+      </pc:sldChg>
+    </pc:docChg>
+  </pc:docChgLst>
+</pc:chgInfo>
+</file>
+
 <file path=ppt/slideLayouts/slideLayout1.xml><?xml version="1.0" encoding="utf-8"?>
 <p:sldLayout xmlns:a="http://schemas.openxmlformats.org/drawingml/2006/main" xmlns:r="http://schemas.openxmlformats.org/officeDocument/2006/relationships" xmlns:p="http://schemas.openxmlformats.org/presentationml/2006/main" type="title" preserve="1">
   <p:cSld name="Title Slide">
@@ -259,7 +688,7 @@
           <a:p>
             <a:fld id="{51AFF834-1BEC-4F95-9622-28B5DCC1FE16}" type="datetimeFigureOut">
               <a:rPr lang="en-US" smtClean="0"/>
-              <a:t>7/1/2025</a:t>
+              <a:t>3/5/2026</a:t>
             </a:fld>
             <a:endParaRPr lang="en-US"/>
           </a:p>
@@ -457,7 +886,7 @@
           <a:p>
             <a:fld id="{51AFF834-1BEC-4F95-9622-28B5DCC1FE16}" type="datetimeFigureOut">
               <a:rPr lang="en-US" smtClean="0"/>
-              <a:t>7/1/2025</a:t>
+              <a:t>3/5/2026</a:t>
             </a:fld>
             <a:endParaRPr lang="en-US"/>
           </a:p>
@@ -665,7 +1094,7 @@
           <a:p>
             <a:fld id="{51AFF834-1BEC-4F95-9622-28B5DCC1FE16}" type="datetimeFigureOut">
               <a:rPr lang="en-US" smtClean="0"/>
-              <a:t>7/1/2025</a:t>
+              <a:t>3/5/2026</a:t>
             </a:fld>
             <a:endParaRPr lang="en-US"/>
           </a:p>
@@ -863,7 +1292,7 @@
           <a:p>
             <a:fld id="{51AFF834-1BEC-4F95-9622-28B5DCC1FE16}" type="datetimeFigureOut">
               <a:rPr lang="en-US" smtClean="0"/>
-              <a:t>7/1/2025</a:t>
+              <a:t>3/5/2026</a:t>
             </a:fld>
             <a:endParaRPr lang="en-US"/>
           </a:p>
@@ -1138,7 +1567,7 @@
           <a:p>
             <a:fld id="{51AFF834-1BEC-4F95-9622-28B5DCC1FE16}" type="datetimeFigureOut">
               <a:rPr lang="en-US" smtClean="0"/>
-              <a:t>7/1/2025</a:t>
+              <a:t>3/5/2026</a:t>
             </a:fld>
             <a:endParaRPr lang="en-US"/>
           </a:p>
@@ -1403,7 +1832,7 @@
           <a:p>
             <a:fld id="{51AFF834-1BEC-4F95-9622-28B5DCC1FE16}" type="datetimeFigureOut">
               <a:rPr lang="en-US" smtClean="0"/>
-              <a:t>7/1/2025</a:t>
+              <a:t>3/5/2026</a:t>
             </a:fld>
             <a:endParaRPr lang="en-US"/>
           </a:p>
@@ -1815,7 +2244,7 @@
           <a:p>
             <a:fld id="{51AFF834-1BEC-4F95-9622-28B5DCC1FE16}" type="datetimeFigureOut">
               <a:rPr lang="en-US" smtClean="0"/>
-              <a:t>7/1/2025</a:t>
+              <a:t>3/5/2026</a:t>
             </a:fld>
             <a:endParaRPr lang="en-US"/>
           </a:p>
@@ -1956,7 +2385,7 @@
           <a:p>
             <a:fld id="{51AFF834-1BEC-4F95-9622-28B5DCC1FE16}" type="datetimeFigureOut">
               <a:rPr lang="en-US" smtClean="0"/>
-              <a:t>7/1/2025</a:t>
+              <a:t>3/5/2026</a:t>
             </a:fld>
             <a:endParaRPr lang="en-US"/>
           </a:p>
@@ -2069,7 +2498,7 @@
           <a:p>
             <a:fld id="{51AFF834-1BEC-4F95-9622-28B5DCC1FE16}" type="datetimeFigureOut">
               <a:rPr lang="en-US" smtClean="0"/>
-              <a:t>7/1/2025</a:t>
+              <a:t>3/5/2026</a:t>
             </a:fld>
             <a:endParaRPr lang="en-US"/>
           </a:p>
@@ -2380,7 +2809,7 @@
           <a:p>
             <a:fld id="{51AFF834-1BEC-4F95-9622-28B5DCC1FE16}" type="datetimeFigureOut">
               <a:rPr lang="en-US" smtClean="0"/>
-              <a:t>7/1/2025</a:t>
+              <a:t>3/5/2026</a:t>
             </a:fld>
             <a:endParaRPr lang="en-US"/>
           </a:p>
@@ -2668,7 +3097,7 @@
           <a:p>
             <a:fld id="{51AFF834-1BEC-4F95-9622-28B5DCC1FE16}" type="datetimeFigureOut">
               <a:rPr lang="en-US" smtClean="0"/>
-              <a:t>7/1/2025</a:t>
+              <a:t>3/5/2026</a:t>
             </a:fld>
             <a:endParaRPr lang="en-US"/>
           </a:p>
@@ -2909,7 +3338,7 @@
           <a:p>
             <a:fld id="{51AFF834-1BEC-4F95-9622-28B5DCC1FE16}" type="datetimeFigureOut">
               <a:rPr lang="en-US" smtClean="0"/>
-              <a:t>7/1/2025</a:t>
+              <a:t>3/5/2026</a:t>
             </a:fld>
             <a:endParaRPr lang="en-US"/>
           </a:p>
@@ -3326,6 +3755,36 @@
           <a:chExt cx="0" cy="0"/>
         </a:xfrm>
       </p:grpSpPr>
+      <p:pic>
+        <p:nvPicPr>
+          <p:cNvPr id="75" name="Picture 74">
+            <a:extLst>
+              <a:ext uri="{FF2B5EF4-FFF2-40B4-BE49-F238E27FC236}">
+                <a16:creationId xmlns:a16="http://schemas.microsoft.com/office/drawing/2014/main" id="{D45FA400-FFFB-FCFC-1CEA-7CA1E4519E91}"/>
+              </a:ext>
+            </a:extLst>
+          </p:cNvPr>
+          <p:cNvPicPr>
+            <a:picLocks noChangeAspect="1"/>
+          </p:cNvPicPr>
+          <p:nvPr/>
+        </p:nvPicPr>
+        <p:blipFill>
+          <a:blip r:embed="rId2"/>
+          <a:stretch>
+            <a:fillRect/>
+          </a:stretch>
+        </p:blipFill>
+        <p:spPr>
+          <a:xfrm>
+            <a:off x="2899612" y="3237305"/>
+            <a:ext cx="503999" cy="267608"/>
+          </a:xfrm>
+          <a:prstGeom prst="rect">
+            <a:avLst/>
+          </a:prstGeom>
+        </p:spPr>
+      </p:pic>
       <p:sp>
         <p:nvSpPr>
           <p:cNvPr id="4" name="TextBox 3">
@@ -5923,7 +6382,7 @@
         </p:nvCxnSpPr>
         <p:spPr>
           <a:xfrm>
-            <a:off x="3216369" y="3387564"/>
+            <a:off x="2870131" y="3309402"/>
             <a:ext cx="177808" cy="0"/>
           </a:xfrm>
           <a:prstGeom prst="straightConnector1">
@@ -6488,207 +6947,6 @@
           </a:fontRef>
         </p:style>
       </p:cxnSp>
-      <p:sp>
-        <p:nvSpPr>
-          <p:cNvPr id="145" name="Rectangle 144">
-            <a:extLst>
-              <a:ext uri="{FF2B5EF4-FFF2-40B4-BE49-F238E27FC236}">
-                <a16:creationId xmlns:a16="http://schemas.microsoft.com/office/drawing/2014/main" id="{D48BF948-61BF-AC37-8597-388094170D18}"/>
-              </a:ext>
-            </a:extLst>
-          </p:cNvPr>
-          <p:cNvSpPr/>
-          <p:nvPr/>
-        </p:nvSpPr>
-        <p:spPr>
-          <a:xfrm>
-            <a:off x="8073953" y="3976514"/>
-            <a:ext cx="865785" cy="1056594"/>
-          </a:xfrm>
-          <a:prstGeom prst="rect">
-            <a:avLst/>
-          </a:prstGeom>
-          <a:solidFill>
-            <a:schemeClr val="bg1"/>
-          </a:solidFill>
-        </p:spPr>
-        <p:style>
-          <a:lnRef idx="2">
-            <a:schemeClr val="accent1">
-              <a:shade val="15000"/>
-            </a:schemeClr>
-          </a:lnRef>
-          <a:fillRef idx="1">
-            <a:schemeClr val="accent1"/>
-          </a:fillRef>
-          <a:effectRef idx="0">
-            <a:schemeClr val="accent1"/>
-          </a:effectRef>
-          <a:fontRef idx="minor">
-            <a:schemeClr val="lt1"/>
-          </a:fontRef>
-        </p:style>
-        <p:txBody>
-          <a:bodyPr rtlCol="0" anchor="ctr"/>
-          <a:lstStyle/>
-          <a:p>
-            <a:pPr algn="ctr"/>
-            <a:r>
-              <a:rPr lang="en-US" dirty="0"/>
-              <a:t>PC</a:t>
-            </a:r>
-          </a:p>
-        </p:txBody>
-      </p:sp>
-      <p:sp>
-        <p:nvSpPr>
-          <p:cNvPr id="146" name="TextBox 145">
-            <a:extLst>
-              <a:ext uri="{FF2B5EF4-FFF2-40B4-BE49-F238E27FC236}">
-                <a16:creationId xmlns:a16="http://schemas.microsoft.com/office/drawing/2014/main" id="{69719632-7E59-F7B2-AEF4-E4C30AA0AEF2}"/>
-              </a:ext>
-            </a:extLst>
-          </p:cNvPr>
-          <p:cNvSpPr txBox="1"/>
-          <p:nvPr/>
-        </p:nvSpPr>
-        <p:spPr>
-          <a:xfrm>
-            <a:off x="8252423" y="3945511"/>
-            <a:ext cx="527709" cy="400110"/>
-          </a:xfrm>
-          <a:prstGeom prst="rect">
-            <a:avLst/>
-          </a:prstGeom>
-          <a:noFill/>
-        </p:spPr>
-        <p:txBody>
-          <a:bodyPr wrap="none" rtlCol="0">
-            <a:spAutoFit/>
-          </a:bodyPr>
-          <a:lstStyle/>
-          <a:p>
-            <a:pPr algn="ctr"/>
-            <a:r>
-              <a:rPr lang="en-US" sz="1000" dirty="0"/>
-              <a:t>Offset</a:t>
-            </a:r>
-          </a:p>
-          <a:p>
-            <a:pPr algn="ctr"/>
-            <a:endParaRPr lang="en-US" sz="1000" dirty="0"/>
-          </a:p>
-        </p:txBody>
-      </p:sp>
-      <p:sp>
-        <p:nvSpPr>
-          <p:cNvPr id="148" name="TextBox 147">
-            <a:extLst>
-              <a:ext uri="{FF2B5EF4-FFF2-40B4-BE49-F238E27FC236}">
-                <a16:creationId xmlns:a16="http://schemas.microsoft.com/office/drawing/2014/main" id="{6432B689-7D1C-F807-6B45-D8272427DA3A}"/>
-              </a:ext>
-            </a:extLst>
-          </p:cNvPr>
-          <p:cNvSpPr txBox="1"/>
-          <p:nvPr/>
-        </p:nvSpPr>
-        <p:spPr>
-          <a:xfrm>
-            <a:off x="8023507" y="4194029"/>
-            <a:ext cx="413896" cy="230832"/>
-          </a:xfrm>
-          <a:prstGeom prst="rect">
-            <a:avLst/>
-          </a:prstGeom>
-          <a:noFill/>
-        </p:spPr>
-        <p:txBody>
-          <a:bodyPr wrap="none" rtlCol="0">
-            <a:spAutoFit/>
-          </a:bodyPr>
-          <a:lstStyle/>
-          <a:p>
-            <a:pPr algn="ctr"/>
-            <a:r>
-              <a:rPr lang="en-US" sz="900" dirty="0"/>
-              <a:t>NPC</a:t>
-            </a:r>
-          </a:p>
-        </p:txBody>
-      </p:sp>
-      <p:sp>
-        <p:nvSpPr>
-          <p:cNvPr id="149" name="TextBox 148">
-            <a:extLst>
-              <a:ext uri="{FF2B5EF4-FFF2-40B4-BE49-F238E27FC236}">
-                <a16:creationId xmlns:a16="http://schemas.microsoft.com/office/drawing/2014/main" id="{831B5896-D57B-4667-02CD-6AAF11DEE5E2}"/>
-              </a:ext>
-            </a:extLst>
-          </p:cNvPr>
-          <p:cNvSpPr txBox="1"/>
-          <p:nvPr/>
-        </p:nvSpPr>
-        <p:spPr>
-          <a:xfrm>
-            <a:off x="8037782" y="4384148"/>
-            <a:ext cx="407484" cy="230832"/>
-          </a:xfrm>
-          <a:prstGeom prst="rect">
-            <a:avLst/>
-          </a:prstGeom>
-          <a:noFill/>
-        </p:spPr>
-        <p:txBody>
-          <a:bodyPr wrap="none" rtlCol="0">
-            <a:spAutoFit/>
-          </a:bodyPr>
-          <a:lstStyle/>
-          <a:p>
-            <a:pPr algn="ctr"/>
-            <a:r>
-              <a:rPr lang="en-US" sz="900" dirty="0" err="1"/>
-              <a:t>imm</a:t>
-            </a:r>
-            <a:endParaRPr lang="en-US" sz="900" dirty="0"/>
-          </a:p>
-        </p:txBody>
-      </p:sp>
-      <p:sp>
-        <p:nvSpPr>
-          <p:cNvPr id="151" name="TextBox 150">
-            <a:extLst>
-              <a:ext uri="{FF2B5EF4-FFF2-40B4-BE49-F238E27FC236}">
-                <a16:creationId xmlns:a16="http://schemas.microsoft.com/office/drawing/2014/main" id="{BC6DDD09-EA41-1470-2429-DBE27164913F}"/>
-              </a:ext>
-            </a:extLst>
-          </p:cNvPr>
-          <p:cNvSpPr txBox="1"/>
-          <p:nvPr/>
-        </p:nvSpPr>
-        <p:spPr>
-          <a:xfrm>
-            <a:off x="8224994" y="4611234"/>
-            <a:ext cx="713658" cy="230832"/>
-          </a:xfrm>
-          <a:prstGeom prst="rect">
-            <a:avLst/>
-          </a:prstGeom>
-          <a:noFill/>
-        </p:spPr>
-        <p:txBody>
-          <a:bodyPr wrap="none" rtlCol="0">
-            <a:spAutoFit/>
-          </a:bodyPr>
-          <a:lstStyle/>
-          <a:p>
-            <a:pPr algn="ctr"/>
-            <a:r>
-              <a:rPr lang="en-US" sz="900" dirty="0"/>
-              <a:t>Branch PC</a:t>
-            </a:r>
-          </a:p>
-        </p:txBody>
-      </p:sp>
       <p:cxnSp>
         <p:nvCxnSpPr>
           <p:cNvPr id="152" name="Straight Arrow Connector 151">
@@ -6705,163 +6963,8 @@
         </p:nvCxnSpPr>
         <p:spPr>
           <a:xfrm>
-            <a:off x="8937730" y="4726650"/>
+            <a:off x="8930725" y="4560055"/>
             <a:ext cx="374301" cy="0"/>
-          </a:xfrm>
-          <a:prstGeom prst="straightConnector1">
-            <a:avLst/>
-          </a:prstGeom>
-          <a:ln>
-            <a:tailEnd type="triangle"/>
-          </a:ln>
-        </p:spPr>
-        <p:style>
-          <a:lnRef idx="2">
-            <a:schemeClr val="accent1"/>
-          </a:lnRef>
-          <a:fillRef idx="0">
-            <a:schemeClr val="accent1"/>
-          </a:fillRef>
-          <a:effectRef idx="1">
-            <a:schemeClr val="accent1"/>
-          </a:effectRef>
-          <a:fontRef idx="minor">
-            <a:schemeClr val="tx1"/>
-          </a:fontRef>
-        </p:style>
-      </p:cxnSp>
-      <p:cxnSp>
-        <p:nvCxnSpPr>
-          <p:cNvPr id="153" name="Straight Arrow Connector 152">
-            <a:extLst>
-              <a:ext uri="{FF2B5EF4-FFF2-40B4-BE49-F238E27FC236}">
-                <a16:creationId xmlns:a16="http://schemas.microsoft.com/office/drawing/2014/main" id="{F030B5C6-68FA-2DA5-919A-5B353DA9C1A8}"/>
-              </a:ext>
-            </a:extLst>
-          </p:cNvPr>
-          <p:cNvCxnSpPr/>
-          <p:nvPr/>
-        </p:nvCxnSpPr>
-        <p:spPr>
-          <a:xfrm>
-            <a:off x="7896145" y="4306947"/>
-            <a:ext cx="177808" cy="0"/>
-          </a:xfrm>
-          <a:prstGeom prst="straightConnector1">
-            <a:avLst/>
-          </a:prstGeom>
-          <a:ln>
-            <a:tailEnd type="triangle"/>
-          </a:ln>
-        </p:spPr>
-        <p:style>
-          <a:lnRef idx="2">
-            <a:schemeClr val="accent1"/>
-          </a:lnRef>
-          <a:fillRef idx="0">
-            <a:schemeClr val="accent1"/>
-          </a:fillRef>
-          <a:effectRef idx="1">
-            <a:schemeClr val="accent1"/>
-          </a:effectRef>
-          <a:fontRef idx="minor">
-            <a:schemeClr val="tx1"/>
-          </a:fontRef>
-        </p:style>
-      </p:cxnSp>
-      <p:cxnSp>
-        <p:nvCxnSpPr>
-          <p:cNvPr id="154" name="Straight Arrow Connector 153">
-            <a:extLst>
-              <a:ext uri="{FF2B5EF4-FFF2-40B4-BE49-F238E27FC236}">
-                <a16:creationId xmlns:a16="http://schemas.microsoft.com/office/drawing/2014/main" id="{9779A5A3-D9AC-4884-E09E-088355A5273D}"/>
-              </a:ext>
-            </a:extLst>
-          </p:cNvPr>
-          <p:cNvCxnSpPr/>
-          <p:nvPr/>
-        </p:nvCxnSpPr>
-        <p:spPr>
-          <a:xfrm>
-            <a:off x="7896145" y="4507267"/>
-            <a:ext cx="177808" cy="0"/>
-          </a:xfrm>
-          <a:prstGeom prst="straightConnector1">
-            <a:avLst/>
-          </a:prstGeom>
-          <a:ln>
-            <a:tailEnd type="triangle"/>
-          </a:ln>
-        </p:spPr>
-        <p:style>
-          <a:lnRef idx="2">
-            <a:schemeClr val="accent1"/>
-          </a:lnRef>
-          <a:fillRef idx="0">
-            <a:schemeClr val="accent1"/>
-          </a:fillRef>
-          <a:effectRef idx="1">
-            <a:schemeClr val="accent1"/>
-          </a:effectRef>
-          <a:fontRef idx="minor">
-            <a:schemeClr val="tx1"/>
-          </a:fontRef>
-        </p:style>
-      </p:cxnSp>
-      <p:sp>
-        <p:nvSpPr>
-          <p:cNvPr id="155" name="TextBox 154">
-            <a:extLst>
-              <a:ext uri="{FF2B5EF4-FFF2-40B4-BE49-F238E27FC236}">
-                <a16:creationId xmlns:a16="http://schemas.microsoft.com/office/drawing/2014/main" id="{75FA3F6B-D94A-A494-28FD-7D4F921979A2}"/>
-              </a:ext>
-            </a:extLst>
-          </p:cNvPr>
-          <p:cNvSpPr txBox="1"/>
-          <p:nvPr/>
-        </p:nvSpPr>
-        <p:spPr>
-          <a:xfrm>
-            <a:off x="8311407" y="4765177"/>
-            <a:ext cx="620684" cy="230832"/>
-          </a:xfrm>
-          <a:prstGeom prst="rect">
-            <a:avLst/>
-          </a:prstGeom>
-          <a:noFill/>
-        </p:spPr>
-        <p:txBody>
-          <a:bodyPr wrap="none" rtlCol="0">
-            <a:spAutoFit/>
-          </a:bodyPr>
-          <a:lstStyle/>
-          <a:p>
-            <a:pPr algn="ctr"/>
-            <a:r>
-              <a:rPr lang="en-US" sz="900" dirty="0"/>
-              <a:t>Jump PC</a:t>
-            </a:r>
-          </a:p>
-        </p:txBody>
-      </p:sp>
-      <p:cxnSp>
-        <p:nvCxnSpPr>
-          <p:cNvPr id="156" name="Straight Arrow Connector 155">
-            <a:extLst>
-              <a:ext uri="{FF2B5EF4-FFF2-40B4-BE49-F238E27FC236}">
-                <a16:creationId xmlns:a16="http://schemas.microsoft.com/office/drawing/2014/main" id="{4E8E377D-848A-C4CD-E531-28E5114DF352}"/>
-              </a:ext>
-            </a:extLst>
-          </p:cNvPr>
-          <p:cNvCxnSpPr>
-            <a:cxnSpLocks/>
-          </p:cNvCxnSpPr>
-          <p:nvPr/>
-        </p:nvCxnSpPr>
-        <p:spPr>
-          <a:xfrm>
-            <a:off x="8937730" y="4895500"/>
-            <a:ext cx="379410" cy="0"/>
           </a:xfrm>
           <a:prstGeom prst="straightConnector1">
             <a:avLst/>
@@ -6937,7 +7040,7 @@
         </p:nvSpPr>
         <p:spPr>
           <a:xfrm>
-            <a:off x="7559719" y="4194029"/>
+            <a:off x="7868407" y="4099798"/>
             <a:ext cx="413896" cy="230832"/>
           </a:xfrm>
           <a:prstGeom prst="rect">
@@ -6973,7 +7076,7 @@
         </p:nvSpPr>
         <p:spPr>
           <a:xfrm>
-            <a:off x="7553125" y="4380402"/>
+            <a:off x="7871560" y="4515171"/>
             <a:ext cx="407484" cy="230832"/>
           </a:xfrm>
           <a:prstGeom prst="rect">
@@ -8422,48 +8525,6 @@
           </a:fontRef>
         </p:style>
       </p:cxnSp>
-      <p:cxnSp>
-        <p:nvCxnSpPr>
-          <p:cNvPr id="245" name="Straight Arrow Connector 244">
-            <a:extLst>
-              <a:ext uri="{FF2B5EF4-FFF2-40B4-BE49-F238E27FC236}">
-                <a16:creationId xmlns:a16="http://schemas.microsoft.com/office/drawing/2014/main" id="{44285445-3673-F463-34B1-B7F351676027}"/>
-              </a:ext>
-            </a:extLst>
-          </p:cNvPr>
-          <p:cNvCxnSpPr/>
-          <p:nvPr/>
-        </p:nvCxnSpPr>
-        <p:spPr>
-          <a:xfrm flipV="1">
-            <a:off x="8716191" y="2434882"/>
-            <a:ext cx="0" cy="167673"/>
-          </a:xfrm>
-          <a:prstGeom prst="straightConnector1">
-            <a:avLst/>
-          </a:prstGeom>
-          <a:ln>
-            <a:solidFill>
-              <a:srgbClr val="FF0000"/>
-            </a:solidFill>
-            <a:tailEnd type="triangle"/>
-          </a:ln>
-        </p:spPr>
-        <p:style>
-          <a:lnRef idx="2">
-            <a:schemeClr val="accent1"/>
-          </a:lnRef>
-          <a:fillRef idx="0">
-            <a:schemeClr val="accent1"/>
-          </a:fillRef>
-          <a:effectRef idx="1">
-            <a:schemeClr val="accent1"/>
-          </a:effectRef>
-          <a:fontRef idx="minor">
-            <a:schemeClr val="tx1"/>
-          </a:fontRef>
-        </p:style>
-      </p:cxnSp>
       <p:grpSp>
         <p:nvGrpSpPr>
           <p:cNvPr id="247" name="Group 246">
@@ -8944,7 +9005,7 @@
         </p:nvCxnSpPr>
         <p:spPr>
           <a:xfrm flipV="1">
-            <a:off x="9204837" y="4520967"/>
+            <a:off x="9214921" y="4718145"/>
             <a:ext cx="100338" cy="2498"/>
           </a:xfrm>
           <a:prstGeom prst="straightConnector1">
@@ -8983,7 +9044,7 @@
         </p:nvSpPr>
         <p:spPr>
           <a:xfrm>
-            <a:off x="8882744" y="4402632"/>
+            <a:off x="8892828" y="4599810"/>
             <a:ext cx="413896" cy="230832"/>
           </a:xfrm>
           <a:prstGeom prst="rect">
@@ -9007,96 +9068,19 @@
       </p:sp>
       <p:cxnSp>
         <p:nvCxnSpPr>
-          <p:cNvPr id="272" name="Straight Arrow Connector 271">
-            <a:extLst>
-              <a:ext uri="{FF2B5EF4-FFF2-40B4-BE49-F238E27FC236}">
-                <a16:creationId xmlns:a16="http://schemas.microsoft.com/office/drawing/2014/main" id="{E65CDBEF-0F4B-94ED-0527-0710DF016776}"/>
-              </a:ext>
-            </a:extLst>
-          </p:cNvPr>
-          <p:cNvCxnSpPr>
-            <a:cxnSpLocks/>
-          </p:cNvCxnSpPr>
+          <p:cNvPr id="275" name="Straight Arrow Connector 274">
+            <a:extLst>
+              <a:ext uri="{FF2B5EF4-FFF2-40B4-BE49-F238E27FC236}">
+                <a16:creationId xmlns:a16="http://schemas.microsoft.com/office/drawing/2014/main" id="{FF5E826E-C5DA-266A-3DEA-9D97594449EE}"/>
+              </a:ext>
+            </a:extLst>
+          </p:cNvPr>
+          <p:cNvCxnSpPr/>
           <p:nvPr/>
         </p:nvCxnSpPr>
         <p:spPr>
-          <a:xfrm flipV="1">
-            <a:off x="9215290" y="4321626"/>
-            <a:ext cx="100338" cy="2498"/>
-          </a:xfrm>
-          <a:prstGeom prst="straightConnector1">
-            <a:avLst/>
-          </a:prstGeom>
-          <a:ln>
-            <a:tailEnd type="triangle"/>
-          </a:ln>
-        </p:spPr>
-        <p:style>
-          <a:lnRef idx="2">
-            <a:schemeClr val="accent1"/>
-          </a:lnRef>
-          <a:fillRef idx="0">
-            <a:schemeClr val="accent1"/>
-          </a:fillRef>
-          <a:effectRef idx="1">
-            <a:schemeClr val="accent1"/>
-          </a:effectRef>
-          <a:fontRef idx="minor">
-            <a:schemeClr val="tx1"/>
-          </a:fontRef>
-        </p:style>
-      </p:cxnSp>
-      <p:sp>
-        <p:nvSpPr>
-          <p:cNvPr id="273" name="TextBox 272">
-            <a:extLst>
-              <a:ext uri="{FF2B5EF4-FFF2-40B4-BE49-F238E27FC236}">
-                <a16:creationId xmlns:a16="http://schemas.microsoft.com/office/drawing/2014/main" id="{53C6712A-701A-7D00-06ED-4806B8BE36CF}"/>
-              </a:ext>
-            </a:extLst>
-          </p:cNvPr>
-          <p:cNvSpPr txBox="1"/>
-          <p:nvPr/>
-        </p:nvSpPr>
-        <p:spPr>
-          <a:xfrm>
-            <a:off x="8952137" y="4215214"/>
-            <a:ext cx="332142" cy="230832"/>
-          </a:xfrm>
-          <a:prstGeom prst="rect">
-            <a:avLst/>
-          </a:prstGeom>
-          <a:noFill/>
-        </p:spPr>
-        <p:txBody>
-          <a:bodyPr wrap="none" rtlCol="0">
-            <a:spAutoFit/>
-          </a:bodyPr>
-          <a:lstStyle/>
-          <a:p>
-            <a:pPr algn="ctr"/>
-            <a:r>
-              <a:rPr lang="en-US" sz="900" dirty="0"/>
-              <a:t>PC</a:t>
-            </a:r>
-          </a:p>
-        </p:txBody>
-      </p:sp>
-      <p:cxnSp>
-        <p:nvCxnSpPr>
-          <p:cNvPr id="275" name="Straight Arrow Connector 274">
-            <a:extLst>
-              <a:ext uri="{FF2B5EF4-FFF2-40B4-BE49-F238E27FC236}">
-                <a16:creationId xmlns:a16="http://schemas.microsoft.com/office/drawing/2014/main" id="{FF5E826E-C5DA-266A-3DEA-9D97594449EE}"/>
-              </a:ext>
-            </a:extLst>
-          </p:cNvPr>
-          <p:cNvCxnSpPr/>
-          <p:nvPr/>
-        </p:nvCxnSpPr>
-        <p:spPr>
-          <a:xfrm>
-            <a:off x="9506818" y="4099798"/>
+          <a:xfrm>
+            <a:off x="9424268" y="4047113"/>
             <a:ext cx="0" cy="230832"/>
           </a:xfrm>
           <a:prstGeom prst="straightConnector1">
@@ -9140,7 +9124,7 @@
         </p:nvCxnSpPr>
         <p:spPr>
           <a:xfrm>
-            <a:off x="9389588" y="3591169"/>
+            <a:off x="9376888" y="3598400"/>
             <a:ext cx="0" cy="650213"/>
           </a:xfrm>
           <a:prstGeom prst="straightConnector1">
@@ -10259,6 +10243,998 @@
           </a:p>
         </p:txBody>
       </p:sp>
+      <p:sp>
+        <p:nvSpPr>
+          <p:cNvPr id="2" name="TextBox 1">
+            <a:extLst>
+              <a:ext uri="{FF2B5EF4-FFF2-40B4-BE49-F238E27FC236}">
+                <a16:creationId xmlns:a16="http://schemas.microsoft.com/office/drawing/2014/main" id="{8150CAF1-DAFF-41B1-37D9-3AA58EDF71DA}"/>
+              </a:ext>
+            </a:extLst>
+          </p:cNvPr>
+          <p:cNvSpPr txBox="1"/>
+          <p:nvPr/>
+        </p:nvSpPr>
+        <p:spPr>
+          <a:xfrm>
+            <a:off x="8640052" y="3387564"/>
+            <a:ext cx="671979" cy="230832"/>
+          </a:xfrm>
+          <a:prstGeom prst="rect">
+            <a:avLst/>
+          </a:prstGeom>
+          <a:noFill/>
+        </p:spPr>
+        <p:txBody>
+          <a:bodyPr wrap="none" rtlCol="0">
+            <a:spAutoFit/>
+          </a:bodyPr>
+          <a:lstStyle/>
+          <a:p>
+            <a:pPr algn="ctr"/>
+            <a:r>
+              <a:rPr lang="en-US" sz="900" dirty="0"/>
+              <a:t>Not equal</a:t>
+            </a:r>
+          </a:p>
+        </p:txBody>
+      </p:sp>
+      <p:grpSp>
+        <p:nvGrpSpPr>
+          <p:cNvPr id="3" name="Group 2">
+            <a:extLst>
+              <a:ext uri="{FF2B5EF4-FFF2-40B4-BE49-F238E27FC236}">
+                <a16:creationId xmlns:a16="http://schemas.microsoft.com/office/drawing/2014/main" id="{F0E20165-74AC-DD4D-AA48-ADD102893E58}"/>
+              </a:ext>
+            </a:extLst>
+          </p:cNvPr>
+          <p:cNvGrpSpPr/>
+          <p:nvPr/>
+        </p:nvGrpSpPr>
+        <p:grpSpPr>
+          <a:xfrm>
+            <a:off x="8407592" y="4109253"/>
+            <a:ext cx="292770" cy="637674"/>
+            <a:chOff x="1074820" y="1507958"/>
+            <a:chExt cx="292770" cy="637674"/>
+          </a:xfrm>
+        </p:grpSpPr>
+        <p:cxnSp>
+          <p:nvCxnSpPr>
+            <p:cNvPr id="10" name="Straight Connector 9">
+              <a:extLst>
+                <a:ext uri="{FF2B5EF4-FFF2-40B4-BE49-F238E27FC236}">
+                  <a16:creationId xmlns:a16="http://schemas.microsoft.com/office/drawing/2014/main" id="{F8960DDE-F577-2D0B-E329-28A527662C2D}"/>
+                </a:ext>
+              </a:extLst>
+            </p:cNvPr>
+            <p:cNvCxnSpPr>
+              <a:cxnSpLocks/>
+            </p:cNvCxnSpPr>
+            <p:nvPr/>
+          </p:nvCxnSpPr>
+          <p:spPr>
+            <a:xfrm>
+              <a:off x="1074821" y="1507958"/>
+              <a:ext cx="0" cy="212558"/>
+            </a:xfrm>
+            <a:prstGeom prst="line">
+              <a:avLst/>
+            </a:prstGeom>
+          </p:spPr>
+          <p:style>
+            <a:lnRef idx="2">
+              <a:schemeClr val="accent1"/>
+            </a:lnRef>
+            <a:fillRef idx="0">
+              <a:schemeClr val="accent1"/>
+            </a:fillRef>
+            <a:effectRef idx="1">
+              <a:schemeClr val="accent1"/>
+            </a:effectRef>
+            <a:fontRef idx="minor">
+              <a:schemeClr val="tx1"/>
+            </a:fontRef>
+          </p:style>
+        </p:cxnSp>
+        <p:cxnSp>
+          <p:nvCxnSpPr>
+            <p:cNvPr id="17" name="Straight Connector 16">
+              <a:extLst>
+                <a:ext uri="{FF2B5EF4-FFF2-40B4-BE49-F238E27FC236}">
+                  <a16:creationId xmlns:a16="http://schemas.microsoft.com/office/drawing/2014/main" id="{0A06088D-98A3-A19E-21B7-06392BDC9225}"/>
+                </a:ext>
+              </a:extLst>
+            </p:cNvPr>
+            <p:cNvCxnSpPr>
+              <a:cxnSpLocks/>
+            </p:cNvCxnSpPr>
+            <p:nvPr/>
+          </p:nvCxnSpPr>
+          <p:spPr>
+            <a:xfrm>
+              <a:off x="1367590" y="1720516"/>
+              <a:ext cx="0" cy="212558"/>
+            </a:xfrm>
+            <a:prstGeom prst="line">
+              <a:avLst/>
+            </a:prstGeom>
+          </p:spPr>
+          <p:style>
+            <a:lnRef idx="2">
+              <a:schemeClr val="accent1"/>
+            </a:lnRef>
+            <a:fillRef idx="0">
+              <a:schemeClr val="accent1"/>
+            </a:fillRef>
+            <a:effectRef idx="1">
+              <a:schemeClr val="accent1"/>
+            </a:effectRef>
+            <a:fontRef idx="minor">
+              <a:schemeClr val="tx1"/>
+            </a:fontRef>
+          </p:style>
+        </p:cxnSp>
+        <p:cxnSp>
+          <p:nvCxnSpPr>
+            <p:cNvPr id="18" name="Straight Connector 17">
+              <a:extLst>
+                <a:ext uri="{FF2B5EF4-FFF2-40B4-BE49-F238E27FC236}">
+                  <a16:creationId xmlns:a16="http://schemas.microsoft.com/office/drawing/2014/main" id="{67D1D89E-75CE-1BE7-C5F4-51F595DF5A7B}"/>
+                </a:ext>
+              </a:extLst>
+            </p:cNvPr>
+            <p:cNvCxnSpPr>
+              <a:cxnSpLocks/>
+            </p:cNvCxnSpPr>
+            <p:nvPr/>
+          </p:nvCxnSpPr>
+          <p:spPr>
+            <a:xfrm>
+              <a:off x="1074821" y="1933074"/>
+              <a:ext cx="0" cy="212558"/>
+            </a:xfrm>
+            <a:prstGeom prst="line">
+              <a:avLst/>
+            </a:prstGeom>
+          </p:spPr>
+          <p:style>
+            <a:lnRef idx="2">
+              <a:schemeClr val="accent1"/>
+            </a:lnRef>
+            <a:fillRef idx="0">
+              <a:schemeClr val="accent1"/>
+            </a:fillRef>
+            <a:effectRef idx="1">
+              <a:schemeClr val="accent1"/>
+            </a:effectRef>
+            <a:fontRef idx="minor">
+              <a:schemeClr val="tx1"/>
+            </a:fontRef>
+          </p:style>
+        </p:cxnSp>
+        <p:cxnSp>
+          <p:nvCxnSpPr>
+            <p:cNvPr id="19" name="Straight Connector 18">
+              <a:extLst>
+                <a:ext uri="{FF2B5EF4-FFF2-40B4-BE49-F238E27FC236}">
+                  <a16:creationId xmlns:a16="http://schemas.microsoft.com/office/drawing/2014/main" id="{887A6830-E015-B38A-0059-D14AC408B769}"/>
+                </a:ext>
+              </a:extLst>
+            </p:cNvPr>
+            <p:cNvCxnSpPr>
+              <a:cxnSpLocks/>
+            </p:cNvCxnSpPr>
+            <p:nvPr/>
+          </p:nvCxnSpPr>
+          <p:spPr>
+            <a:xfrm flipH="1">
+              <a:off x="1074821" y="1936227"/>
+              <a:ext cx="292769" cy="209405"/>
+            </a:xfrm>
+            <a:prstGeom prst="line">
+              <a:avLst/>
+            </a:prstGeom>
+          </p:spPr>
+          <p:style>
+            <a:lnRef idx="2">
+              <a:schemeClr val="accent1"/>
+            </a:lnRef>
+            <a:fillRef idx="0">
+              <a:schemeClr val="accent1"/>
+            </a:fillRef>
+            <a:effectRef idx="1">
+              <a:schemeClr val="accent1"/>
+            </a:effectRef>
+            <a:fontRef idx="minor">
+              <a:schemeClr val="tx1"/>
+            </a:fontRef>
+          </p:style>
+        </p:cxnSp>
+        <p:cxnSp>
+          <p:nvCxnSpPr>
+            <p:cNvPr id="20" name="Straight Connector 19">
+              <a:extLst>
+                <a:ext uri="{FF2B5EF4-FFF2-40B4-BE49-F238E27FC236}">
+                  <a16:creationId xmlns:a16="http://schemas.microsoft.com/office/drawing/2014/main" id="{19DBD266-1003-B3C8-0754-4799002739F2}"/>
+                </a:ext>
+              </a:extLst>
+            </p:cNvPr>
+            <p:cNvCxnSpPr>
+              <a:cxnSpLocks/>
+            </p:cNvCxnSpPr>
+            <p:nvPr/>
+          </p:nvCxnSpPr>
+          <p:spPr>
+            <a:xfrm flipH="1" flipV="1">
+              <a:off x="1074821" y="1507958"/>
+              <a:ext cx="292769" cy="215711"/>
+            </a:xfrm>
+            <a:prstGeom prst="line">
+              <a:avLst/>
+            </a:prstGeom>
+          </p:spPr>
+          <p:style>
+            <a:lnRef idx="2">
+              <a:schemeClr val="accent1"/>
+            </a:lnRef>
+            <a:fillRef idx="0">
+              <a:schemeClr val="accent1"/>
+            </a:fillRef>
+            <a:effectRef idx="1">
+              <a:schemeClr val="accent1"/>
+            </a:effectRef>
+            <a:fontRef idx="minor">
+              <a:schemeClr val="tx1"/>
+            </a:fontRef>
+          </p:style>
+        </p:cxnSp>
+        <p:cxnSp>
+          <p:nvCxnSpPr>
+            <p:cNvPr id="21" name="Straight Connector 20">
+              <a:extLst>
+                <a:ext uri="{FF2B5EF4-FFF2-40B4-BE49-F238E27FC236}">
+                  <a16:creationId xmlns:a16="http://schemas.microsoft.com/office/drawing/2014/main" id="{E21776EC-071F-B571-C86B-0A0DA830C4B3}"/>
+                </a:ext>
+              </a:extLst>
+            </p:cNvPr>
+            <p:cNvCxnSpPr>
+              <a:cxnSpLocks/>
+            </p:cNvCxnSpPr>
+            <p:nvPr/>
+          </p:nvCxnSpPr>
+          <p:spPr>
+            <a:xfrm flipV="1">
+              <a:off x="1074821" y="1829948"/>
+              <a:ext cx="140545" cy="103126"/>
+            </a:xfrm>
+            <a:prstGeom prst="line">
+              <a:avLst/>
+            </a:prstGeom>
+          </p:spPr>
+          <p:style>
+            <a:lnRef idx="2">
+              <a:schemeClr val="accent1"/>
+            </a:lnRef>
+            <a:fillRef idx="0">
+              <a:schemeClr val="accent1"/>
+            </a:fillRef>
+            <a:effectRef idx="1">
+              <a:schemeClr val="accent1"/>
+            </a:effectRef>
+            <a:fontRef idx="minor">
+              <a:schemeClr val="tx1"/>
+            </a:fontRef>
+          </p:style>
+        </p:cxnSp>
+        <p:cxnSp>
+          <p:nvCxnSpPr>
+            <p:cNvPr id="23" name="Straight Connector 22">
+              <a:extLst>
+                <a:ext uri="{FF2B5EF4-FFF2-40B4-BE49-F238E27FC236}">
+                  <a16:creationId xmlns:a16="http://schemas.microsoft.com/office/drawing/2014/main" id="{AC7113F7-BE3F-C063-EF42-353858130E84}"/>
+                </a:ext>
+              </a:extLst>
+            </p:cNvPr>
+            <p:cNvCxnSpPr>
+              <a:cxnSpLocks/>
+            </p:cNvCxnSpPr>
+            <p:nvPr/>
+          </p:nvCxnSpPr>
+          <p:spPr>
+            <a:xfrm>
+              <a:off x="1074820" y="1716505"/>
+              <a:ext cx="140545" cy="107137"/>
+            </a:xfrm>
+            <a:prstGeom prst="line">
+              <a:avLst/>
+            </a:prstGeom>
+          </p:spPr>
+          <p:style>
+            <a:lnRef idx="2">
+              <a:schemeClr val="accent1"/>
+            </a:lnRef>
+            <a:fillRef idx="0">
+              <a:schemeClr val="accent1"/>
+            </a:fillRef>
+            <a:effectRef idx="1">
+              <a:schemeClr val="accent1"/>
+            </a:effectRef>
+            <a:fontRef idx="minor">
+              <a:schemeClr val="tx1"/>
+            </a:fontRef>
+          </p:style>
+        </p:cxnSp>
+      </p:grpSp>
+      <p:cxnSp>
+        <p:nvCxnSpPr>
+          <p:cNvPr id="26" name="Straight Arrow Connector 25">
+            <a:extLst>
+              <a:ext uri="{FF2B5EF4-FFF2-40B4-BE49-F238E27FC236}">
+                <a16:creationId xmlns:a16="http://schemas.microsoft.com/office/drawing/2014/main" id="{444F7234-410C-25D4-213C-932ED214CEA2}"/>
+              </a:ext>
+            </a:extLst>
+          </p:cNvPr>
+          <p:cNvCxnSpPr>
+            <a:cxnSpLocks/>
+          </p:cNvCxnSpPr>
+          <p:nvPr/>
+        </p:nvCxnSpPr>
+        <p:spPr>
+          <a:xfrm>
+            <a:off x="8233657" y="4640648"/>
+            <a:ext cx="173935" cy="0"/>
+          </a:xfrm>
+          <a:prstGeom prst="straightConnector1">
+            <a:avLst/>
+          </a:prstGeom>
+          <a:ln>
+            <a:tailEnd type="triangle"/>
+          </a:ln>
+        </p:spPr>
+        <p:style>
+          <a:lnRef idx="2">
+            <a:schemeClr val="accent1"/>
+          </a:lnRef>
+          <a:fillRef idx="0">
+            <a:schemeClr val="accent1"/>
+          </a:fillRef>
+          <a:effectRef idx="1">
+            <a:schemeClr val="accent1"/>
+          </a:effectRef>
+          <a:fontRef idx="minor">
+            <a:schemeClr val="tx1"/>
+          </a:fontRef>
+        </p:style>
+      </p:cxnSp>
+      <p:cxnSp>
+        <p:nvCxnSpPr>
+          <p:cNvPr id="28" name="Straight Arrow Connector 27">
+            <a:extLst>
+              <a:ext uri="{FF2B5EF4-FFF2-40B4-BE49-F238E27FC236}">
+                <a16:creationId xmlns:a16="http://schemas.microsoft.com/office/drawing/2014/main" id="{B33DC5DC-F120-3662-5DC9-4D6D8B08EBA0}"/>
+              </a:ext>
+            </a:extLst>
+          </p:cNvPr>
+          <p:cNvCxnSpPr/>
+          <p:nvPr/>
+        </p:nvCxnSpPr>
+        <p:spPr>
+          <a:xfrm>
+            <a:off x="8229784" y="4215532"/>
+            <a:ext cx="177808" cy="0"/>
+          </a:xfrm>
+          <a:prstGeom prst="straightConnector1">
+            <a:avLst/>
+          </a:prstGeom>
+          <a:ln>
+            <a:tailEnd type="triangle"/>
+          </a:ln>
+        </p:spPr>
+        <p:style>
+          <a:lnRef idx="2">
+            <a:schemeClr val="accent1"/>
+          </a:lnRef>
+          <a:fillRef idx="0">
+            <a:schemeClr val="accent1"/>
+          </a:fillRef>
+          <a:effectRef idx="1">
+            <a:schemeClr val="accent1"/>
+          </a:effectRef>
+          <a:fontRef idx="minor">
+            <a:schemeClr val="tx1"/>
+          </a:fontRef>
+        </p:style>
+      </p:cxnSp>
+      <p:sp>
+        <p:nvSpPr>
+          <p:cNvPr id="30" name="TextBox 29">
+            <a:extLst>
+              <a:ext uri="{FF2B5EF4-FFF2-40B4-BE49-F238E27FC236}">
+                <a16:creationId xmlns:a16="http://schemas.microsoft.com/office/drawing/2014/main" id="{B8ACE971-B3B8-76F7-BEAC-B98AF5AE845F}"/>
+              </a:ext>
+            </a:extLst>
+          </p:cNvPr>
+          <p:cNvSpPr txBox="1"/>
+          <p:nvPr/>
+        </p:nvSpPr>
+        <p:spPr>
+          <a:xfrm>
+            <a:off x="8442429" y="4314065"/>
+            <a:ext cx="351378" cy="230832"/>
+          </a:xfrm>
+          <a:prstGeom prst="rect">
+            <a:avLst/>
+          </a:prstGeom>
+          <a:noFill/>
+        </p:spPr>
+        <p:txBody>
+          <a:bodyPr wrap="none" rtlCol="0">
+            <a:spAutoFit/>
+          </a:bodyPr>
+          <a:lstStyle/>
+          <a:p>
+            <a:pPr algn="ctr"/>
+            <a:r>
+              <a:rPr lang="en-US" sz="900" dirty="0"/>
+              <a:t>“+”</a:t>
+            </a:r>
+          </a:p>
+        </p:txBody>
+      </p:sp>
+      <p:cxnSp>
+        <p:nvCxnSpPr>
+          <p:cNvPr id="35" name="Straight Arrow Connector 34">
+            <a:extLst>
+              <a:ext uri="{FF2B5EF4-FFF2-40B4-BE49-F238E27FC236}">
+                <a16:creationId xmlns:a16="http://schemas.microsoft.com/office/drawing/2014/main" id="{D8C6D111-8409-B69D-7F4D-1EAFFBC86D2F}"/>
+              </a:ext>
+            </a:extLst>
+          </p:cNvPr>
+          <p:cNvCxnSpPr>
+            <a:cxnSpLocks/>
+          </p:cNvCxnSpPr>
+          <p:nvPr/>
+        </p:nvCxnSpPr>
+        <p:spPr>
+          <a:xfrm flipV="1">
+            <a:off x="9192573" y="4893615"/>
+            <a:ext cx="100338" cy="2498"/>
+          </a:xfrm>
+          <a:prstGeom prst="straightConnector1">
+            <a:avLst/>
+          </a:prstGeom>
+          <a:ln>
+            <a:tailEnd type="triangle"/>
+          </a:ln>
+        </p:spPr>
+        <p:style>
+          <a:lnRef idx="2">
+            <a:schemeClr val="accent1"/>
+          </a:lnRef>
+          <a:fillRef idx="0">
+            <a:schemeClr val="accent1"/>
+          </a:fillRef>
+          <a:effectRef idx="1">
+            <a:schemeClr val="accent1"/>
+          </a:effectRef>
+          <a:fontRef idx="minor">
+            <a:schemeClr val="tx1"/>
+          </a:fontRef>
+        </p:style>
+      </p:cxnSp>
+      <p:sp>
+        <p:nvSpPr>
+          <p:cNvPr id="36" name="TextBox 35">
+            <a:extLst>
+              <a:ext uri="{FF2B5EF4-FFF2-40B4-BE49-F238E27FC236}">
+                <a16:creationId xmlns:a16="http://schemas.microsoft.com/office/drawing/2014/main" id="{61EEB1E0-6493-4023-ADC1-CE06FABB4ECF}"/>
+              </a:ext>
+            </a:extLst>
+          </p:cNvPr>
+          <p:cNvSpPr txBox="1"/>
+          <p:nvPr/>
+        </p:nvSpPr>
+        <p:spPr>
+          <a:xfrm>
+            <a:off x="8937784" y="4780084"/>
+            <a:ext cx="332142" cy="230832"/>
+          </a:xfrm>
+          <a:prstGeom prst="rect">
+            <a:avLst/>
+          </a:prstGeom>
+          <a:noFill/>
+        </p:spPr>
+        <p:txBody>
+          <a:bodyPr wrap="none" rtlCol="0">
+            <a:spAutoFit/>
+          </a:bodyPr>
+          <a:lstStyle/>
+          <a:p>
+            <a:pPr algn="ctr"/>
+            <a:r>
+              <a:rPr lang="en-US" sz="900" dirty="0"/>
+              <a:t>PC</a:t>
+            </a:r>
+          </a:p>
+        </p:txBody>
+      </p:sp>
+      <p:cxnSp>
+        <p:nvCxnSpPr>
+          <p:cNvPr id="37" name="Straight Arrow Connector 36">
+            <a:extLst>
+              <a:ext uri="{FF2B5EF4-FFF2-40B4-BE49-F238E27FC236}">
+                <a16:creationId xmlns:a16="http://schemas.microsoft.com/office/drawing/2014/main" id="{EF44754E-6632-B039-2821-0640C926BB12}"/>
+              </a:ext>
+            </a:extLst>
+          </p:cNvPr>
+          <p:cNvCxnSpPr>
+            <a:cxnSpLocks/>
+          </p:cNvCxnSpPr>
+          <p:nvPr/>
+        </p:nvCxnSpPr>
+        <p:spPr>
+          <a:xfrm>
+            <a:off x="8930725" y="4346119"/>
+            <a:ext cx="374301" cy="0"/>
+          </a:xfrm>
+          <a:prstGeom prst="straightConnector1">
+            <a:avLst/>
+          </a:prstGeom>
+          <a:ln>
+            <a:tailEnd type="triangle"/>
+          </a:ln>
+        </p:spPr>
+        <p:style>
+          <a:lnRef idx="2">
+            <a:schemeClr val="accent1"/>
+          </a:lnRef>
+          <a:fillRef idx="0">
+            <a:schemeClr val="accent1"/>
+          </a:fillRef>
+          <a:effectRef idx="1">
+            <a:schemeClr val="accent1"/>
+          </a:effectRef>
+          <a:fontRef idx="minor">
+            <a:schemeClr val="tx1"/>
+          </a:fontRef>
+        </p:style>
+      </p:cxnSp>
+      <p:cxnSp>
+        <p:nvCxnSpPr>
+          <p:cNvPr id="38" name="Straight Arrow Connector 37">
+            <a:extLst>
+              <a:ext uri="{FF2B5EF4-FFF2-40B4-BE49-F238E27FC236}">
+                <a16:creationId xmlns:a16="http://schemas.microsoft.com/office/drawing/2014/main" id="{C974F664-B6FE-876B-6F6D-6B0987070041}"/>
+              </a:ext>
+            </a:extLst>
+          </p:cNvPr>
+          <p:cNvCxnSpPr>
+            <a:cxnSpLocks/>
+          </p:cNvCxnSpPr>
+          <p:nvPr/>
+        </p:nvCxnSpPr>
+        <p:spPr>
+          <a:xfrm>
+            <a:off x="8930725" y="4346119"/>
+            <a:ext cx="0" cy="213936"/>
+          </a:xfrm>
+          <a:prstGeom prst="straightConnector1">
+            <a:avLst/>
+          </a:prstGeom>
+          <a:ln>
+            <a:tailEnd type="none"/>
+          </a:ln>
+        </p:spPr>
+        <p:style>
+          <a:lnRef idx="2">
+            <a:schemeClr val="accent1"/>
+          </a:lnRef>
+          <a:fillRef idx="0">
+            <a:schemeClr val="accent1"/>
+          </a:fillRef>
+          <a:effectRef idx="1">
+            <a:schemeClr val="accent1"/>
+          </a:effectRef>
+          <a:fontRef idx="minor">
+            <a:schemeClr val="tx1"/>
+          </a:fontRef>
+        </p:style>
+      </p:cxnSp>
+      <p:cxnSp>
+        <p:nvCxnSpPr>
+          <p:cNvPr id="52" name="Straight Arrow Connector 51">
+            <a:extLst>
+              <a:ext uri="{FF2B5EF4-FFF2-40B4-BE49-F238E27FC236}">
+                <a16:creationId xmlns:a16="http://schemas.microsoft.com/office/drawing/2014/main" id="{5EB535AF-BDE4-1847-B2CC-ED37430A4C46}"/>
+              </a:ext>
+            </a:extLst>
+          </p:cNvPr>
+          <p:cNvCxnSpPr>
+            <a:cxnSpLocks/>
+          </p:cNvCxnSpPr>
+          <p:nvPr/>
+        </p:nvCxnSpPr>
+        <p:spPr>
+          <a:xfrm>
+            <a:off x="8698040" y="4454260"/>
+            <a:ext cx="232685" cy="0"/>
+          </a:xfrm>
+          <a:prstGeom prst="straightConnector1">
+            <a:avLst/>
+          </a:prstGeom>
+          <a:ln>
+            <a:tailEnd type="none"/>
+          </a:ln>
+        </p:spPr>
+        <p:style>
+          <a:lnRef idx="2">
+            <a:schemeClr val="accent1"/>
+          </a:lnRef>
+          <a:fillRef idx="0">
+            <a:schemeClr val="accent1"/>
+          </a:fillRef>
+          <a:effectRef idx="1">
+            <a:schemeClr val="accent1"/>
+          </a:effectRef>
+          <a:fontRef idx="minor">
+            <a:schemeClr val="tx1"/>
+          </a:fontRef>
+        </p:style>
+      </p:cxnSp>
+      <p:cxnSp>
+        <p:nvCxnSpPr>
+          <p:cNvPr id="54" name="Straight Arrow Connector 53">
+            <a:extLst>
+              <a:ext uri="{FF2B5EF4-FFF2-40B4-BE49-F238E27FC236}">
+                <a16:creationId xmlns:a16="http://schemas.microsoft.com/office/drawing/2014/main" id="{2E8C08F4-6B7C-4580-23CA-753663A3987B}"/>
+              </a:ext>
+            </a:extLst>
+          </p:cNvPr>
+          <p:cNvCxnSpPr/>
+          <p:nvPr/>
+        </p:nvCxnSpPr>
+        <p:spPr>
+          <a:xfrm>
+            <a:off x="9462368" y="4084284"/>
+            <a:ext cx="0" cy="230832"/>
+          </a:xfrm>
+          <a:prstGeom prst="straightConnector1">
+            <a:avLst/>
+          </a:prstGeom>
+          <a:ln>
+            <a:solidFill>
+              <a:srgbClr val="FF0000"/>
+            </a:solidFill>
+            <a:tailEnd type="triangle"/>
+          </a:ln>
+        </p:spPr>
+        <p:style>
+          <a:lnRef idx="2">
+            <a:schemeClr val="accent1"/>
+          </a:lnRef>
+          <a:fillRef idx="0">
+            <a:schemeClr val="accent1"/>
+          </a:fillRef>
+          <a:effectRef idx="1">
+            <a:schemeClr val="accent1"/>
+          </a:effectRef>
+          <a:fontRef idx="minor">
+            <a:schemeClr val="tx1"/>
+          </a:fontRef>
+        </p:style>
+      </p:cxnSp>
+      <p:cxnSp>
+        <p:nvCxnSpPr>
+          <p:cNvPr id="57" name="Straight Arrow Connector 56">
+            <a:extLst>
+              <a:ext uri="{FF2B5EF4-FFF2-40B4-BE49-F238E27FC236}">
+                <a16:creationId xmlns:a16="http://schemas.microsoft.com/office/drawing/2014/main" id="{A9066061-6913-FC84-2215-495F7DB70ED3}"/>
+              </a:ext>
+            </a:extLst>
+          </p:cNvPr>
+          <p:cNvCxnSpPr/>
+          <p:nvPr/>
+        </p:nvCxnSpPr>
+        <p:spPr>
+          <a:xfrm>
+            <a:off x="9514036" y="4115287"/>
+            <a:ext cx="0" cy="230832"/>
+          </a:xfrm>
+          <a:prstGeom prst="straightConnector1">
+            <a:avLst/>
+          </a:prstGeom>
+          <a:ln>
+            <a:solidFill>
+              <a:srgbClr val="FF0000"/>
+            </a:solidFill>
+            <a:tailEnd type="triangle"/>
+          </a:ln>
+        </p:spPr>
+        <p:style>
+          <a:lnRef idx="2">
+            <a:schemeClr val="accent1"/>
+          </a:lnRef>
+          <a:fillRef idx="0">
+            <a:schemeClr val="accent1"/>
+          </a:fillRef>
+          <a:effectRef idx="1">
+            <a:schemeClr val="accent1"/>
+          </a:effectRef>
+          <a:fontRef idx="minor">
+            <a:schemeClr val="tx1"/>
+          </a:fontRef>
+        </p:style>
+      </p:cxnSp>
+      <p:cxnSp>
+        <p:nvCxnSpPr>
+          <p:cNvPr id="58" name="Straight Arrow Connector 57">
+            <a:extLst>
+              <a:ext uri="{FF2B5EF4-FFF2-40B4-BE49-F238E27FC236}">
+                <a16:creationId xmlns:a16="http://schemas.microsoft.com/office/drawing/2014/main" id="{FC65ADDE-BA27-5782-2BA6-2E54CBD9C0C4}"/>
+              </a:ext>
+            </a:extLst>
+          </p:cNvPr>
+          <p:cNvCxnSpPr>
+            <a:cxnSpLocks/>
+          </p:cNvCxnSpPr>
+          <p:nvPr/>
+        </p:nvCxnSpPr>
+        <p:spPr>
+          <a:xfrm flipV="1">
+            <a:off x="10915967" y="3114188"/>
+            <a:ext cx="0" cy="195214"/>
+          </a:xfrm>
+          <a:prstGeom prst="straightConnector1">
+            <a:avLst/>
+          </a:prstGeom>
+          <a:ln>
+            <a:solidFill>
+              <a:srgbClr val="FF0000"/>
+            </a:solidFill>
+            <a:tailEnd type="triangle"/>
+          </a:ln>
+        </p:spPr>
+        <p:style>
+          <a:lnRef idx="2">
+            <a:schemeClr val="accent1"/>
+          </a:lnRef>
+          <a:fillRef idx="0">
+            <a:schemeClr val="accent1"/>
+          </a:fillRef>
+          <a:effectRef idx="1">
+            <a:schemeClr val="accent1"/>
+          </a:effectRef>
+          <a:fontRef idx="minor">
+            <a:schemeClr val="tx1"/>
+          </a:fontRef>
+        </p:style>
+      </p:cxnSp>
+      <p:cxnSp>
+        <p:nvCxnSpPr>
+          <p:cNvPr id="59" name="Straight Arrow Connector 58">
+            <a:extLst>
+              <a:ext uri="{FF2B5EF4-FFF2-40B4-BE49-F238E27FC236}">
+                <a16:creationId xmlns:a16="http://schemas.microsoft.com/office/drawing/2014/main" id="{66D85414-7527-6B63-2578-61E5AA31E7EA}"/>
+              </a:ext>
+            </a:extLst>
+          </p:cNvPr>
+          <p:cNvCxnSpPr>
+            <a:cxnSpLocks/>
+          </p:cNvCxnSpPr>
+          <p:nvPr/>
+        </p:nvCxnSpPr>
+        <p:spPr>
+          <a:xfrm flipV="1">
+            <a:off x="10776267" y="3233786"/>
+            <a:ext cx="0" cy="195214"/>
+          </a:xfrm>
+          <a:prstGeom prst="straightConnector1">
+            <a:avLst/>
+          </a:prstGeom>
+          <a:ln>
+            <a:solidFill>
+              <a:srgbClr val="FF0000"/>
+            </a:solidFill>
+            <a:tailEnd type="triangle"/>
+          </a:ln>
+        </p:spPr>
+        <p:style>
+          <a:lnRef idx="2">
+            <a:schemeClr val="accent1"/>
+          </a:lnRef>
+          <a:fillRef idx="0">
+            <a:schemeClr val="accent1"/>
+          </a:fillRef>
+          <a:effectRef idx="1">
+            <a:schemeClr val="accent1"/>
+          </a:effectRef>
+          <a:fontRef idx="minor">
+            <a:schemeClr val="tx1"/>
+          </a:fontRef>
+        </p:style>
+      </p:cxnSp>
+      <p:cxnSp>
+        <p:nvCxnSpPr>
+          <p:cNvPr id="76" name="Straight Arrow Connector 75">
+            <a:extLst>
+              <a:ext uri="{FF2B5EF4-FFF2-40B4-BE49-F238E27FC236}">
+                <a16:creationId xmlns:a16="http://schemas.microsoft.com/office/drawing/2014/main" id="{9921C9C5-2DFB-C76A-4D92-6A511FF5BBF4}"/>
+              </a:ext>
+            </a:extLst>
+          </p:cNvPr>
+          <p:cNvCxnSpPr/>
+          <p:nvPr/>
+        </p:nvCxnSpPr>
+        <p:spPr>
+          <a:xfrm>
+            <a:off x="2870131" y="3429000"/>
+            <a:ext cx="177808" cy="0"/>
+          </a:xfrm>
+          <a:prstGeom prst="straightConnector1">
+            <a:avLst/>
+          </a:prstGeom>
+          <a:ln>
+            <a:solidFill>
+              <a:srgbClr val="FF0000"/>
+            </a:solidFill>
+            <a:tailEnd type="triangle"/>
+          </a:ln>
+        </p:spPr>
+        <p:style>
+          <a:lnRef idx="2">
+            <a:schemeClr val="accent1"/>
+          </a:lnRef>
+          <a:fillRef idx="0">
+            <a:schemeClr val="accent1"/>
+          </a:fillRef>
+          <a:effectRef idx="1">
+            <a:schemeClr val="accent1"/>
+          </a:effectRef>
+          <a:fontRef idx="minor">
+            <a:schemeClr val="tx1"/>
+          </a:fontRef>
+        </p:style>
+      </p:cxnSp>
+      <p:grpSp>
+        <p:nvGrpSpPr>
+          <p:cNvPr id="86" name="Group 85">
+            <a:extLst>
+              <a:ext uri="{FF2B5EF4-FFF2-40B4-BE49-F238E27FC236}">
+                <a16:creationId xmlns:a16="http://schemas.microsoft.com/office/drawing/2014/main" id="{B7C242C4-9BDE-35B9-11F3-F09FF7C08848}"/>
+              </a:ext>
+            </a:extLst>
+          </p:cNvPr>
+          <p:cNvGrpSpPr/>
+          <p:nvPr/>
+        </p:nvGrpSpPr>
+        <p:grpSpPr>
+          <a:xfrm rot="16200000">
+            <a:off x="8495764" y="2520050"/>
+            <a:ext cx="405246" cy="267608"/>
+            <a:chOff x="6169099" y="3766490"/>
+            <a:chExt cx="533480" cy="267608"/>
+          </a:xfrm>
+        </p:grpSpPr>
+        <p:pic>
+          <p:nvPicPr>
+            <p:cNvPr id="77" name="Picture 76">
+              <a:extLst>
+                <a:ext uri="{FF2B5EF4-FFF2-40B4-BE49-F238E27FC236}">
+                  <a16:creationId xmlns:a16="http://schemas.microsoft.com/office/drawing/2014/main" id="{ADA4DBF6-5BC1-7443-F4A8-C37F2A616150}"/>
+                </a:ext>
+              </a:extLst>
+            </p:cNvPr>
+            <p:cNvPicPr>
+              <a:picLocks noChangeAspect="1"/>
+            </p:cNvPicPr>
+            <p:nvPr/>
+          </p:nvPicPr>
+          <p:blipFill>
+            <a:blip r:embed="rId2"/>
+            <a:stretch>
+              <a:fillRect/>
+            </a:stretch>
+          </p:blipFill>
+          <p:spPr>
+            <a:xfrm>
+              <a:off x="6198580" y="3766490"/>
+              <a:ext cx="503999" cy="267608"/>
+            </a:xfrm>
+            <a:prstGeom prst="rect">
+              <a:avLst/>
+            </a:prstGeom>
+          </p:spPr>
+        </p:pic>
+        <p:cxnSp>
+          <p:nvCxnSpPr>
+            <p:cNvPr id="79" name="Straight Arrow Connector 78">
+              <a:extLst>
+                <a:ext uri="{FF2B5EF4-FFF2-40B4-BE49-F238E27FC236}">
+                  <a16:creationId xmlns:a16="http://schemas.microsoft.com/office/drawing/2014/main" id="{861176B7-9B3B-7106-C3CD-F90CCEF592F1}"/>
+                </a:ext>
+              </a:extLst>
+            </p:cNvPr>
+            <p:cNvCxnSpPr>
+              <a:cxnSpLocks/>
+            </p:cNvCxnSpPr>
+            <p:nvPr/>
+          </p:nvCxnSpPr>
+          <p:spPr>
+            <a:xfrm>
+              <a:off x="6169099" y="3838587"/>
+              <a:ext cx="177808" cy="0"/>
+            </a:xfrm>
+            <a:prstGeom prst="straightConnector1">
+              <a:avLst/>
+            </a:prstGeom>
+            <a:ln>
+              <a:solidFill>
+                <a:srgbClr val="FF0000"/>
+              </a:solidFill>
+              <a:tailEnd type="triangle"/>
+            </a:ln>
+          </p:spPr>
+          <p:style>
+            <a:lnRef idx="2">
+              <a:schemeClr val="accent1"/>
+            </a:lnRef>
+            <a:fillRef idx="0">
+              <a:schemeClr val="accent1"/>
+            </a:fillRef>
+            <a:effectRef idx="1">
+              <a:schemeClr val="accent1"/>
+            </a:effectRef>
+            <a:fontRef idx="minor">
+              <a:schemeClr val="tx1"/>
+            </a:fontRef>
+          </p:style>
+        </p:cxnSp>
+        <p:cxnSp>
+          <p:nvCxnSpPr>
+            <p:cNvPr id="80" name="Straight Arrow Connector 79">
+              <a:extLst>
+                <a:ext uri="{FF2B5EF4-FFF2-40B4-BE49-F238E27FC236}">
+                  <a16:creationId xmlns:a16="http://schemas.microsoft.com/office/drawing/2014/main" id="{6AA41B44-529F-F6BF-0A9B-4AD3BD64CCCA}"/>
+                </a:ext>
+              </a:extLst>
+            </p:cNvPr>
+            <p:cNvCxnSpPr>
+              <a:cxnSpLocks/>
+            </p:cNvCxnSpPr>
+            <p:nvPr/>
+          </p:nvCxnSpPr>
+          <p:spPr>
+            <a:xfrm>
+              <a:off x="6169099" y="3958185"/>
+              <a:ext cx="177808" cy="0"/>
+            </a:xfrm>
+            <a:prstGeom prst="straightConnector1">
+              <a:avLst/>
+            </a:prstGeom>
+            <a:ln>
+              <a:solidFill>
+                <a:srgbClr val="FF0000"/>
+              </a:solidFill>
+              <a:tailEnd type="triangle"/>
+            </a:ln>
+          </p:spPr>
+          <p:style>
+            <a:lnRef idx="2">
+              <a:schemeClr val="accent1"/>
+            </a:lnRef>
+            <a:fillRef idx="0">
+              <a:schemeClr val="accent1"/>
+            </a:fillRef>
+            <a:effectRef idx="1">
+              <a:schemeClr val="accent1"/>
+            </a:effectRef>
+            <a:fontRef idx="minor">
+              <a:schemeClr val="tx1"/>
+            </a:fontRef>
+          </p:style>
+        </p:cxnSp>
+      </p:grpSp>
     </p:spTree>
     <p:extLst>
       <p:ext uri="{BB962C8B-B14F-4D97-AF65-F5344CB8AC3E}">

--- a/RISCVstage1.pptx
+++ b/RISCVstage1.pptx
@@ -115,7 +115,7 @@
 <file path=ppt/revisionInfo.xml><?xml version="1.0" encoding="utf-8"?>
 <p1510:revInfo xmlns:a="http://schemas.openxmlformats.org/drawingml/2006/main" xmlns:r="http://schemas.openxmlformats.org/officeDocument/2006/relationships" xmlns:p1510="http://schemas.microsoft.com/office/powerpoint/2015/10/main">
   <p1510:revLst>
-    <p1510:client id="{166DD0B5-D942-4567-8F05-3DE6A7D9EE97}" v="13" dt="2026-03-05T21:24:27.036"/>
+    <p1510:client id="{166DD0B5-D942-4567-8F05-3DE6A7D9EE97}" v="7" dt="2026-03-10T03:16:48.582"/>
   </p1510:revLst>
 </p1510:revInfo>
 </file>
@@ -125,18 +125,18 @@
   <pc:docChgLst>
     <pc:chgData name="York, George W CIV USAF USAFA DF/DFEC" userId="1fb5875a-4594-4db2-80fb-f0db3de11280" providerId="ADAL" clId="{09330963-85FD-4C99-A81B-94D0EE5CFFEB}"/>
     <pc:docChg chg="undo custSel modSld">
-      <pc:chgData name="York, George W CIV USAF USAFA DF/DFEC" userId="1fb5875a-4594-4db2-80fb-f0db3de11280" providerId="ADAL" clId="{09330963-85FD-4C99-A81B-94D0EE5CFFEB}" dt="2026-03-05T22:27:59.360" v="86" actId="478"/>
+      <pc:chgData name="York, George W CIV USAF USAFA DF/DFEC" userId="1fb5875a-4594-4db2-80fb-f0db3de11280" providerId="ADAL" clId="{09330963-85FD-4C99-A81B-94D0EE5CFFEB}" dt="2026-03-10T03:17:44.219" v="170" actId="1076"/>
       <pc:docMkLst>
         <pc:docMk/>
       </pc:docMkLst>
       <pc:sldChg chg="addSp delSp modSp mod">
-        <pc:chgData name="York, George W CIV USAF USAFA DF/DFEC" userId="1fb5875a-4594-4db2-80fb-f0db3de11280" providerId="ADAL" clId="{09330963-85FD-4C99-A81B-94D0EE5CFFEB}" dt="2026-03-05T22:27:59.360" v="86" actId="478"/>
+        <pc:chgData name="York, George W CIV USAF USAFA DF/DFEC" userId="1fb5875a-4594-4db2-80fb-f0db3de11280" providerId="ADAL" clId="{09330963-85FD-4C99-A81B-94D0EE5CFFEB}" dt="2026-03-10T03:17:44.219" v="170" actId="1076"/>
         <pc:sldMkLst>
           <pc:docMk/>
           <pc:sldMk cId="1501170907" sldId="256"/>
         </pc:sldMkLst>
         <pc:spChg chg="add mod">
-          <ac:chgData name="York, George W CIV USAF USAFA DF/DFEC" userId="1fb5875a-4594-4db2-80fb-f0db3de11280" providerId="ADAL" clId="{09330963-85FD-4C99-A81B-94D0EE5CFFEB}" dt="2026-03-05T21:11:58.592" v="13" actId="1076"/>
+          <ac:chgData name="York, George W CIV USAF USAFA DF/DFEC" userId="1fb5875a-4594-4db2-80fb-f0db3de11280" providerId="ADAL" clId="{09330963-85FD-4C99-A81B-94D0EE5CFFEB}" dt="2026-03-09T19:37:18.425" v="93" actId="1076"/>
           <ac:spMkLst>
             <pc:docMk/>
             <pc:sldMk cId="1501170907" sldId="256"/>
@@ -144,19 +144,35 @@
           </ac:spMkLst>
         </pc:spChg>
         <pc:spChg chg="add mod">
-          <ac:chgData name="York, George W CIV USAF USAFA DF/DFEC" userId="1fb5875a-4594-4db2-80fb-f0db3de11280" providerId="ADAL" clId="{09330963-85FD-4C99-A81B-94D0EE5CFFEB}" dt="2026-03-05T21:12:23.121" v="17" actId="20577"/>
+          <ac:chgData name="York, George W CIV USAF USAFA DF/DFEC" userId="1fb5875a-4594-4db2-80fb-f0db3de11280" providerId="ADAL" clId="{09330963-85FD-4C99-A81B-94D0EE5CFFEB}" dt="2026-03-10T03:17:02.805" v="166" actId="1076"/>
+          <ac:spMkLst>
+            <pc:docMk/>
+            <pc:sldMk cId="1501170907" sldId="256"/>
+            <ac:spMk id="19" creationId="{89294767-9693-12FB-F91B-585DBA590164}"/>
+          </ac:spMkLst>
+        </pc:spChg>
+        <pc:spChg chg="add mod">
+          <ac:chgData name="York, George W CIV USAF USAFA DF/DFEC" userId="1fb5875a-4594-4db2-80fb-f0db3de11280" providerId="ADAL" clId="{09330963-85FD-4C99-A81B-94D0EE5CFFEB}" dt="2026-03-10T03:17:02.805" v="166" actId="1076"/>
+          <ac:spMkLst>
+            <pc:docMk/>
+            <pc:sldMk cId="1501170907" sldId="256"/>
+            <ac:spMk id="20" creationId="{069E7558-662D-A862-C258-A13675E11FD3}"/>
+          </ac:spMkLst>
+        </pc:spChg>
+        <pc:spChg chg="add del mod">
+          <ac:chgData name="York, George W CIV USAF USAFA DF/DFEC" userId="1fb5875a-4594-4db2-80fb-f0db3de11280" providerId="ADAL" clId="{09330963-85FD-4C99-A81B-94D0EE5CFFEB}" dt="2026-03-09T19:38:46.476" v="107" actId="478"/>
           <ac:spMkLst>
             <pc:docMk/>
             <pc:sldMk cId="1501170907" sldId="256"/>
             <ac:spMk id="30" creationId="{B8ACE971-B3B8-76F7-BEAC-B98AF5AE845F}"/>
           </ac:spMkLst>
         </pc:spChg>
-        <pc:spChg chg="add del mod">
-          <ac:chgData name="York, George W CIV USAF USAFA DF/DFEC" userId="1fb5875a-4594-4db2-80fb-f0db3de11280" providerId="ADAL" clId="{09330963-85FD-4C99-A81B-94D0EE5CFFEB}" dt="2026-03-05T21:15:51.480" v="42" actId="478"/>
+        <pc:spChg chg="add mod">
+          <ac:chgData name="York, George W CIV USAF USAFA DF/DFEC" userId="1fb5875a-4594-4db2-80fb-f0db3de11280" providerId="ADAL" clId="{09330963-85FD-4C99-A81B-94D0EE5CFFEB}" dt="2026-03-09T19:37:07.744" v="92" actId="208"/>
           <ac:spMkLst>
             <pc:docMk/>
             <pc:sldMk cId="1501170907" sldId="256"/>
-            <ac:spMk id="34" creationId="{DE4C4D7D-AB22-873C-1654-A047EABD08AA}"/>
+            <ac:spMk id="34" creationId="{E089EF47-1FBA-968D-84FC-D9F5ADF229B0}"/>
           </ac:spMkLst>
         </pc:spChg>
         <pc:spChg chg="add mod">
@@ -167,76 +183,52 @@
             <ac:spMk id="36" creationId="{61EEB1E0-6493-4023-ADC1-CE06FABB4ECF}"/>
           </ac:spMkLst>
         </pc:spChg>
-        <pc:spChg chg="add del mod">
-          <ac:chgData name="York, George W CIV USAF USAFA DF/DFEC" userId="1fb5875a-4594-4db2-80fb-f0db3de11280" providerId="ADAL" clId="{09330963-85FD-4C99-A81B-94D0EE5CFFEB}" dt="2026-03-05T21:20:36.103" v="60" actId="478"/>
+        <pc:spChg chg="add mod">
+          <ac:chgData name="York, George W CIV USAF USAFA DF/DFEC" userId="1fb5875a-4594-4db2-80fb-f0db3de11280" providerId="ADAL" clId="{09330963-85FD-4C99-A81B-94D0EE5CFFEB}" dt="2026-03-10T03:17:02.805" v="166" actId="1076"/>
           <ac:spMkLst>
             <pc:docMk/>
             <pc:sldMk cId="1501170907" sldId="256"/>
-            <ac:spMk id="61" creationId="{CD12388E-047A-38FF-64C0-0457D8523D0C}"/>
+            <ac:spMk id="61" creationId="{E1A5FDD0-72BB-45F6-DD2E-55830C394C7A}"/>
           </ac:spMkLst>
         </pc:spChg>
         <pc:spChg chg="del mod">
-          <ac:chgData name="York, George W CIV USAF USAFA DF/DFEC" userId="1fb5875a-4594-4db2-80fb-f0db3de11280" providerId="ADAL" clId="{09330963-85FD-4C99-A81B-94D0EE5CFFEB}" dt="2026-03-05T22:27:59.360" v="86" actId="478"/>
-          <ac:spMkLst>
-            <pc:docMk/>
-            <pc:sldMk cId="1501170907" sldId="256"/>
-            <ac:spMk id="145" creationId="{D48BF948-61BF-AC37-8597-388094170D18}"/>
-          </ac:spMkLst>
-        </pc:spChg>
-        <pc:spChg chg="del mod">
-          <ac:chgData name="York, George W CIV USAF USAFA DF/DFEC" userId="1fb5875a-4594-4db2-80fb-f0db3de11280" providerId="ADAL" clId="{09330963-85FD-4C99-A81B-94D0EE5CFFEB}" dt="2026-03-05T22:27:59.360" v="86" actId="478"/>
-          <ac:spMkLst>
-            <pc:docMk/>
-            <pc:sldMk cId="1501170907" sldId="256"/>
-            <ac:spMk id="146" creationId="{69719632-7E59-F7B2-AEF4-E4C30AA0AEF2}"/>
-          </ac:spMkLst>
-        </pc:spChg>
-        <pc:spChg chg="del mod">
-          <ac:chgData name="York, George W CIV USAF USAFA DF/DFEC" userId="1fb5875a-4594-4db2-80fb-f0db3de11280" providerId="ADAL" clId="{09330963-85FD-4C99-A81B-94D0EE5CFFEB}" dt="2026-03-05T22:27:59.360" v="86" actId="478"/>
-          <ac:spMkLst>
-            <pc:docMk/>
-            <pc:sldMk cId="1501170907" sldId="256"/>
-            <ac:spMk id="148" creationId="{6432B689-7D1C-F807-6B45-D8272427DA3A}"/>
-          </ac:spMkLst>
-        </pc:spChg>
-        <pc:spChg chg="del mod">
-          <ac:chgData name="York, George W CIV USAF USAFA DF/DFEC" userId="1fb5875a-4594-4db2-80fb-f0db3de11280" providerId="ADAL" clId="{09330963-85FD-4C99-A81B-94D0EE5CFFEB}" dt="2026-03-05T22:27:59.360" v="86" actId="478"/>
-          <ac:spMkLst>
-            <pc:docMk/>
-            <pc:sldMk cId="1501170907" sldId="256"/>
-            <ac:spMk id="149" creationId="{831B5896-D57B-4667-02CD-6AAF11DEE5E2}"/>
-          </ac:spMkLst>
-        </pc:spChg>
-        <pc:spChg chg="del mod">
-          <ac:chgData name="York, George W CIV USAF USAFA DF/DFEC" userId="1fb5875a-4594-4db2-80fb-f0db3de11280" providerId="ADAL" clId="{09330963-85FD-4C99-A81B-94D0EE5CFFEB}" dt="2026-03-05T22:27:59.360" v="86" actId="478"/>
-          <ac:spMkLst>
-            <pc:docMk/>
-            <pc:sldMk cId="1501170907" sldId="256"/>
-            <ac:spMk id="151" creationId="{BC6DDD09-EA41-1470-2429-DBE27164913F}"/>
-          </ac:spMkLst>
-        </pc:spChg>
-        <pc:spChg chg="del mod">
-          <ac:chgData name="York, George W CIV USAF USAFA DF/DFEC" userId="1fb5875a-4594-4db2-80fb-f0db3de11280" providerId="ADAL" clId="{09330963-85FD-4C99-A81B-94D0EE5CFFEB}" dt="2026-03-05T22:27:59.360" v="86" actId="478"/>
-          <ac:spMkLst>
-            <pc:docMk/>
-            <pc:sldMk cId="1501170907" sldId="256"/>
-            <ac:spMk id="155" creationId="{75FA3F6B-D94A-A494-28FD-7D4F921979A2}"/>
-          </ac:spMkLst>
-        </pc:spChg>
-        <pc:spChg chg="mod">
-          <ac:chgData name="York, George W CIV USAF USAFA DF/DFEC" userId="1fb5875a-4594-4db2-80fb-f0db3de11280" providerId="ADAL" clId="{09330963-85FD-4C99-A81B-94D0EE5CFFEB}" dt="2026-03-05T21:12:30.792" v="18" actId="1076"/>
+          <ac:chgData name="York, George W CIV USAF USAFA DF/DFEC" userId="1fb5875a-4594-4db2-80fb-f0db3de11280" providerId="ADAL" clId="{09330963-85FD-4C99-A81B-94D0EE5CFFEB}" dt="2026-03-09T19:38:34.496" v="105" actId="478"/>
           <ac:spMkLst>
             <pc:docMk/>
             <pc:sldMk cId="1501170907" sldId="256"/>
             <ac:spMk id="160" creationId="{3BF5B236-4D8B-849D-0CDF-2CB1B5EE7284}"/>
           </ac:spMkLst>
         </pc:spChg>
-        <pc:spChg chg="mod">
-          <ac:chgData name="York, George W CIV USAF USAFA DF/DFEC" userId="1fb5875a-4594-4db2-80fb-f0db3de11280" providerId="ADAL" clId="{09330963-85FD-4C99-A81B-94D0EE5CFFEB}" dt="2026-03-05T21:12:39.311" v="19" actId="1076"/>
+        <pc:spChg chg="del mod">
+          <ac:chgData name="York, George W CIV USAF USAFA DF/DFEC" userId="1fb5875a-4594-4db2-80fb-f0db3de11280" providerId="ADAL" clId="{09330963-85FD-4C99-A81B-94D0EE5CFFEB}" dt="2026-03-09T19:38:34.496" v="105" actId="478"/>
           <ac:spMkLst>
             <pc:docMk/>
             <pc:sldMk cId="1501170907" sldId="256"/>
             <ac:spMk id="161" creationId="{0E9784F2-B3AB-C0FA-FDFE-48C83AB9B12E}"/>
+          </ac:spMkLst>
+        </pc:spChg>
+        <pc:spChg chg="mod">
+          <ac:chgData name="York, George W CIV USAF USAFA DF/DFEC" userId="1fb5875a-4594-4db2-80fb-f0db3de11280" providerId="ADAL" clId="{09330963-85FD-4C99-A81B-94D0EE5CFFEB}" dt="2026-03-09T19:38:02.056" v="102" actId="1076"/>
+          <ac:spMkLst>
+            <pc:docMk/>
+            <pc:sldMk cId="1501170907" sldId="256"/>
+            <ac:spMk id="264" creationId="{18102C07-F7E1-1AF1-477B-00B68F177F07}"/>
+          </ac:spMkLst>
+        </pc:spChg>
+        <pc:spChg chg="mod">
+          <ac:chgData name="York, George W CIV USAF USAFA DF/DFEC" userId="1fb5875a-4594-4db2-80fb-f0db3de11280" providerId="ADAL" clId="{09330963-85FD-4C99-A81B-94D0EE5CFFEB}" dt="2026-03-09T19:38:06.359" v="103" actId="1076"/>
+          <ac:spMkLst>
+            <pc:docMk/>
+            <pc:sldMk cId="1501170907" sldId="256"/>
+            <ac:spMk id="265" creationId="{00A05C49-A5A2-CC74-BAEB-00CF47323BC9}"/>
+          </ac:spMkLst>
+        </pc:spChg>
+        <pc:spChg chg="del">
+          <ac:chgData name="York, George W CIV USAF USAFA DF/DFEC" userId="1fb5875a-4594-4db2-80fb-f0db3de11280" providerId="ADAL" clId="{09330963-85FD-4C99-A81B-94D0EE5CFFEB}" dt="2026-03-09T19:38:10.899" v="104" actId="478"/>
+          <ac:spMkLst>
+            <pc:docMk/>
+            <pc:sldMk cId="1501170907" sldId="256"/>
+            <ac:spMk id="266" creationId="{B178740B-BE6B-31B0-B4FD-0ED1D3EABF36}"/>
           </ac:spMkLst>
         </pc:spChg>
         <pc:spChg chg="mod">
@@ -247,20 +239,28 @@
             <ac:spMk id="270" creationId="{E335D321-53C8-872A-430E-7732E67F0A79}"/>
           </ac:spMkLst>
         </pc:spChg>
-        <pc:spChg chg="del mod">
-          <ac:chgData name="York, George W CIV USAF USAFA DF/DFEC" userId="1fb5875a-4594-4db2-80fb-f0db3de11280" providerId="ADAL" clId="{09330963-85FD-4C99-A81B-94D0EE5CFFEB}" dt="2026-03-05T21:13:17.042" v="24" actId="478"/>
+        <pc:spChg chg="mod">
+          <ac:chgData name="York, George W CIV USAF USAFA DF/DFEC" userId="1fb5875a-4594-4db2-80fb-f0db3de11280" providerId="ADAL" clId="{09330963-85FD-4C99-A81B-94D0EE5CFFEB}" dt="2026-03-10T03:16:13.036" v="160" actId="1076"/>
           <ac:spMkLst>
             <pc:docMk/>
             <pc:sldMk cId="1501170907" sldId="256"/>
-            <ac:spMk id="273" creationId="{53C6712A-701A-7D00-06ED-4806B8BE36CF}"/>
+            <ac:spMk id="343" creationId="{8D054836-2157-3BAC-A7D8-5291EF62197A}"/>
           </ac:spMkLst>
         </pc:spChg>
-        <pc:grpChg chg="add mod">
-          <ac:chgData name="York, George W CIV USAF USAFA DF/DFEC" userId="1fb5875a-4594-4db2-80fb-f0db3de11280" providerId="ADAL" clId="{09330963-85FD-4C99-A81B-94D0EE5CFFEB}" dt="2026-03-05T21:12:20.312" v="15" actId="1076"/>
+        <pc:grpChg chg="add del mod">
+          <ac:chgData name="York, George W CIV USAF USAFA DF/DFEC" userId="1fb5875a-4594-4db2-80fb-f0db3de11280" providerId="ADAL" clId="{09330963-85FD-4C99-A81B-94D0EE5CFFEB}" dt="2026-03-09T19:38:34.496" v="105" actId="478"/>
           <ac:grpSpMkLst>
             <pc:docMk/>
             <pc:sldMk cId="1501170907" sldId="256"/>
             <ac:grpSpMk id="3" creationId="{F0E20165-74AC-DD4D-AA48-ADD102893E58}"/>
+          </ac:grpSpMkLst>
+        </pc:grpChg>
+        <pc:grpChg chg="add mod">
+          <ac:chgData name="York, George W CIV USAF USAFA DF/DFEC" userId="1fb5875a-4594-4db2-80fb-f0db3de11280" providerId="ADAL" clId="{09330963-85FD-4C99-A81B-94D0EE5CFFEB}" dt="2026-03-10T03:17:02.805" v="166" actId="1076"/>
+          <ac:grpSpMkLst>
+            <pc:docMk/>
+            <pc:sldMk cId="1501170907" sldId="256"/>
+            <ac:grpSpMk id="21" creationId="{B6F95654-DFED-E9E7-17A4-3C62565E7F0F}"/>
           </ac:grpSpMkLst>
         </pc:grpChg>
         <pc:grpChg chg="add mod">
@@ -269,6 +269,30 @@
             <pc:docMk/>
             <pc:sldMk cId="1501170907" sldId="256"/>
             <ac:grpSpMk id="86" creationId="{B7C242C4-9BDE-35B9-11F3-F09FF7C08848}"/>
+          </ac:grpSpMkLst>
+        </pc:grpChg>
+        <pc:grpChg chg="add del mod">
+          <ac:chgData name="York, George W CIV USAF USAFA DF/DFEC" userId="1fb5875a-4594-4db2-80fb-f0db3de11280" providerId="ADAL" clId="{09330963-85FD-4C99-A81B-94D0EE5CFFEB}" dt="2026-03-10T03:15:50.703" v="156" actId="478"/>
+          <ac:grpSpMkLst>
+            <pc:docMk/>
+            <pc:sldMk cId="1501170907" sldId="256"/>
+            <ac:grpSpMk id="92" creationId="{63B9F29D-4E93-C2E7-5BD6-CD0DFEFBA557}"/>
+          </ac:grpSpMkLst>
+        </pc:grpChg>
+        <pc:grpChg chg="mod">
+          <ac:chgData name="York, George W CIV USAF USAFA DF/DFEC" userId="1fb5875a-4594-4db2-80fb-f0db3de11280" providerId="ADAL" clId="{09330963-85FD-4C99-A81B-94D0EE5CFFEB}" dt="2026-03-10T03:15:59.551" v="157" actId="14100"/>
+          <ac:grpSpMkLst>
+            <pc:docMk/>
+            <pc:sldMk cId="1501170907" sldId="256"/>
+            <ac:grpSpMk id="162" creationId="{5752E8FD-FCF1-9D02-67ED-6A11A8F587F0}"/>
+          </ac:grpSpMkLst>
+        </pc:grpChg>
+        <pc:grpChg chg="del">
+          <ac:chgData name="York, George W CIV USAF USAFA DF/DFEC" userId="1fb5875a-4594-4db2-80fb-f0db3de11280" providerId="ADAL" clId="{09330963-85FD-4C99-A81B-94D0EE5CFFEB}" dt="2026-03-09T19:38:10.899" v="104" actId="478"/>
+          <ac:grpSpMkLst>
+            <pc:docMk/>
+            <pc:sldMk cId="1501170907" sldId="256"/>
+            <ac:grpSpMk id="175" creationId="{CF1E05C7-0258-A1DB-5D4E-EA66C6CAA296}"/>
           </ac:grpSpMkLst>
         </pc:grpChg>
         <pc:picChg chg="add mod ord">
@@ -288,75 +312,59 @@
           </ac:picMkLst>
         </pc:picChg>
         <pc:cxnChg chg="mod">
-          <ac:chgData name="York, George W CIV USAF USAFA DF/DFEC" userId="1fb5875a-4594-4db2-80fb-f0db3de11280" providerId="ADAL" clId="{09330963-85FD-4C99-A81B-94D0EE5CFFEB}" dt="2026-03-05T21:12:10.392" v="14"/>
+          <ac:chgData name="York, George W CIV USAF USAFA DF/DFEC" userId="1fb5875a-4594-4db2-80fb-f0db3de11280" providerId="ADAL" clId="{09330963-85FD-4C99-A81B-94D0EE5CFFEB}" dt="2026-03-10T03:16:48.581" v="164"/>
           <ac:cxnSpMkLst>
             <pc:docMk/>
             <pc:sldMk cId="1501170907" sldId="256"/>
-            <ac:cxnSpMk id="10" creationId="{F8960DDE-F577-2D0B-E329-28A527662C2D}"/>
+            <ac:cxnSpMk id="23" creationId="{760B40A2-77E4-F9AB-5352-FD258D2E0425}"/>
           </ac:cxnSpMkLst>
         </pc:cxnChg>
-        <pc:cxnChg chg="mod">
-          <ac:chgData name="York, George W CIV USAF USAFA DF/DFEC" userId="1fb5875a-4594-4db2-80fb-f0db3de11280" providerId="ADAL" clId="{09330963-85FD-4C99-A81B-94D0EE5CFFEB}" dt="2026-03-05T21:12:10.392" v="14"/>
-          <ac:cxnSpMkLst>
-            <pc:docMk/>
-            <pc:sldMk cId="1501170907" sldId="256"/>
-            <ac:cxnSpMk id="17" creationId="{0A06088D-98A3-A19E-21B7-06392BDC9225}"/>
-          </ac:cxnSpMkLst>
-        </pc:cxnChg>
-        <pc:cxnChg chg="mod">
-          <ac:chgData name="York, George W CIV USAF USAFA DF/DFEC" userId="1fb5875a-4594-4db2-80fb-f0db3de11280" providerId="ADAL" clId="{09330963-85FD-4C99-A81B-94D0EE5CFFEB}" dt="2026-03-05T21:12:10.392" v="14"/>
-          <ac:cxnSpMkLst>
-            <pc:docMk/>
-            <pc:sldMk cId="1501170907" sldId="256"/>
-            <ac:cxnSpMk id="18" creationId="{67D1D89E-75CE-1BE7-C5F4-51F595DF5A7B}"/>
-          </ac:cxnSpMkLst>
-        </pc:cxnChg>
-        <pc:cxnChg chg="mod">
-          <ac:chgData name="York, George W CIV USAF USAFA DF/DFEC" userId="1fb5875a-4594-4db2-80fb-f0db3de11280" providerId="ADAL" clId="{09330963-85FD-4C99-A81B-94D0EE5CFFEB}" dt="2026-03-05T21:12:10.392" v="14"/>
-          <ac:cxnSpMkLst>
-            <pc:docMk/>
-            <pc:sldMk cId="1501170907" sldId="256"/>
-            <ac:cxnSpMk id="20" creationId="{19DBD266-1003-B3C8-0754-4799002739F2}"/>
-          </ac:cxnSpMkLst>
-        </pc:cxnChg>
-        <pc:cxnChg chg="mod">
-          <ac:chgData name="York, George W CIV USAF USAFA DF/DFEC" userId="1fb5875a-4594-4db2-80fb-f0db3de11280" providerId="ADAL" clId="{09330963-85FD-4C99-A81B-94D0EE5CFFEB}" dt="2026-03-05T21:12:10.392" v="14"/>
-          <ac:cxnSpMkLst>
-            <pc:docMk/>
-            <pc:sldMk cId="1501170907" sldId="256"/>
-            <ac:cxnSpMk id="21" creationId="{E21776EC-071F-B571-C86B-0A0DA830C4B3}"/>
-          </ac:cxnSpMkLst>
-        </pc:cxnChg>
-        <pc:cxnChg chg="mod">
-          <ac:chgData name="York, George W CIV USAF USAFA DF/DFEC" userId="1fb5875a-4594-4db2-80fb-f0db3de11280" providerId="ADAL" clId="{09330963-85FD-4C99-A81B-94D0EE5CFFEB}" dt="2026-03-05T21:12:10.392" v="14"/>
-          <ac:cxnSpMkLst>
-            <pc:docMk/>
-            <pc:sldMk cId="1501170907" sldId="256"/>
-            <ac:cxnSpMk id="23" creationId="{AC7113F7-BE3F-C063-EF42-353858130E84}"/>
-          </ac:cxnSpMkLst>
-        </pc:cxnChg>
-        <pc:cxnChg chg="add mod">
-          <ac:chgData name="York, George W CIV USAF USAFA DF/DFEC" userId="1fb5875a-4594-4db2-80fb-f0db3de11280" providerId="ADAL" clId="{09330963-85FD-4C99-A81B-94D0EE5CFFEB}" dt="2026-03-05T21:12:20.312" v="15" actId="1076"/>
+        <pc:cxnChg chg="add del mod">
+          <ac:chgData name="York, George W CIV USAF USAFA DF/DFEC" userId="1fb5875a-4594-4db2-80fb-f0db3de11280" providerId="ADAL" clId="{09330963-85FD-4C99-A81B-94D0EE5CFFEB}" dt="2026-03-09T19:38:34.496" v="105" actId="478"/>
           <ac:cxnSpMkLst>
             <pc:docMk/>
             <pc:sldMk cId="1501170907" sldId="256"/>
             <ac:cxnSpMk id="26" creationId="{444F7234-410C-25D4-213C-932ED214CEA2}"/>
           </ac:cxnSpMkLst>
         </pc:cxnChg>
-        <pc:cxnChg chg="add mod">
-          <ac:chgData name="York, George W CIV USAF USAFA DF/DFEC" userId="1fb5875a-4594-4db2-80fb-f0db3de11280" providerId="ADAL" clId="{09330963-85FD-4C99-A81B-94D0EE5CFFEB}" dt="2026-03-05T21:12:20.312" v="15" actId="1076"/>
+        <pc:cxnChg chg="mod">
+          <ac:chgData name="York, George W CIV USAF USAFA DF/DFEC" userId="1fb5875a-4594-4db2-80fb-f0db3de11280" providerId="ADAL" clId="{09330963-85FD-4C99-A81B-94D0EE5CFFEB}" dt="2026-03-10T03:16:48.581" v="164"/>
+          <ac:cxnSpMkLst>
+            <pc:docMk/>
+            <pc:sldMk cId="1501170907" sldId="256"/>
+            <ac:cxnSpMk id="26" creationId="{71486C0B-ABD0-3F3F-1AA3-5AFB250919DE}"/>
+          </ac:cxnSpMkLst>
+        </pc:cxnChg>
+        <pc:cxnChg chg="mod">
+          <ac:chgData name="York, George W CIV USAF USAFA DF/DFEC" userId="1fb5875a-4594-4db2-80fb-f0db3de11280" providerId="ADAL" clId="{09330963-85FD-4C99-A81B-94D0EE5CFFEB}" dt="2026-03-10T03:16:48.581" v="164"/>
+          <ac:cxnSpMkLst>
+            <pc:docMk/>
+            <pc:sldMk cId="1501170907" sldId="256"/>
+            <ac:cxnSpMk id="28" creationId="{48A9E97E-CD49-94C9-AAB0-95C96A07115C}"/>
+          </ac:cxnSpMkLst>
+        </pc:cxnChg>
+        <pc:cxnChg chg="add del mod">
+          <ac:chgData name="York, George W CIV USAF USAFA DF/DFEC" userId="1fb5875a-4594-4db2-80fb-f0db3de11280" providerId="ADAL" clId="{09330963-85FD-4C99-A81B-94D0EE5CFFEB}" dt="2026-03-09T19:38:34.496" v="105" actId="478"/>
           <ac:cxnSpMkLst>
             <pc:docMk/>
             <pc:sldMk cId="1501170907" sldId="256"/>
             <ac:cxnSpMk id="28" creationId="{B33DC5DC-F120-3662-5DC9-4D6D8B08EBA0}"/>
           </ac:cxnSpMkLst>
         </pc:cxnChg>
-        <pc:cxnChg chg="add del mod">
-          <ac:chgData name="York, George W CIV USAF USAFA DF/DFEC" userId="1fb5875a-4594-4db2-80fb-f0db3de11280" providerId="ADAL" clId="{09330963-85FD-4C99-A81B-94D0EE5CFFEB}" dt="2026-03-05T21:15:51.480" v="42" actId="478"/>
+        <pc:cxnChg chg="mod">
+          <ac:chgData name="York, George W CIV USAF USAFA DF/DFEC" userId="1fb5875a-4594-4db2-80fb-f0db3de11280" providerId="ADAL" clId="{09330963-85FD-4C99-A81B-94D0EE5CFFEB}" dt="2026-03-10T03:16:48.581" v="164"/>
           <ac:cxnSpMkLst>
             <pc:docMk/>
             <pc:sldMk cId="1501170907" sldId="256"/>
-            <ac:cxnSpMk id="32" creationId="{8895D4E5-DF4D-8C09-B4C9-D88B1A2AA2A4}"/>
+            <ac:cxnSpMk id="30" creationId="{BD9D2B64-A65F-417E-BA0D-6C606C967A0F}"/>
+          </ac:cxnSpMkLst>
+        </pc:cxnChg>
+        <pc:cxnChg chg="mod">
+          <ac:chgData name="York, George W CIV USAF USAFA DF/DFEC" userId="1fb5875a-4594-4db2-80fb-f0db3de11280" providerId="ADAL" clId="{09330963-85FD-4C99-A81B-94D0EE5CFFEB}" dt="2026-03-10T03:16:48.581" v="164"/>
+          <ac:cxnSpMkLst>
+            <pc:docMk/>
+            <pc:sldMk cId="1501170907" sldId="256"/>
+            <ac:cxnSpMk id="32" creationId="{F0441355-68E2-EB62-442A-63BEF57CC44E}"/>
           </ac:cxnSpMkLst>
         </pc:cxnChg>
         <pc:cxnChg chg="add mod">
@@ -384,23 +392,39 @@
           </ac:cxnSpMkLst>
         </pc:cxnChg>
         <pc:cxnChg chg="add mod">
-          <ac:chgData name="York, George W CIV USAF USAFA DF/DFEC" userId="1fb5875a-4594-4db2-80fb-f0db3de11280" providerId="ADAL" clId="{09330963-85FD-4C99-A81B-94D0EE5CFFEB}" dt="2026-03-05T21:15:45.472" v="41" actId="692"/>
+          <ac:chgData name="York, George W CIV USAF USAFA DF/DFEC" userId="1fb5875a-4594-4db2-80fb-f0db3de11280" providerId="ADAL" clId="{09330963-85FD-4C99-A81B-94D0EE5CFFEB}" dt="2026-03-09T19:37:56.199" v="101" actId="14100"/>
+          <ac:cxnSpMkLst>
+            <pc:docMk/>
+            <pc:sldMk cId="1501170907" sldId="256"/>
+            <ac:cxnSpMk id="47" creationId="{429F048B-FDD6-233F-3053-92BFE74735BF}"/>
+          </ac:cxnSpMkLst>
+        </pc:cxnChg>
+        <pc:cxnChg chg="add mod">
+          <ac:chgData name="York, George W CIV USAF USAFA DF/DFEC" userId="1fb5875a-4594-4db2-80fb-f0db3de11280" providerId="ADAL" clId="{09330963-85FD-4C99-A81B-94D0EE5CFFEB}" dt="2026-03-10T03:16:35.980" v="163" actId="14100"/>
           <ac:cxnSpMkLst>
             <pc:docMk/>
             <pc:sldMk cId="1501170907" sldId="256"/>
             <ac:cxnSpMk id="52" creationId="{5EB535AF-BDE4-1847-B2CC-ED37430A4C46}"/>
           </ac:cxnSpMkLst>
         </pc:cxnChg>
-        <pc:cxnChg chg="add mod">
-          <ac:chgData name="York, George W CIV USAF USAFA DF/DFEC" userId="1fb5875a-4594-4db2-80fb-f0db3de11280" providerId="ADAL" clId="{09330963-85FD-4C99-A81B-94D0EE5CFFEB}" dt="2026-03-05T21:16:15.495" v="46" actId="1076"/>
+        <pc:cxnChg chg="add del mod">
+          <ac:chgData name="York, George W CIV USAF USAFA DF/DFEC" userId="1fb5875a-4594-4db2-80fb-f0db3de11280" providerId="ADAL" clId="{09330963-85FD-4C99-A81B-94D0EE5CFFEB}" dt="2026-03-09T22:14:56.030" v="131" actId="478"/>
           <ac:cxnSpMkLst>
             <pc:docMk/>
             <pc:sldMk cId="1501170907" sldId="256"/>
             <ac:cxnSpMk id="54" creationId="{2E8C08F4-6B7C-4580-23CA-753663A3987B}"/>
           </ac:cxnSpMkLst>
         </pc:cxnChg>
+        <pc:cxnChg chg="mod">
+          <ac:chgData name="York, George W CIV USAF USAFA DF/DFEC" userId="1fb5875a-4594-4db2-80fb-f0db3de11280" providerId="ADAL" clId="{09330963-85FD-4C99-A81B-94D0EE5CFFEB}" dt="2026-03-10T03:17:02.805" v="166" actId="1076"/>
+          <ac:cxnSpMkLst>
+            <pc:docMk/>
+            <pc:sldMk cId="1501170907" sldId="256"/>
+            <ac:cxnSpMk id="54" creationId="{703B9A94-DC24-132F-F43C-A3FA7B28C588}"/>
+          </ac:cxnSpMkLst>
+        </pc:cxnChg>
         <pc:cxnChg chg="add mod">
-          <ac:chgData name="York, George W CIV USAF USAFA DF/DFEC" userId="1fb5875a-4594-4db2-80fb-f0db3de11280" providerId="ADAL" clId="{09330963-85FD-4C99-A81B-94D0EE5CFFEB}" dt="2026-03-05T21:16:20.354" v="48" actId="1076"/>
+          <ac:chgData name="York, George W CIV USAF USAFA DF/DFEC" userId="1fb5875a-4594-4db2-80fb-f0db3de11280" providerId="ADAL" clId="{09330963-85FD-4C99-A81B-94D0EE5CFFEB}" dt="2026-03-09T22:15:09.567" v="136" actId="14100"/>
           <ac:cxnSpMkLst>
             <pc:docMk/>
             <pc:sldMk cId="1501170907" sldId="256"/>
@@ -408,7 +432,15 @@
           </ac:cxnSpMkLst>
         </pc:cxnChg>
         <pc:cxnChg chg="add mod">
-          <ac:chgData name="York, George W CIV USAF USAFA DF/DFEC" userId="1fb5875a-4594-4db2-80fb-f0db3de11280" providerId="ADAL" clId="{09330963-85FD-4C99-A81B-94D0EE5CFFEB}" dt="2026-03-05T21:18:29.403" v="50" actId="1076"/>
+          <ac:chgData name="York, George W CIV USAF USAFA DF/DFEC" userId="1fb5875a-4594-4db2-80fb-f0db3de11280" providerId="ADAL" clId="{09330963-85FD-4C99-A81B-94D0EE5CFFEB}" dt="2026-03-10T03:17:02.805" v="166" actId="1076"/>
+          <ac:cxnSpMkLst>
+            <pc:docMk/>
+            <pc:sldMk cId="1501170907" sldId="256"/>
+            <ac:cxnSpMk id="58" creationId="{2A1832F8-8198-4655-9DC3-8E0FDA0AB61F}"/>
+          </ac:cxnSpMkLst>
+        </pc:cxnChg>
+        <pc:cxnChg chg="add del mod">
+          <ac:chgData name="York, George W CIV USAF USAFA DF/DFEC" userId="1fb5875a-4594-4db2-80fb-f0db3de11280" providerId="ADAL" clId="{09330963-85FD-4C99-A81B-94D0EE5CFFEB}" dt="2026-03-09T22:15:16.529" v="138" actId="478"/>
           <ac:cxnSpMkLst>
             <pc:docMk/>
             <pc:sldMk cId="1501170907" sldId="256"/>
@@ -416,7 +448,7 @@
           </ac:cxnSpMkLst>
         </pc:cxnChg>
         <pc:cxnChg chg="add mod">
-          <ac:chgData name="York, George W CIV USAF USAFA DF/DFEC" userId="1fb5875a-4594-4db2-80fb-f0db3de11280" providerId="ADAL" clId="{09330963-85FD-4C99-A81B-94D0EE5CFFEB}" dt="2026-03-05T21:18:34.939" v="52" actId="1076"/>
+          <ac:chgData name="York, George W CIV USAF USAFA DF/DFEC" userId="1fb5875a-4594-4db2-80fb-f0db3de11280" providerId="ADAL" clId="{09330963-85FD-4C99-A81B-94D0EE5CFFEB}" dt="2026-03-09T22:15:22.583" v="141" actId="14100"/>
           <ac:cxnSpMkLst>
             <pc:docMk/>
             <pc:sldMk cId="1501170907" sldId="256"/>
@@ -429,14 +461,6 @@
             <pc:docMk/>
             <pc:sldMk cId="1501170907" sldId="256"/>
             <ac:cxnSpMk id="76" creationId="{9921C9C5-2DFB-C76A-4D92-6A511FF5BBF4}"/>
-          </ac:cxnSpMkLst>
-        </pc:cxnChg>
-        <pc:cxnChg chg="add del mod">
-          <ac:chgData name="York, George W CIV USAF USAFA DF/DFEC" userId="1fb5875a-4594-4db2-80fb-f0db3de11280" providerId="ADAL" clId="{09330963-85FD-4C99-A81B-94D0EE5CFFEB}" dt="2026-03-05T21:24:08.939" v="77" actId="478"/>
-          <ac:cxnSpMkLst>
-            <pc:docMk/>
-            <pc:sldMk cId="1501170907" sldId="256"/>
-            <ac:cxnSpMk id="78" creationId="{FBA0773D-8AFC-1525-DCA5-0C9963B90E6F}"/>
           </ac:cxnSpMkLst>
         </pc:cxnChg>
         <pc:cxnChg chg="add mod">
@@ -455,12 +479,92 @@
             <ac:cxnSpMk id="80" creationId="{6AA41B44-529F-F6BF-0A9B-4AD3BD64CCCA}"/>
           </ac:cxnSpMkLst>
         </pc:cxnChg>
+        <pc:cxnChg chg="add del mod">
+          <ac:chgData name="York, George W CIV USAF USAFA DF/DFEC" userId="1fb5875a-4594-4db2-80fb-f0db3de11280" providerId="ADAL" clId="{09330963-85FD-4C99-A81B-94D0EE5CFFEB}" dt="2026-03-10T03:16:14.979" v="161" actId="478"/>
+          <ac:cxnSpMkLst>
+            <pc:docMk/>
+            <pc:sldMk cId="1501170907" sldId="256"/>
+            <ac:cxnSpMk id="88" creationId="{3FAD1D88-A773-512B-A49B-23DAEE5D2ECE}"/>
+          </ac:cxnSpMkLst>
+        </pc:cxnChg>
         <pc:cxnChg chg="mod">
           <ac:chgData name="York, George W CIV USAF USAFA DF/DFEC" userId="1fb5875a-4594-4db2-80fb-f0db3de11280" providerId="ADAL" clId="{09330963-85FD-4C99-A81B-94D0EE5CFFEB}" dt="2026-03-05T21:23:38.557" v="72" actId="1076"/>
           <ac:cxnSpMkLst>
             <pc:docMk/>
             <pc:sldMk cId="1501170907" sldId="256"/>
             <ac:cxnSpMk id="105" creationId="{96194351-1F6F-6ECD-551A-2B077972FE1F}"/>
+          </ac:cxnSpMkLst>
+        </pc:cxnChg>
+        <pc:cxnChg chg="mod">
+          <ac:chgData name="York, George W CIV USAF USAFA DF/DFEC" userId="1fb5875a-4594-4db2-80fb-f0db3de11280" providerId="ADAL" clId="{09330963-85FD-4C99-A81B-94D0EE5CFFEB}" dt="2026-03-09T22:11:44.978" v="111"/>
+          <ac:cxnSpMkLst>
+            <pc:docMk/>
+            <pc:sldMk cId="1501170907" sldId="256"/>
+            <ac:cxnSpMk id="106" creationId="{DFE56B22-44E3-56CC-FE37-F11D497442B6}"/>
+          </ac:cxnSpMkLst>
+        </pc:cxnChg>
+        <pc:cxnChg chg="mod">
+          <ac:chgData name="York, George W CIV USAF USAFA DF/DFEC" userId="1fb5875a-4594-4db2-80fb-f0db3de11280" providerId="ADAL" clId="{09330963-85FD-4C99-A81B-94D0EE5CFFEB}" dt="2026-03-09T22:11:44.978" v="111"/>
+          <ac:cxnSpMkLst>
+            <pc:docMk/>
+            <pc:sldMk cId="1501170907" sldId="256"/>
+            <ac:cxnSpMk id="107" creationId="{9AC4F86B-3F71-AB32-55BA-E578D3EC9D6D}"/>
+          </ac:cxnSpMkLst>
+        </pc:cxnChg>
+        <pc:cxnChg chg="mod">
+          <ac:chgData name="York, George W CIV USAF USAFA DF/DFEC" userId="1fb5875a-4594-4db2-80fb-f0db3de11280" providerId="ADAL" clId="{09330963-85FD-4C99-A81B-94D0EE5CFFEB}" dt="2026-03-09T22:11:44.978" v="111"/>
+          <ac:cxnSpMkLst>
+            <pc:docMk/>
+            <pc:sldMk cId="1501170907" sldId="256"/>
+            <ac:cxnSpMk id="108" creationId="{E1A4E398-08C3-C15D-9EEA-FFC7E42B0E76}"/>
+          </ac:cxnSpMkLst>
+        </pc:cxnChg>
+        <pc:cxnChg chg="mod">
+          <ac:chgData name="York, George W CIV USAF USAFA DF/DFEC" userId="1fb5875a-4594-4db2-80fb-f0db3de11280" providerId="ADAL" clId="{09330963-85FD-4C99-A81B-94D0EE5CFFEB}" dt="2026-03-09T22:11:44.978" v="111"/>
+          <ac:cxnSpMkLst>
+            <pc:docMk/>
+            <pc:sldMk cId="1501170907" sldId="256"/>
+            <ac:cxnSpMk id="109" creationId="{2A2D1917-1660-DC92-A5EE-6BF4EC117D8C}"/>
+          </ac:cxnSpMkLst>
+        </pc:cxnChg>
+        <pc:cxnChg chg="add del mod">
+          <ac:chgData name="York, George W CIV USAF USAFA DF/DFEC" userId="1fb5875a-4594-4db2-80fb-f0db3de11280" providerId="ADAL" clId="{09330963-85FD-4C99-A81B-94D0EE5CFFEB}" dt="2026-03-10T03:15:50.703" v="156" actId="478"/>
+          <ac:cxnSpMkLst>
+            <pc:docMk/>
+            <pc:sldMk cId="1501170907" sldId="256"/>
+            <ac:cxnSpMk id="110" creationId="{FC9BCDE9-D6C7-9180-C87C-C9CDE19A5E96}"/>
+          </ac:cxnSpMkLst>
+        </pc:cxnChg>
+        <pc:cxnChg chg="add mod">
+          <ac:chgData name="York, George W CIV USAF USAFA DF/DFEC" userId="1fb5875a-4594-4db2-80fb-f0db3de11280" providerId="ADAL" clId="{09330963-85FD-4C99-A81B-94D0EE5CFFEB}" dt="2026-03-10T03:15:35.556" v="155" actId="1076"/>
+          <ac:cxnSpMkLst>
+            <pc:docMk/>
+            <pc:sldMk cId="1501170907" sldId="256"/>
+            <ac:cxnSpMk id="119" creationId="{FAC3FB28-5010-EC3A-6B97-F34204C4FD60}"/>
+          </ac:cxnSpMkLst>
+        </pc:cxnChg>
+        <pc:cxnChg chg="add del mod">
+          <ac:chgData name="York, George W CIV USAF USAFA DF/DFEC" userId="1fb5875a-4594-4db2-80fb-f0db3de11280" providerId="ADAL" clId="{09330963-85FD-4C99-A81B-94D0EE5CFFEB}" dt="2026-03-10T03:15:11.106" v="151" actId="478"/>
+          <ac:cxnSpMkLst>
+            <pc:docMk/>
+            <pc:sldMk cId="1501170907" sldId="256"/>
+            <ac:cxnSpMk id="121" creationId="{62980672-AA0E-72AF-E78B-1B92602A34D9}"/>
+          </ac:cxnSpMkLst>
+        </pc:cxnChg>
+        <pc:cxnChg chg="add mod">
+          <ac:chgData name="York, George W CIV USAF USAFA DF/DFEC" userId="1fb5875a-4594-4db2-80fb-f0db3de11280" providerId="ADAL" clId="{09330963-85FD-4C99-A81B-94D0EE5CFFEB}" dt="2026-03-10T03:17:25.205" v="167" actId="14100"/>
+          <ac:cxnSpMkLst>
+            <pc:docMk/>
+            <pc:sldMk cId="1501170907" sldId="256"/>
+            <ac:cxnSpMk id="131" creationId="{2B1DBBEC-DD8F-25CA-25EB-E6913CBC1235}"/>
+          </ac:cxnSpMkLst>
+        </pc:cxnChg>
+        <pc:cxnChg chg="add mod">
+          <ac:chgData name="York, George W CIV USAF USAFA DF/DFEC" userId="1fb5875a-4594-4db2-80fb-f0db3de11280" providerId="ADAL" clId="{09330963-85FD-4C99-A81B-94D0EE5CFFEB}" dt="2026-03-10T03:17:44.219" v="170" actId="1076"/>
+          <ac:cxnSpMkLst>
+            <pc:docMk/>
+            <pc:sldMk cId="1501170907" sldId="256"/>
+            <ac:cxnSpMk id="134" creationId="{CF0B0599-3874-796C-AF55-6F286F9E3343}"/>
           </ac:cxnSpMkLst>
         </pc:cxnChg>
         <pc:cxnChg chg="mod">
@@ -471,36 +575,28 @@
             <ac:cxnSpMk id="152" creationId="{0B969FF2-6DAD-23DC-28B8-ACF737E02DB2}"/>
           </ac:cxnSpMkLst>
         </pc:cxnChg>
-        <pc:cxnChg chg="del mod">
-          <ac:chgData name="York, George W CIV USAF USAFA DF/DFEC" userId="1fb5875a-4594-4db2-80fb-f0db3de11280" providerId="ADAL" clId="{09330963-85FD-4C99-A81B-94D0EE5CFFEB}" dt="2026-03-05T22:27:59.360" v="86" actId="478"/>
+        <pc:cxnChg chg="mod">
+          <ac:chgData name="York, George W CIV USAF USAFA DF/DFEC" userId="1fb5875a-4594-4db2-80fb-f0db3de11280" providerId="ADAL" clId="{09330963-85FD-4C99-A81B-94D0EE5CFFEB}" dt="2026-03-10T03:16:08.892" v="159" actId="14100"/>
           <ac:cxnSpMkLst>
             <pc:docMk/>
             <pc:sldMk cId="1501170907" sldId="256"/>
-            <ac:cxnSpMk id="153" creationId="{F030B5C6-68FA-2DA5-919A-5B353DA9C1A8}"/>
+            <ac:cxnSpMk id="172" creationId="{12A3FC5E-0887-17BA-3438-BBB91A074EC2}"/>
           </ac:cxnSpMkLst>
         </pc:cxnChg>
-        <pc:cxnChg chg="del mod">
-          <ac:chgData name="York, George W CIV USAF USAFA DF/DFEC" userId="1fb5875a-4594-4db2-80fb-f0db3de11280" providerId="ADAL" clId="{09330963-85FD-4C99-A81B-94D0EE5CFFEB}" dt="2026-03-05T22:27:59.360" v="86" actId="478"/>
+        <pc:cxnChg chg="del">
+          <ac:chgData name="York, George W CIV USAF USAFA DF/DFEC" userId="1fb5875a-4594-4db2-80fb-f0db3de11280" providerId="ADAL" clId="{09330963-85FD-4C99-A81B-94D0EE5CFFEB}" dt="2026-03-09T19:38:10.899" v="104" actId="478"/>
           <ac:cxnSpMkLst>
             <pc:docMk/>
             <pc:sldMk cId="1501170907" sldId="256"/>
-            <ac:cxnSpMk id="154" creationId="{9779A5A3-D9AC-4884-E09E-088355A5273D}"/>
+            <ac:cxnSpMk id="183" creationId="{FD895F0D-4BF5-DC7B-F7F3-413542C80AFB}"/>
           </ac:cxnSpMkLst>
         </pc:cxnChg>
-        <pc:cxnChg chg="del">
-          <ac:chgData name="York, George W CIV USAF USAFA DF/DFEC" userId="1fb5875a-4594-4db2-80fb-f0db3de11280" providerId="ADAL" clId="{09330963-85FD-4C99-A81B-94D0EE5CFFEB}" dt="2026-03-05T21:13:13.039" v="23" actId="478"/>
+        <pc:cxnChg chg="mod">
+          <ac:chgData name="York, George W CIV USAF USAFA DF/DFEC" userId="1fb5875a-4594-4db2-80fb-f0db3de11280" providerId="ADAL" clId="{09330963-85FD-4C99-A81B-94D0EE5CFFEB}" dt="2026-03-09T19:37:51.296" v="100" actId="14100"/>
           <ac:cxnSpMkLst>
             <pc:docMk/>
             <pc:sldMk cId="1501170907" sldId="256"/>
-            <ac:cxnSpMk id="156" creationId="{4E8E377D-848A-C4CD-E531-28E5114DF352}"/>
-          </ac:cxnSpMkLst>
-        </pc:cxnChg>
-        <pc:cxnChg chg="del mod">
-          <ac:chgData name="York, George W CIV USAF USAFA DF/DFEC" userId="1fb5875a-4594-4db2-80fb-f0db3de11280" providerId="ADAL" clId="{09330963-85FD-4C99-A81B-94D0EE5CFFEB}" dt="2026-03-05T21:24:50.919" v="85" actId="478"/>
-          <ac:cxnSpMkLst>
-            <pc:docMk/>
-            <pc:sldMk cId="1501170907" sldId="256"/>
-            <ac:cxnSpMk id="245" creationId="{44285445-3673-F463-34B1-B7F351676027}"/>
+            <ac:cxnSpMk id="185" creationId="{8A322888-ED2A-D52F-5D81-55A9F50D831D}"/>
           </ac:cxnSpMkLst>
         </pc:cxnChg>
         <pc:cxnChg chg="mod">
@@ -511,28 +607,60 @@
             <ac:cxnSpMk id="269" creationId="{87860765-22E8-2DBF-0155-43937E1810EB}"/>
           </ac:cxnSpMkLst>
         </pc:cxnChg>
-        <pc:cxnChg chg="del">
-          <ac:chgData name="York, George W CIV USAF USAFA DF/DFEC" userId="1fb5875a-4594-4db2-80fb-f0db3de11280" providerId="ADAL" clId="{09330963-85FD-4C99-A81B-94D0EE5CFFEB}" dt="2026-03-05T21:13:39.174" v="27" actId="478"/>
-          <ac:cxnSpMkLst>
-            <pc:docMk/>
-            <pc:sldMk cId="1501170907" sldId="256"/>
-            <ac:cxnSpMk id="272" creationId="{E65CDBEF-0F4B-94ED-0527-0710DF016776}"/>
-          </ac:cxnSpMkLst>
-        </pc:cxnChg>
-        <pc:cxnChg chg="mod">
-          <ac:chgData name="York, George W CIV USAF USAFA DF/DFEC" userId="1fb5875a-4594-4db2-80fb-f0db3de11280" providerId="ADAL" clId="{09330963-85FD-4C99-A81B-94D0EE5CFFEB}" dt="2026-03-05T21:16:07.070" v="44" actId="1076"/>
+        <pc:cxnChg chg="del mod">
+          <ac:chgData name="York, George W CIV USAF USAFA DF/DFEC" userId="1fb5875a-4594-4db2-80fb-f0db3de11280" providerId="ADAL" clId="{09330963-85FD-4C99-A81B-94D0EE5CFFEB}" dt="2026-03-09T22:15:04.399" v="134" actId="478"/>
           <ac:cxnSpMkLst>
             <pc:docMk/>
             <pc:sldMk cId="1501170907" sldId="256"/>
             <ac:cxnSpMk id="275" creationId="{FF5E826E-C5DA-266A-3DEA-9D97594449EE}"/>
           </ac:cxnSpMkLst>
         </pc:cxnChg>
-        <pc:cxnChg chg="mod">
-          <ac:chgData name="York, George W CIV USAF USAFA DF/DFEC" userId="1fb5875a-4594-4db2-80fb-f0db3de11280" providerId="ADAL" clId="{09330963-85FD-4C99-A81B-94D0EE5CFFEB}" dt="2026-03-05T21:16:01.985" v="43" actId="1076"/>
+        <pc:cxnChg chg="add del mod">
+          <ac:chgData name="York, George W CIV USAF USAFA DF/DFEC" userId="1fb5875a-4594-4db2-80fb-f0db3de11280" providerId="ADAL" clId="{09330963-85FD-4C99-A81B-94D0EE5CFFEB}" dt="2026-03-09T22:15:11.380" v="137" actId="1076"/>
           <ac:cxnSpMkLst>
             <pc:docMk/>
             <pc:sldMk cId="1501170907" sldId="256"/>
             <ac:cxnSpMk id="276" creationId="{370ACF3C-5A72-31AC-3830-8B43C336935F}"/>
+          </ac:cxnSpMkLst>
+        </pc:cxnChg>
+        <pc:cxnChg chg="del">
+          <ac:chgData name="York, George W CIV USAF USAFA DF/DFEC" userId="1fb5875a-4594-4db2-80fb-f0db3de11280" providerId="ADAL" clId="{09330963-85FD-4C99-A81B-94D0EE5CFFEB}" dt="2026-03-09T19:36:42.246" v="88" actId="478"/>
+          <ac:cxnSpMkLst>
+            <pc:docMk/>
+            <pc:sldMk cId="1501170907" sldId="256"/>
+            <ac:cxnSpMk id="280" creationId="{BF12A351-142A-23D7-36BD-9308B9D720AA}"/>
+          </ac:cxnSpMkLst>
+        </pc:cxnChg>
+        <pc:cxnChg chg="mod">
+          <ac:chgData name="York, George W CIV USAF USAFA DF/DFEC" userId="1fb5875a-4594-4db2-80fb-f0db3de11280" providerId="ADAL" clId="{09330963-85FD-4C99-A81B-94D0EE5CFFEB}" dt="2026-03-09T22:12:17.853" v="116" actId="1076"/>
+          <ac:cxnSpMkLst>
+            <pc:docMk/>
+            <pc:sldMk cId="1501170907" sldId="256"/>
+            <ac:cxnSpMk id="299" creationId="{767B8A25-A48B-7850-EE9E-21374996DACF}"/>
+          </ac:cxnSpMkLst>
+        </pc:cxnChg>
+        <pc:cxnChg chg="mod">
+          <ac:chgData name="York, George W CIV USAF USAFA DF/DFEC" userId="1fb5875a-4594-4db2-80fb-f0db3de11280" providerId="ADAL" clId="{09330963-85FD-4C99-A81B-94D0EE5CFFEB}" dt="2026-03-10T03:16:28.004" v="162" actId="14100"/>
+          <ac:cxnSpMkLst>
+            <pc:docMk/>
+            <pc:sldMk cId="1501170907" sldId="256"/>
+            <ac:cxnSpMk id="303" creationId="{CFAE5DC6-8CF9-2673-71C9-AFA4E7997F1B}"/>
+          </ac:cxnSpMkLst>
+        </pc:cxnChg>
+        <pc:cxnChg chg="del">
+          <ac:chgData name="York, George W CIV USAF USAFA DF/DFEC" userId="1fb5875a-4594-4db2-80fb-f0db3de11280" providerId="ADAL" clId="{09330963-85FD-4C99-A81B-94D0EE5CFFEB}" dt="2026-03-09T22:15:17.563" v="139" actId="478"/>
+          <ac:cxnSpMkLst>
+            <pc:docMk/>
+            <pc:sldMk cId="1501170907" sldId="256"/>
+            <ac:cxnSpMk id="315" creationId="{CC2E6CF6-7F9B-DF2E-8401-A11C6FFE7D1D}"/>
+          </ac:cxnSpMkLst>
+        </pc:cxnChg>
+        <pc:cxnChg chg="del mod">
+          <ac:chgData name="York, George W CIV USAF USAFA DF/DFEC" userId="1fb5875a-4594-4db2-80fb-f0db3de11280" providerId="ADAL" clId="{09330963-85FD-4C99-A81B-94D0EE5CFFEB}" dt="2026-03-10T03:15:15.170" v="152" actId="478"/>
+          <ac:cxnSpMkLst>
+            <pc:docMk/>
+            <pc:sldMk cId="1501170907" sldId="256"/>
+            <ac:cxnSpMk id="342" creationId="{C76199D9-440A-9194-BCF0-9A2E6EDE070C}"/>
           </ac:cxnSpMkLst>
         </pc:cxnChg>
       </pc:sldChg>
@@ -688,7 +816,7 @@
           <a:p>
             <a:fld id="{51AFF834-1BEC-4F95-9622-28B5DCC1FE16}" type="datetimeFigureOut">
               <a:rPr lang="en-US" smtClean="0"/>
-              <a:t>3/5/2026</a:t>
+              <a:t>3/9/2026</a:t>
             </a:fld>
             <a:endParaRPr lang="en-US"/>
           </a:p>
@@ -886,7 +1014,7 @@
           <a:p>
             <a:fld id="{51AFF834-1BEC-4F95-9622-28B5DCC1FE16}" type="datetimeFigureOut">
               <a:rPr lang="en-US" smtClean="0"/>
-              <a:t>3/5/2026</a:t>
+              <a:t>3/9/2026</a:t>
             </a:fld>
             <a:endParaRPr lang="en-US"/>
           </a:p>
@@ -1094,7 +1222,7 @@
           <a:p>
             <a:fld id="{51AFF834-1BEC-4F95-9622-28B5DCC1FE16}" type="datetimeFigureOut">
               <a:rPr lang="en-US" smtClean="0"/>
-              <a:t>3/5/2026</a:t>
+              <a:t>3/9/2026</a:t>
             </a:fld>
             <a:endParaRPr lang="en-US"/>
           </a:p>
@@ -1292,7 +1420,7 @@
           <a:p>
             <a:fld id="{51AFF834-1BEC-4F95-9622-28B5DCC1FE16}" type="datetimeFigureOut">
               <a:rPr lang="en-US" smtClean="0"/>
-              <a:t>3/5/2026</a:t>
+              <a:t>3/9/2026</a:t>
             </a:fld>
             <a:endParaRPr lang="en-US"/>
           </a:p>
@@ -1567,7 +1695,7 @@
           <a:p>
             <a:fld id="{51AFF834-1BEC-4F95-9622-28B5DCC1FE16}" type="datetimeFigureOut">
               <a:rPr lang="en-US" smtClean="0"/>
-              <a:t>3/5/2026</a:t>
+              <a:t>3/9/2026</a:t>
             </a:fld>
             <a:endParaRPr lang="en-US"/>
           </a:p>
@@ -1832,7 +1960,7 @@
           <a:p>
             <a:fld id="{51AFF834-1BEC-4F95-9622-28B5DCC1FE16}" type="datetimeFigureOut">
               <a:rPr lang="en-US" smtClean="0"/>
-              <a:t>3/5/2026</a:t>
+              <a:t>3/9/2026</a:t>
             </a:fld>
             <a:endParaRPr lang="en-US"/>
           </a:p>
@@ -2244,7 +2372,7 @@
           <a:p>
             <a:fld id="{51AFF834-1BEC-4F95-9622-28B5DCC1FE16}" type="datetimeFigureOut">
               <a:rPr lang="en-US" smtClean="0"/>
-              <a:t>3/5/2026</a:t>
+              <a:t>3/9/2026</a:t>
             </a:fld>
             <a:endParaRPr lang="en-US"/>
           </a:p>
@@ -2385,7 +2513,7 @@
           <a:p>
             <a:fld id="{51AFF834-1BEC-4F95-9622-28B5DCC1FE16}" type="datetimeFigureOut">
               <a:rPr lang="en-US" smtClean="0"/>
-              <a:t>3/5/2026</a:t>
+              <a:t>3/9/2026</a:t>
             </a:fld>
             <a:endParaRPr lang="en-US"/>
           </a:p>
@@ -2498,7 +2626,7 @@
           <a:p>
             <a:fld id="{51AFF834-1BEC-4F95-9622-28B5DCC1FE16}" type="datetimeFigureOut">
               <a:rPr lang="en-US" smtClean="0"/>
-              <a:t>3/5/2026</a:t>
+              <a:t>3/9/2026</a:t>
             </a:fld>
             <a:endParaRPr lang="en-US"/>
           </a:p>
@@ -2809,7 +2937,7 @@
           <a:p>
             <a:fld id="{51AFF834-1BEC-4F95-9622-28B5DCC1FE16}" type="datetimeFigureOut">
               <a:rPr lang="en-US" smtClean="0"/>
-              <a:t>3/5/2026</a:t>
+              <a:t>3/9/2026</a:t>
             </a:fld>
             <a:endParaRPr lang="en-US"/>
           </a:p>
@@ -3097,7 +3225,7 @@
           <a:p>
             <a:fld id="{51AFF834-1BEC-4F95-9622-28B5DCC1FE16}" type="datetimeFigureOut">
               <a:rPr lang="en-US" smtClean="0"/>
-              <a:t>3/5/2026</a:t>
+              <a:t>3/9/2026</a:t>
             </a:fld>
             <a:endParaRPr lang="en-US"/>
           </a:p>
@@ -3338,7 +3466,7 @@
           <a:p>
             <a:fld id="{51AFF834-1BEC-4F95-9622-28B5DCC1FE16}" type="datetimeFigureOut">
               <a:rPr lang="en-US" smtClean="0"/>
-              <a:t>3/5/2026</a:t>
+              <a:t>3/9/2026</a:t>
             </a:fld>
             <a:endParaRPr lang="en-US"/>
           </a:p>
@@ -7026,79 +7154,6 @@
           </a:fontRef>
         </p:style>
       </p:cxnSp>
-      <p:sp>
-        <p:nvSpPr>
-          <p:cNvPr id="160" name="TextBox 159">
-            <a:extLst>
-              <a:ext uri="{FF2B5EF4-FFF2-40B4-BE49-F238E27FC236}">
-                <a16:creationId xmlns:a16="http://schemas.microsoft.com/office/drawing/2014/main" id="{3BF5B236-4D8B-849D-0CDF-2CB1B5EE7284}"/>
-              </a:ext>
-            </a:extLst>
-          </p:cNvPr>
-          <p:cNvSpPr txBox="1"/>
-          <p:nvPr/>
-        </p:nvSpPr>
-        <p:spPr>
-          <a:xfrm>
-            <a:off x="7868407" y="4099798"/>
-            <a:ext cx="413896" cy="230832"/>
-          </a:xfrm>
-          <a:prstGeom prst="rect">
-            <a:avLst/>
-          </a:prstGeom>
-          <a:noFill/>
-        </p:spPr>
-        <p:txBody>
-          <a:bodyPr wrap="none" rtlCol="0">
-            <a:spAutoFit/>
-          </a:bodyPr>
-          <a:lstStyle/>
-          <a:p>
-            <a:pPr algn="ctr"/>
-            <a:r>
-              <a:rPr lang="en-US" sz="900" dirty="0"/>
-              <a:t>NPC</a:t>
-            </a:r>
-          </a:p>
-        </p:txBody>
-      </p:sp>
-      <p:sp>
-        <p:nvSpPr>
-          <p:cNvPr id="161" name="TextBox 160">
-            <a:extLst>
-              <a:ext uri="{FF2B5EF4-FFF2-40B4-BE49-F238E27FC236}">
-                <a16:creationId xmlns:a16="http://schemas.microsoft.com/office/drawing/2014/main" id="{0E9784F2-B3AB-C0FA-FDFE-48C83AB9B12E}"/>
-              </a:ext>
-            </a:extLst>
-          </p:cNvPr>
-          <p:cNvSpPr txBox="1"/>
-          <p:nvPr/>
-        </p:nvSpPr>
-        <p:spPr>
-          <a:xfrm>
-            <a:off x="7871560" y="4515171"/>
-            <a:ext cx="407484" cy="230832"/>
-          </a:xfrm>
-          <a:prstGeom prst="rect">
-            <a:avLst/>
-          </a:prstGeom>
-          <a:noFill/>
-        </p:spPr>
-        <p:txBody>
-          <a:bodyPr wrap="none" rtlCol="0">
-            <a:spAutoFit/>
-          </a:bodyPr>
-          <a:lstStyle/>
-          <a:p>
-            <a:pPr algn="ctr"/>
-            <a:r>
-              <a:rPr lang="en-US" sz="900" dirty="0" err="1"/>
-              <a:t>imm</a:t>
-            </a:r>
-            <a:endParaRPr lang="en-US" sz="900" dirty="0"/>
-          </a:p>
-        </p:txBody>
-      </p:sp>
       <p:grpSp>
         <p:nvGrpSpPr>
           <p:cNvPr id="162" name="Group 161">
@@ -7113,8 +7168,8 @@
         </p:nvGrpSpPr>
         <p:grpSpPr>
           <a:xfrm>
-            <a:off x="6110717" y="2579087"/>
-            <a:ext cx="292770" cy="637674"/>
+            <a:off x="6110717" y="2602555"/>
+            <a:ext cx="292770" cy="614206"/>
             <a:chOff x="1074820" y="1507958"/>
             <a:chExt cx="292770" cy="637674"/>
           </a:xfrm>
@@ -7441,336 +7496,8 @@
         </p:nvCxnSpPr>
         <p:spPr>
           <a:xfrm flipV="1">
-            <a:off x="4258959" y="2685366"/>
-            <a:ext cx="1851758" cy="16678"/>
-          </a:xfrm>
-          <a:prstGeom prst="straightConnector1">
-            <a:avLst/>
-          </a:prstGeom>
-          <a:ln>
-            <a:tailEnd type="triangle"/>
-          </a:ln>
-        </p:spPr>
-        <p:style>
-          <a:lnRef idx="2">
-            <a:schemeClr val="accent1"/>
-          </a:lnRef>
-          <a:fillRef idx="0">
-            <a:schemeClr val="accent1"/>
-          </a:fillRef>
-          <a:effectRef idx="1">
-            <a:schemeClr val="accent1"/>
-          </a:effectRef>
-          <a:fontRef idx="minor">
-            <a:schemeClr val="tx1"/>
-          </a:fontRef>
-        </p:style>
-      </p:cxnSp>
-      <p:grpSp>
-        <p:nvGrpSpPr>
-          <p:cNvPr id="175" name="Group 174">
-            <a:extLst>
-              <a:ext uri="{FF2B5EF4-FFF2-40B4-BE49-F238E27FC236}">
-                <a16:creationId xmlns:a16="http://schemas.microsoft.com/office/drawing/2014/main" id="{CF1E05C7-0258-A1DB-5D4E-EA66C6CAA296}"/>
-              </a:ext>
-            </a:extLst>
-          </p:cNvPr>
-          <p:cNvGrpSpPr/>
-          <p:nvPr/>
-        </p:nvGrpSpPr>
-        <p:grpSpPr>
-          <a:xfrm>
-            <a:off x="8385327" y="3269097"/>
-            <a:ext cx="292770" cy="637674"/>
-            <a:chOff x="1074820" y="1507958"/>
-            <a:chExt cx="292770" cy="637674"/>
-          </a:xfrm>
-        </p:grpSpPr>
-        <p:cxnSp>
-          <p:nvCxnSpPr>
-            <p:cNvPr id="176" name="Straight Connector 175">
-              <a:extLst>
-                <a:ext uri="{FF2B5EF4-FFF2-40B4-BE49-F238E27FC236}">
-                  <a16:creationId xmlns:a16="http://schemas.microsoft.com/office/drawing/2014/main" id="{9B1C3327-A611-2BA8-B007-9186CF3A0E42}"/>
-                </a:ext>
-              </a:extLst>
-            </p:cNvPr>
-            <p:cNvCxnSpPr>
-              <a:cxnSpLocks/>
-            </p:cNvCxnSpPr>
-            <p:nvPr/>
-          </p:nvCxnSpPr>
-          <p:spPr>
-            <a:xfrm>
-              <a:off x="1074821" y="1507958"/>
-              <a:ext cx="0" cy="212558"/>
-            </a:xfrm>
-            <a:prstGeom prst="line">
-              <a:avLst/>
-            </a:prstGeom>
-          </p:spPr>
-          <p:style>
-            <a:lnRef idx="2">
-              <a:schemeClr val="accent1"/>
-            </a:lnRef>
-            <a:fillRef idx="0">
-              <a:schemeClr val="accent1"/>
-            </a:fillRef>
-            <a:effectRef idx="1">
-              <a:schemeClr val="accent1"/>
-            </a:effectRef>
-            <a:fontRef idx="minor">
-              <a:schemeClr val="tx1"/>
-            </a:fontRef>
-          </p:style>
-        </p:cxnSp>
-        <p:cxnSp>
-          <p:nvCxnSpPr>
-            <p:cNvPr id="177" name="Straight Connector 176">
-              <a:extLst>
-                <a:ext uri="{FF2B5EF4-FFF2-40B4-BE49-F238E27FC236}">
-                  <a16:creationId xmlns:a16="http://schemas.microsoft.com/office/drawing/2014/main" id="{3874B16B-1236-9BD1-3E90-062756FAD0B0}"/>
-                </a:ext>
-              </a:extLst>
-            </p:cNvPr>
-            <p:cNvCxnSpPr>
-              <a:cxnSpLocks/>
-            </p:cNvCxnSpPr>
-            <p:nvPr/>
-          </p:nvCxnSpPr>
-          <p:spPr>
-            <a:xfrm>
-              <a:off x="1367590" y="1720516"/>
-              <a:ext cx="0" cy="212558"/>
-            </a:xfrm>
-            <a:prstGeom prst="line">
-              <a:avLst/>
-            </a:prstGeom>
-          </p:spPr>
-          <p:style>
-            <a:lnRef idx="2">
-              <a:schemeClr val="accent1"/>
-            </a:lnRef>
-            <a:fillRef idx="0">
-              <a:schemeClr val="accent1"/>
-            </a:fillRef>
-            <a:effectRef idx="1">
-              <a:schemeClr val="accent1"/>
-            </a:effectRef>
-            <a:fontRef idx="minor">
-              <a:schemeClr val="tx1"/>
-            </a:fontRef>
-          </p:style>
-        </p:cxnSp>
-        <p:cxnSp>
-          <p:nvCxnSpPr>
-            <p:cNvPr id="178" name="Straight Connector 177">
-              <a:extLst>
-                <a:ext uri="{FF2B5EF4-FFF2-40B4-BE49-F238E27FC236}">
-                  <a16:creationId xmlns:a16="http://schemas.microsoft.com/office/drawing/2014/main" id="{C545D7D5-18F9-460B-16FB-45A5E5B3036A}"/>
-                </a:ext>
-              </a:extLst>
-            </p:cNvPr>
-            <p:cNvCxnSpPr>
-              <a:cxnSpLocks/>
-            </p:cNvCxnSpPr>
-            <p:nvPr/>
-          </p:nvCxnSpPr>
-          <p:spPr>
-            <a:xfrm>
-              <a:off x="1074821" y="1933074"/>
-              <a:ext cx="0" cy="212558"/>
-            </a:xfrm>
-            <a:prstGeom prst="line">
-              <a:avLst/>
-            </a:prstGeom>
-          </p:spPr>
-          <p:style>
-            <a:lnRef idx="2">
-              <a:schemeClr val="accent1"/>
-            </a:lnRef>
-            <a:fillRef idx="0">
-              <a:schemeClr val="accent1"/>
-            </a:fillRef>
-            <a:effectRef idx="1">
-              <a:schemeClr val="accent1"/>
-            </a:effectRef>
-            <a:fontRef idx="minor">
-              <a:schemeClr val="tx1"/>
-            </a:fontRef>
-          </p:style>
-        </p:cxnSp>
-        <p:cxnSp>
-          <p:nvCxnSpPr>
-            <p:cNvPr id="179" name="Straight Connector 178">
-              <a:extLst>
-                <a:ext uri="{FF2B5EF4-FFF2-40B4-BE49-F238E27FC236}">
-                  <a16:creationId xmlns:a16="http://schemas.microsoft.com/office/drawing/2014/main" id="{18D96393-1B92-25C8-CCC7-A10F33059DC8}"/>
-                </a:ext>
-              </a:extLst>
-            </p:cNvPr>
-            <p:cNvCxnSpPr>
-              <a:cxnSpLocks/>
-            </p:cNvCxnSpPr>
-            <p:nvPr/>
-          </p:nvCxnSpPr>
-          <p:spPr>
-            <a:xfrm flipH="1">
-              <a:off x="1074821" y="1936227"/>
-              <a:ext cx="292769" cy="209405"/>
-            </a:xfrm>
-            <a:prstGeom prst="line">
-              <a:avLst/>
-            </a:prstGeom>
-          </p:spPr>
-          <p:style>
-            <a:lnRef idx="2">
-              <a:schemeClr val="accent1"/>
-            </a:lnRef>
-            <a:fillRef idx="0">
-              <a:schemeClr val="accent1"/>
-            </a:fillRef>
-            <a:effectRef idx="1">
-              <a:schemeClr val="accent1"/>
-            </a:effectRef>
-            <a:fontRef idx="minor">
-              <a:schemeClr val="tx1"/>
-            </a:fontRef>
-          </p:style>
-        </p:cxnSp>
-        <p:cxnSp>
-          <p:nvCxnSpPr>
-            <p:cNvPr id="180" name="Straight Connector 179">
-              <a:extLst>
-                <a:ext uri="{FF2B5EF4-FFF2-40B4-BE49-F238E27FC236}">
-                  <a16:creationId xmlns:a16="http://schemas.microsoft.com/office/drawing/2014/main" id="{753456A5-2F22-6878-6368-381F766CB36D}"/>
-                </a:ext>
-              </a:extLst>
-            </p:cNvPr>
-            <p:cNvCxnSpPr>
-              <a:cxnSpLocks/>
-            </p:cNvCxnSpPr>
-            <p:nvPr/>
-          </p:nvCxnSpPr>
-          <p:spPr>
-            <a:xfrm flipH="1" flipV="1">
-              <a:off x="1074821" y="1507958"/>
-              <a:ext cx="292769" cy="215711"/>
-            </a:xfrm>
-            <a:prstGeom prst="line">
-              <a:avLst/>
-            </a:prstGeom>
-          </p:spPr>
-          <p:style>
-            <a:lnRef idx="2">
-              <a:schemeClr val="accent1"/>
-            </a:lnRef>
-            <a:fillRef idx="0">
-              <a:schemeClr val="accent1"/>
-            </a:fillRef>
-            <a:effectRef idx="1">
-              <a:schemeClr val="accent1"/>
-            </a:effectRef>
-            <a:fontRef idx="minor">
-              <a:schemeClr val="tx1"/>
-            </a:fontRef>
-          </p:style>
-        </p:cxnSp>
-        <p:cxnSp>
-          <p:nvCxnSpPr>
-            <p:cNvPr id="181" name="Straight Connector 180">
-              <a:extLst>
-                <a:ext uri="{FF2B5EF4-FFF2-40B4-BE49-F238E27FC236}">
-                  <a16:creationId xmlns:a16="http://schemas.microsoft.com/office/drawing/2014/main" id="{0460A47E-6551-87B8-D148-22BB0E7B222D}"/>
-                </a:ext>
-              </a:extLst>
-            </p:cNvPr>
-            <p:cNvCxnSpPr>
-              <a:cxnSpLocks/>
-            </p:cNvCxnSpPr>
-            <p:nvPr/>
-          </p:nvCxnSpPr>
-          <p:spPr>
-            <a:xfrm flipV="1">
-              <a:off x="1074821" y="1829948"/>
-              <a:ext cx="140545" cy="103126"/>
-            </a:xfrm>
-            <a:prstGeom prst="line">
-              <a:avLst/>
-            </a:prstGeom>
-          </p:spPr>
-          <p:style>
-            <a:lnRef idx="2">
-              <a:schemeClr val="accent1"/>
-            </a:lnRef>
-            <a:fillRef idx="0">
-              <a:schemeClr val="accent1"/>
-            </a:fillRef>
-            <a:effectRef idx="1">
-              <a:schemeClr val="accent1"/>
-            </a:effectRef>
-            <a:fontRef idx="minor">
-              <a:schemeClr val="tx1"/>
-            </a:fontRef>
-          </p:style>
-        </p:cxnSp>
-        <p:cxnSp>
-          <p:nvCxnSpPr>
-            <p:cNvPr id="182" name="Straight Connector 181">
-              <a:extLst>
-                <a:ext uri="{FF2B5EF4-FFF2-40B4-BE49-F238E27FC236}">
-                  <a16:creationId xmlns:a16="http://schemas.microsoft.com/office/drawing/2014/main" id="{5A016AB0-C9E3-96DB-019B-5F43AB8DD8B9}"/>
-                </a:ext>
-              </a:extLst>
-            </p:cNvPr>
-            <p:cNvCxnSpPr>
-              <a:cxnSpLocks/>
-            </p:cNvCxnSpPr>
-            <p:nvPr/>
-          </p:nvCxnSpPr>
-          <p:spPr>
-            <a:xfrm>
-              <a:off x="1074820" y="1716505"/>
-              <a:ext cx="140545" cy="107137"/>
-            </a:xfrm>
-            <a:prstGeom prst="line">
-              <a:avLst/>
-            </a:prstGeom>
-          </p:spPr>
-          <p:style>
-            <a:lnRef idx="2">
-              <a:schemeClr val="accent1"/>
-            </a:lnRef>
-            <a:fillRef idx="0">
-              <a:schemeClr val="accent1"/>
-            </a:fillRef>
-            <a:effectRef idx="1">
-              <a:schemeClr val="accent1"/>
-            </a:effectRef>
-            <a:fontRef idx="minor">
-              <a:schemeClr val="tx1"/>
-            </a:fontRef>
-          </p:style>
-        </p:cxnSp>
-      </p:grpSp>
-      <p:cxnSp>
-        <p:nvCxnSpPr>
-          <p:cNvPr id="183" name="Straight Arrow Connector 182">
-            <a:extLst>
-              <a:ext uri="{FF2B5EF4-FFF2-40B4-BE49-F238E27FC236}">
-                <a16:creationId xmlns:a16="http://schemas.microsoft.com/office/drawing/2014/main" id="{FD895F0D-4BF5-DC7B-F7F3-413542C80AFB}"/>
-              </a:ext>
-            </a:extLst>
-          </p:cNvPr>
-          <p:cNvCxnSpPr>
-            <a:cxnSpLocks/>
-          </p:cNvCxnSpPr>
-          <p:nvPr/>
-        </p:nvCxnSpPr>
-        <p:spPr>
-          <a:xfrm>
-            <a:off x="8211392" y="3800492"/>
-            <a:ext cx="173935" cy="0"/>
+            <a:off x="4258959" y="2693306"/>
+            <a:ext cx="1851758" cy="8738"/>
           </a:xfrm>
           <a:prstGeom prst="straightConnector1">
             <a:avLst/>
@@ -7803,13 +7530,15 @@
               </a:ext>
             </a:extLst>
           </p:cNvPr>
-          <p:cNvCxnSpPr/>
+          <p:cNvCxnSpPr>
+            <a:cxnSpLocks/>
+          </p:cNvCxnSpPr>
           <p:nvPr/>
         </p:nvCxnSpPr>
         <p:spPr>
           <a:xfrm>
-            <a:off x="8207519" y="3375376"/>
-            <a:ext cx="177808" cy="0"/>
+            <a:off x="9254353" y="3367023"/>
+            <a:ext cx="0" cy="137890"/>
           </a:xfrm>
           <a:prstGeom prst="straightConnector1">
             <a:avLst/>
@@ -8895,7 +8624,7 @@
         </p:nvSpPr>
         <p:spPr>
           <a:xfrm>
-            <a:off x="7795398" y="3262227"/>
+            <a:off x="9014468" y="3198168"/>
             <a:ext cx="474810" cy="230832"/>
           </a:xfrm>
           <a:prstGeom prst="rect">
@@ -8931,7 +8660,7 @@
         </p:nvSpPr>
         <p:spPr>
           <a:xfrm>
-            <a:off x="7776328" y="3693360"/>
+            <a:off x="9378410" y="3198168"/>
             <a:ext cx="474810" cy="230832"/>
           </a:xfrm>
           <a:prstGeom prst="rect">
@@ -8949,42 +8678,6 @@
             <a:r>
               <a:rPr lang="en-US" sz="900" dirty="0"/>
               <a:t>dout2</a:t>
-            </a:r>
-          </a:p>
-        </p:txBody>
-      </p:sp>
-      <p:sp>
-        <p:nvSpPr>
-          <p:cNvPr id="266" name="TextBox 265">
-            <a:extLst>
-              <a:ext uri="{FF2B5EF4-FFF2-40B4-BE49-F238E27FC236}">
-                <a16:creationId xmlns:a16="http://schemas.microsoft.com/office/drawing/2014/main" id="{B178740B-BE6B-31B0-B4FD-0ED1D3EABF36}"/>
-              </a:ext>
-            </a:extLst>
-          </p:cNvPr>
-          <p:cNvSpPr txBox="1"/>
-          <p:nvPr/>
-        </p:nvSpPr>
-        <p:spPr>
-          <a:xfrm>
-            <a:off x="8430583" y="3473909"/>
-            <a:ext cx="330540" cy="230832"/>
-          </a:xfrm>
-          <a:prstGeom prst="rect">
-            <a:avLst/>
-          </a:prstGeom>
-          <a:noFill/>
-        </p:spPr>
-        <p:txBody>
-          <a:bodyPr wrap="none" rtlCol="0">
-            <a:spAutoFit/>
-          </a:bodyPr>
-          <a:lstStyle/>
-          <a:p>
-            <a:pPr algn="ctr"/>
-            <a:r>
-              <a:rPr lang="en-US" sz="900" dirty="0"/>
-              <a:t>“-”</a:t>
             </a:r>
           </a:p>
         </p:txBody>
@@ -9068,20 +8761,22 @@
       </p:sp>
       <p:cxnSp>
         <p:nvCxnSpPr>
-          <p:cNvPr id="275" name="Straight Arrow Connector 274">
-            <a:extLst>
-              <a:ext uri="{FF2B5EF4-FFF2-40B4-BE49-F238E27FC236}">
-                <a16:creationId xmlns:a16="http://schemas.microsoft.com/office/drawing/2014/main" id="{FF5E826E-C5DA-266A-3DEA-9D97594449EE}"/>
-              </a:ext>
-            </a:extLst>
-          </p:cNvPr>
-          <p:cNvCxnSpPr/>
+          <p:cNvPr id="276" name="Straight Arrow Connector 275">
+            <a:extLst>
+              <a:ext uri="{FF2B5EF4-FFF2-40B4-BE49-F238E27FC236}">
+                <a16:creationId xmlns:a16="http://schemas.microsoft.com/office/drawing/2014/main" id="{370ACF3C-5A72-31AC-3830-8B43C336935F}"/>
+              </a:ext>
+            </a:extLst>
+          </p:cNvPr>
+          <p:cNvCxnSpPr>
+            <a:cxnSpLocks/>
+          </p:cNvCxnSpPr>
           <p:nvPr/>
         </p:nvCxnSpPr>
         <p:spPr>
           <a:xfrm>
-            <a:off x="9424268" y="4047113"/>
-            <a:ext cx="0" cy="230832"/>
+            <a:off x="9431921" y="3928834"/>
+            <a:ext cx="0" cy="325106"/>
           </a:xfrm>
           <a:prstGeom prst="straightConnector1">
             <a:avLst/>
@@ -9091,93 +8786,6 @@
               <a:srgbClr val="FF0000"/>
             </a:solidFill>
             <a:tailEnd type="triangle"/>
-          </a:ln>
-        </p:spPr>
-        <p:style>
-          <a:lnRef idx="2">
-            <a:schemeClr val="accent1"/>
-          </a:lnRef>
-          <a:fillRef idx="0">
-            <a:schemeClr val="accent1"/>
-          </a:fillRef>
-          <a:effectRef idx="1">
-            <a:schemeClr val="accent1"/>
-          </a:effectRef>
-          <a:fontRef idx="minor">
-            <a:schemeClr val="tx1"/>
-          </a:fontRef>
-        </p:style>
-      </p:cxnSp>
-      <p:cxnSp>
-        <p:nvCxnSpPr>
-          <p:cNvPr id="276" name="Straight Arrow Connector 275">
-            <a:extLst>
-              <a:ext uri="{FF2B5EF4-FFF2-40B4-BE49-F238E27FC236}">
-                <a16:creationId xmlns:a16="http://schemas.microsoft.com/office/drawing/2014/main" id="{370ACF3C-5A72-31AC-3830-8B43C336935F}"/>
-              </a:ext>
-            </a:extLst>
-          </p:cNvPr>
-          <p:cNvCxnSpPr>
-            <a:cxnSpLocks/>
-          </p:cNvCxnSpPr>
-          <p:nvPr/>
-        </p:nvCxnSpPr>
-        <p:spPr>
-          <a:xfrm>
-            <a:off x="9376888" y="3598400"/>
-            <a:ext cx="0" cy="650213"/>
-          </a:xfrm>
-          <a:prstGeom prst="straightConnector1">
-            <a:avLst/>
-          </a:prstGeom>
-          <a:ln>
-            <a:solidFill>
-              <a:srgbClr val="FF0000"/>
-            </a:solidFill>
-            <a:tailEnd type="triangle"/>
-          </a:ln>
-        </p:spPr>
-        <p:style>
-          <a:lnRef idx="2">
-            <a:schemeClr val="accent1"/>
-          </a:lnRef>
-          <a:fillRef idx="0">
-            <a:schemeClr val="accent1"/>
-          </a:fillRef>
-          <a:effectRef idx="1">
-            <a:schemeClr val="accent1"/>
-          </a:effectRef>
-          <a:fontRef idx="minor">
-            <a:schemeClr val="tx1"/>
-          </a:fontRef>
-        </p:style>
-      </p:cxnSp>
-      <p:cxnSp>
-        <p:nvCxnSpPr>
-          <p:cNvPr id="280" name="Straight Connector 279">
-            <a:extLst>
-              <a:ext uri="{FF2B5EF4-FFF2-40B4-BE49-F238E27FC236}">
-                <a16:creationId xmlns:a16="http://schemas.microsoft.com/office/drawing/2014/main" id="{BF12A351-142A-23D7-36BD-9308B9D720AA}"/>
-              </a:ext>
-            </a:extLst>
-          </p:cNvPr>
-          <p:cNvCxnSpPr>
-            <a:cxnSpLocks/>
-          </p:cNvCxnSpPr>
-          <p:nvPr/>
-        </p:nvCxnSpPr>
-        <p:spPr>
-          <a:xfrm>
-            <a:off x="8690708" y="3591169"/>
-            <a:ext cx="695569" cy="0"/>
-          </a:xfrm>
-          <a:prstGeom prst="line">
-            <a:avLst/>
-          </a:prstGeom>
-          <a:ln>
-            <a:solidFill>
-              <a:srgbClr val="FF0000"/>
-            </a:solidFill>
           </a:ln>
         </p:spPr>
         <p:style>
@@ -9395,7 +9003,7 @@
         </p:nvCxnSpPr>
         <p:spPr>
           <a:xfrm>
-            <a:off x="6392320" y="2899983"/>
+            <a:off x="6401241" y="2865215"/>
             <a:ext cx="259421" cy="0"/>
           </a:xfrm>
           <a:prstGeom prst="line">
@@ -9830,50 +9438,6 @@
       </p:sp>
       <p:cxnSp>
         <p:nvCxnSpPr>
-          <p:cNvPr id="315" name="Straight Arrow Connector 314">
-            <a:extLst>
-              <a:ext uri="{FF2B5EF4-FFF2-40B4-BE49-F238E27FC236}">
-                <a16:creationId xmlns:a16="http://schemas.microsoft.com/office/drawing/2014/main" id="{CC2E6CF6-7F9B-DF2E-8401-A11C6FFE7D1D}"/>
-              </a:ext>
-            </a:extLst>
-          </p:cNvPr>
-          <p:cNvCxnSpPr>
-            <a:cxnSpLocks/>
-          </p:cNvCxnSpPr>
-          <p:nvPr/>
-        </p:nvCxnSpPr>
-        <p:spPr>
-          <a:xfrm flipV="1">
-            <a:off x="10852467" y="3154000"/>
-            <a:ext cx="0" cy="195214"/>
-          </a:xfrm>
-          <a:prstGeom prst="straightConnector1">
-            <a:avLst/>
-          </a:prstGeom>
-          <a:ln>
-            <a:solidFill>
-              <a:srgbClr val="FF0000"/>
-            </a:solidFill>
-            <a:tailEnd type="triangle"/>
-          </a:ln>
-        </p:spPr>
-        <p:style>
-          <a:lnRef idx="2">
-            <a:schemeClr val="accent1"/>
-          </a:lnRef>
-          <a:fillRef idx="0">
-            <a:schemeClr val="accent1"/>
-          </a:fillRef>
-          <a:effectRef idx="1">
-            <a:schemeClr val="accent1"/>
-          </a:effectRef>
-          <a:fontRef idx="minor">
-            <a:schemeClr val="tx1"/>
-          </a:fontRef>
-        </p:style>
-      </p:cxnSp>
-      <p:cxnSp>
-        <p:nvCxnSpPr>
           <p:cNvPr id="316" name="Straight Connector 315">
             <a:extLst>
               <a:ext uri="{FF2B5EF4-FFF2-40B4-BE49-F238E27FC236}">
@@ -10168,45 +9732,6 @@
           </a:fontRef>
         </p:style>
       </p:cxnSp>
-      <p:cxnSp>
-        <p:nvCxnSpPr>
-          <p:cNvPr id="342" name="Straight Arrow Connector 341">
-            <a:extLst>
-              <a:ext uri="{FF2B5EF4-FFF2-40B4-BE49-F238E27FC236}">
-                <a16:creationId xmlns:a16="http://schemas.microsoft.com/office/drawing/2014/main" id="{C76199D9-440A-9194-BCF0-9A2E6EDE070C}"/>
-              </a:ext>
-            </a:extLst>
-          </p:cNvPr>
-          <p:cNvCxnSpPr/>
-          <p:nvPr/>
-        </p:nvCxnSpPr>
-        <p:spPr>
-          <a:xfrm>
-            <a:off x="2156808" y="1909226"/>
-            <a:ext cx="177808" cy="0"/>
-          </a:xfrm>
-          <a:prstGeom prst="straightConnector1">
-            <a:avLst/>
-          </a:prstGeom>
-          <a:ln>
-            <a:tailEnd type="triangle"/>
-          </a:ln>
-        </p:spPr>
-        <p:style>
-          <a:lnRef idx="2">
-            <a:schemeClr val="accent1"/>
-          </a:lnRef>
-          <a:fillRef idx="0">
-            <a:schemeClr val="accent1"/>
-          </a:fillRef>
-          <a:effectRef idx="1">
-            <a:schemeClr val="accent1"/>
-          </a:effectRef>
-          <a:fontRef idx="minor">
-            <a:schemeClr val="tx1"/>
-          </a:fontRef>
-        </p:style>
-      </p:cxnSp>
       <p:sp>
         <p:nvSpPr>
           <p:cNvPr id="343" name="TextBox 342">
@@ -10221,7 +9746,7 @@
         </p:nvSpPr>
         <p:spPr>
           <a:xfrm>
-            <a:off x="6065686" y="2417449"/>
+            <a:off x="6087550" y="2417370"/>
             <a:ext cx="410690" cy="246221"/>
           </a:xfrm>
           <a:prstGeom prst="rect">
@@ -10257,7 +9782,7 @@
         </p:nvSpPr>
         <p:spPr>
           <a:xfrm>
-            <a:off x="8640052" y="3387564"/>
+            <a:off x="9063374" y="3733304"/>
             <a:ext cx="671979" cy="230832"/>
           </a:xfrm>
           <a:prstGeom prst="rect">
@@ -10275,409 +9800,6 @@
             <a:r>
               <a:rPr lang="en-US" sz="900" dirty="0"/>
               <a:t>Not equal</a:t>
-            </a:r>
-          </a:p>
-        </p:txBody>
-      </p:sp>
-      <p:grpSp>
-        <p:nvGrpSpPr>
-          <p:cNvPr id="3" name="Group 2">
-            <a:extLst>
-              <a:ext uri="{FF2B5EF4-FFF2-40B4-BE49-F238E27FC236}">
-                <a16:creationId xmlns:a16="http://schemas.microsoft.com/office/drawing/2014/main" id="{F0E20165-74AC-DD4D-AA48-ADD102893E58}"/>
-              </a:ext>
-            </a:extLst>
-          </p:cNvPr>
-          <p:cNvGrpSpPr/>
-          <p:nvPr/>
-        </p:nvGrpSpPr>
-        <p:grpSpPr>
-          <a:xfrm>
-            <a:off x="8407592" y="4109253"/>
-            <a:ext cx="292770" cy="637674"/>
-            <a:chOff x="1074820" y="1507958"/>
-            <a:chExt cx="292770" cy="637674"/>
-          </a:xfrm>
-        </p:grpSpPr>
-        <p:cxnSp>
-          <p:nvCxnSpPr>
-            <p:cNvPr id="10" name="Straight Connector 9">
-              <a:extLst>
-                <a:ext uri="{FF2B5EF4-FFF2-40B4-BE49-F238E27FC236}">
-                  <a16:creationId xmlns:a16="http://schemas.microsoft.com/office/drawing/2014/main" id="{F8960DDE-F577-2D0B-E329-28A527662C2D}"/>
-                </a:ext>
-              </a:extLst>
-            </p:cNvPr>
-            <p:cNvCxnSpPr>
-              <a:cxnSpLocks/>
-            </p:cNvCxnSpPr>
-            <p:nvPr/>
-          </p:nvCxnSpPr>
-          <p:spPr>
-            <a:xfrm>
-              <a:off x="1074821" y="1507958"/>
-              <a:ext cx="0" cy="212558"/>
-            </a:xfrm>
-            <a:prstGeom prst="line">
-              <a:avLst/>
-            </a:prstGeom>
-          </p:spPr>
-          <p:style>
-            <a:lnRef idx="2">
-              <a:schemeClr val="accent1"/>
-            </a:lnRef>
-            <a:fillRef idx="0">
-              <a:schemeClr val="accent1"/>
-            </a:fillRef>
-            <a:effectRef idx="1">
-              <a:schemeClr val="accent1"/>
-            </a:effectRef>
-            <a:fontRef idx="minor">
-              <a:schemeClr val="tx1"/>
-            </a:fontRef>
-          </p:style>
-        </p:cxnSp>
-        <p:cxnSp>
-          <p:nvCxnSpPr>
-            <p:cNvPr id="17" name="Straight Connector 16">
-              <a:extLst>
-                <a:ext uri="{FF2B5EF4-FFF2-40B4-BE49-F238E27FC236}">
-                  <a16:creationId xmlns:a16="http://schemas.microsoft.com/office/drawing/2014/main" id="{0A06088D-98A3-A19E-21B7-06392BDC9225}"/>
-                </a:ext>
-              </a:extLst>
-            </p:cNvPr>
-            <p:cNvCxnSpPr>
-              <a:cxnSpLocks/>
-            </p:cNvCxnSpPr>
-            <p:nvPr/>
-          </p:nvCxnSpPr>
-          <p:spPr>
-            <a:xfrm>
-              <a:off x="1367590" y="1720516"/>
-              <a:ext cx="0" cy="212558"/>
-            </a:xfrm>
-            <a:prstGeom prst="line">
-              <a:avLst/>
-            </a:prstGeom>
-          </p:spPr>
-          <p:style>
-            <a:lnRef idx="2">
-              <a:schemeClr val="accent1"/>
-            </a:lnRef>
-            <a:fillRef idx="0">
-              <a:schemeClr val="accent1"/>
-            </a:fillRef>
-            <a:effectRef idx="1">
-              <a:schemeClr val="accent1"/>
-            </a:effectRef>
-            <a:fontRef idx="minor">
-              <a:schemeClr val="tx1"/>
-            </a:fontRef>
-          </p:style>
-        </p:cxnSp>
-        <p:cxnSp>
-          <p:nvCxnSpPr>
-            <p:cNvPr id="18" name="Straight Connector 17">
-              <a:extLst>
-                <a:ext uri="{FF2B5EF4-FFF2-40B4-BE49-F238E27FC236}">
-                  <a16:creationId xmlns:a16="http://schemas.microsoft.com/office/drawing/2014/main" id="{67D1D89E-75CE-1BE7-C5F4-51F595DF5A7B}"/>
-                </a:ext>
-              </a:extLst>
-            </p:cNvPr>
-            <p:cNvCxnSpPr>
-              <a:cxnSpLocks/>
-            </p:cNvCxnSpPr>
-            <p:nvPr/>
-          </p:nvCxnSpPr>
-          <p:spPr>
-            <a:xfrm>
-              <a:off x="1074821" y="1933074"/>
-              <a:ext cx="0" cy="212558"/>
-            </a:xfrm>
-            <a:prstGeom prst="line">
-              <a:avLst/>
-            </a:prstGeom>
-          </p:spPr>
-          <p:style>
-            <a:lnRef idx="2">
-              <a:schemeClr val="accent1"/>
-            </a:lnRef>
-            <a:fillRef idx="0">
-              <a:schemeClr val="accent1"/>
-            </a:fillRef>
-            <a:effectRef idx="1">
-              <a:schemeClr val="accent1"/>
-            </a:effectRef>
-            <a:fontRef idx="minor">
-              <a:schemeClr val="tx1"/>
-            </a:fontRef>
-          </p:style>
-        </p:cxnSp>
-        <p:cxnSp>
-          <p:nvCxnSpPr>
-            <p:cNvPr id="19" name="Straight Connector 18">
-              <a:extLst>
-                <a:ext uri="{FF2B5EF4-FFF2-40B4-BE49-F238E27FC236}">
-                  <a16:creationId xmlns:a16="http://schemas.microsoft.com/office/drawing/2014/main" id="{887A6830-E015-B38A-0059-D14AC408B769}"/>
-                </a:ext>
-              </a:extLst>
-            </p:cNvPr>
-            <p:cNvCxnSpPr>
-              <a:cxnSpLocks/>
-            </p:cNvCxnSpPr>
-            <p:nvPr/>
-          </p:nvCxnSpPr>
-          <p:spPr>
-            <a:xfrm flipH="1">
-              <a:off x="1074821" y="1936227"/>
-              <a:ext cx="292769" cy="209405"/>
-            </a:xfrm>
-            <a:prstGeom prst="line">
-              <a:avLst/>
-            </a:prstGeom>
-          </p:spPr>
-          <p:style>
-            <a:lnRef idx="2">
-              <a:schemeClr val="accent1"/>
-            </a:lnRef>
-            <a:fillRef idx="0">
-              <a:schemeClr val="accent1"/>
-            </a:fillRef>
-            <a:effectRef idx="1">
-              <a:schemeClr val="accent1"/>
-            </a:effectRef>
-            <a:fontRef idx="minor">
-              <a:schemeClr val="tx1"/>
-            </a:fontRef>
-          </p:style>
-        </p:cxnSp>
-        <p:cxnSp>
-          <p:nvCxnSpPr>
-            <p:cNvPr id="20" name="Straight Connector 19">
-              <a:extLst>
-                <a:ext uri="{FF2B5EF4-FFF2-40B4-BE49-F238E27FC236}">
-                  <a16:creationId xmlns:a16="http://schemas.microsoft.com/office/drawing/2014/main" id="{19DBD266-1003-B3C8-0754-4799002739F2}"/>
-                </a:ext>
-              </a:extLst>
-            </p:cNvPr>
-            <p:cNvCxnSpPr>
-              <a:cxnSpLocks/>
-            </p:cNvCxnSpPr>
-            <p:nvPr/>
-          </p:nvCxnSpPr>
-          <p:spPr>
-            <a:xfrm flipH="1" flipV="1">
-              <a:off x="1074821" y="1507958"/>
-              <a:ext cx="292769" cy="215711"/>
-            </a:xfrm>
-            <a:prstGeom prst="line">
-              <a:avLst/>
-            </a:prstGeom>
-          </p:spPr>
-          <p:style>
-            <a:lnRef idx="2">
-              <a:schemeClr val="accent1"/>
-            </a:lnRef>
-            <a:fillRef idx="0">
-              <a:schemeClr val="accent1"/>
-            </a:fillRef>
-            <a:effectRef idx="1">
-              <a:schemeClr val="accent1"/>
-            </a:effectRef>
-            <a:fontRef idx="minor">
-              <a:schemeClr val="tx1"/>
-            </a:fontRef>
-          </p:style>
-        </p:cxnSp>
-        <p:cxnSp>
-          <p:nvCxnSpPr>
-            <p:cNvPr id="21" name="Straight Connector 20">
-              <a:extLst>
-                <a:ext uri="{FF2B5EF4-FFF2-40B4-BE49-F238E27FC236}">
-                  <a16:creationId xmlns:a16="http://schemas.microsoft.com/office/drawing/2014/main" id="{E21776EC-071F-B571-C86B-0A0DA830C4B3}"/>
-                </a:ext>
-              </a:extLst>
-            </p:cNvPr>
-            <p:cNvCxnSpPr>
-              <a:cxnSpLocks/>
-            </p:cNvCxnSpPr>
-            <p:nvPr/>
-          </p:nvCxnSpPr>
-          <p:spPr>
-            <a:xfrm flipV="1">
-              <a:off x="1074821" y="1829948"/>
-              <a:ext cx="140545" cy="103126"/>
-            </a:xfrm>
-            <a:prstGeom prst="line">
-              <a:avLst/>
-            </a:prstGeom>
-          </p:spPr>
-          <p:style>
-            <a:lnRef idx="2">
-              <a:schemeClr val="accent1"/>
-            </a:lnRef>
-            <a:fillRef idx="0">
-              <a:schemeClr val="accent1"/>
-            </a:fillRef>
-            <a:effectRef idx="1">
-              <a:schemeClr val="accent1"/>
-            </a:effectRef>
-            <a:fontRef idx="minor">
-              <a:schemeClr val="tx1"/>
-            </a:fontRef>
-          </p:style>
-        </p:cxnSp>
-        <p:cxnSp>
-          <p:nvCxnSpPr>
-            <p:cNvPr id="23" name="Straight Connector 22">
-              <a:extLst>
-                <a:ext uri="{FF2B5EF4-FFF2-40B4-BE49-F238E27FC236}">
-                  <a16:creationId xmlns:a16="http://schemas.microsoft.com/office/drawing/2014/main" id="{AC7113F7-BE3F-C063-EF42-353858130E84}"/>
-                </a:ext>
-              </a:extLst>
-            </p:cNvPr>
-            <p:cNvCxnSpPr>
-              <a:cxnSpLocks/>
-            </p:cNvCxnSpPr>
-            <p:nvPr/>
-          </p:nvCxnSpPr>
-          <p:spPr>
-            <a:xfrm>
-              <a:off x="1074820" y="1716505"/>
-              <a:ext cx="140545" cy="107137"/>
-            </a:xfrm>
-            <a:prstGeom prst="line">
-              <a:avLst/>
-            </a:prstGeom>
-          </p:spPr>
-          <p:style>
-            <a:lnRef idx="2">
-              <a:schemeClr val="accent1"/>
-            </a:lnRef>
-            <a:fillRef idx="0">
-              <a:schemeClr val="accent1"/>
-            </a:fillRef>
-            <a:effectRef idx="1">
-              <a:schemeClr val="accent1"/>
-            </a:effectRef>
-            <a:fontRef idx="minor">
-              <a:schemeClr val="tx1"/>
-            </a:fontRef>
-          </p:style>
-        </p:cxnSp>
-      </p:grpSp>
-      <p:cxnSp>
-        <p:nvCxnSpPr>
-          <p:cNvPr id="26" name="Straight Arrow Connector 25">
-            <a:extLst>
-              <a:ext uri="{FF2B5EF4-FFF2-40B4-BE49-F238E27FC236}">
-                <a16:creationId xmlns:a16="http://schemas.microsoft.com/office/drawing/2014/main" id="{444F7234-410C-25D4-213C-932ED214CEA2}"/>
-              </a:ext>
-            </a:extLst>
-          </p:cNvPr>
-          <p:cNvCxnSpPr>
-            <a:cxnSpLocks/>
-          </p:cNvCxnSpPr>
-          <p:nvPr/>
-        </p:nvCxnSpPr>
-        <p:spPr>
-          <a:xfrm>
-            <a:off x="8233657" y="4640648"/>
-            <a:ext cx="173935" cy="0"/>
-          </a:xfrm>
-          <a:prstGeom prst="straightConnector1">
-            <a:avLst/>
-          </a:prstGeom>
-          <a:ln>
-            <a:tailEnd type="triangle"/>
-          </a:ln>
-        </p:spPr>
-        <p:style>
-          <a:lnRef idx="2">
-            <a:schemeClr val="accent1"/>
-          </a:lnRef>
-          <a:fillRef idx="0">
-            <a:schemeClr val="accent1"/>
-          </a:fillRef>
-          <a:effectRef idx="1">
-            <a:schemeClr val="accent1"/>
-          </a:effectRef>
-          <a:fontRef idx="minor">
-            <a:schemeClr val="tx1"/>
-          </a:fontRef>
-        </p:style>
-      </p:cxnSp>
-      <p:cxnSp>
-        <p:nvCxnSpPr>
-          <p:cNvPr id="28" name="Straight Arrow Connector 27">
-            <a:extLst>
-              <a:ext uri="{FF2B5EF4-FFF2-40B4-BE49-F238E27FC236}">
-                <a16:creationId xmlns:a16="http://schemas.microsoft.com/office/drawing/2014/main" id="{B33DC5DC-F120-3662-5DC9-4D6D8B08EBA0}"/>
-              </a:ext>
-            </a:extLst>
-          </p:cNvPr>
-          <p:cNvCxnSpPr/>
-          <p:nvPr/>
-        </p:nvCxnSpPr>
-        <p:spPr>
-          <a:xfrm>
-            <a:off x="8229784" y="4215532"/>
-            <a:ext cx="177808" cy="0"/>
-          </a:xfrm>
-          <a:prstGeom prst="straightConnector1">
-            <a:avLst/>
-          </a:prstGeom>
-          <a:ln>
-            <a:tailEnd type="triangle"/>
-          </a:ln>
-        </p:spPr>
-        <p:style>
-          <a:lnRef idx="2">
-            <a:schemeClr val="accent1"/>
-          </a:lnRef>
-          <a:fillRef idx="0">
-            <a:schemeClr val="accent1"/>
-          </a:fillRef>
-          <a:effectRef idx="1">
-            <a:schemeClr val="accent1"/>
-          </a:effectRef>
-          <a:fontRef idx="minor">
-            <a:schemeClr val="tx1"/>
-          </a:fontRef>
-        </p:style>
-      </p:cxnSp>
-      <p:sp>
-        <p:nvSpPr>
-          <p:cNvPr id="30" name="TextBox 29">
-            <a:extLst>
-              <a:ext uri="{FF2B5EF4-FFF2-40B4-BE49-F238E27FC236}">
-                <a16:creationId xmlns:a16="http://schemas.microsoft.com/office/drawing/2014/main" id="{B8ACE971-B3B8-76F7-BEAC-B98AF5AE845F}"/>
-              </a:ext>
-            </a:extLst>
-          </p:cNvPr>
-          <p:cNvSpPr txBox="1"/>
-          <p:nvPr/>
-        </p:nvSpPr>
-        <p:spPr>
-          <a:xfrm>
-            <a:off x="8442429" y="4314065"/>
-            <a:ext cx="351378" cy="230832"/>
-          </a:xfrm>
-          <a:prstGeom prst="rect">
-            <a:avLst/>
-          </a:prstGeom>
-          <a:noFill/>
-        </p:spPr>
-        <p:txBody>
-          <a:bodyPr wrap="none" rtlCol="0">
-            <a:spAutoFit/>
-          </a:bodyPr>
-          <a:lstStyle/>
-          <a:p>
-            <a:pPr algn="ctr"/>
-            <a:r>
-              <a:rPr lang="en-US" sz="900" dirty="0"/>
-              <a:t>“+”</a:t>
             </a:r>
           </a:p>
         </p:txBody>
@@ -10857,56 +9979,14 @@
         </p:nvCxnSpPr>
         <p:spPr>
           <a:xfrm>
-            <a:off x="8698040" y="4454260"/>
-            <a:ext cx="232685" cy="0"/>
+            <a:off x="8659919" y="4454260"/>
+            <a:ext cx="270806" cy="0"/>
           </a:xfrm>
           <a:prstGeom prst="straightConnector1">
             <a:avLst/>
           </a:prstGeom>
           <a:ln>
             <a:tailEnd type="none"/>
-          </a:ln>
-        </p:spPr>
-        <p:style>
-          <a:lnRef idx="2">
-            <a:schemeClr val="accent1"/>
-          </a:lnRef>
-          <a:fillRef idx="0">
-            <a:schemeClr val="accent1"/>
-          </a:fillRef>
-          <a:effectRef idx="1">
-            <a:schemeClr val="accent1"/>
-          </a:effectRef>
-          <a:fontRef idx="minor">
-            <a:schemeClr val="tx1"/>
-          </a:fontRef>
-        </p:style>
-      </p:cxnSp>
-      <p:cxnSp>
-        <p:nvCxnSpPr>
-          <p:cNvPr id="54" name="Straight Arrow Connector 53">
-            <a:extLst>
-              <a:ext uri="{FF2B5EF4-FFF2-40B4-BE49-F238E27FC236}">
-                <a16:creationId xmlns:a16="http://schemas.microsoft.com/office/drawing/2014/main" id="{2E8C08F4-6B7C-4580-23CA-753663A3987B}"/>
-              </a:ext>
-            </a:extLst>
-          </p:cNvPr>
-          <p:cNvCxnSpPr/>
-          <p:nvPr/>
-        </p:nvCxnSpPr>
-        <p:spPr>
-          <a:xfrm>
-            <a:off x="9462368" y="4084284"/>
-            <a:ext cx="0" cy="230832"/>
-          </a:xfrm>
-          <a:prstGeom prst="straightConnector1">
-            <a:avLst/>
-          </a:prstGeom>
-          <a:ln>
-            <a:solidFill>
-              <a:srgbClr val="FF0000"/>
-            </a:solidFill>
-            <a:tailEnd type="triangle"/>
           </a:ln>
         </p:spPr>
         <p:style>
@@ -10933,48 +10013,6 @@
               </a:ext>
             </a:extLst>
           </p:cNvPr>
-          <p:cNvCxnSpPr/>
-          <p:nvPr/>
-        </p:nvCxnSpPr>
-        <p:spPr>
-          <a:xfrm>
-            <a:off x="9514036" y="4115287"/>
-            <a:ext cx="0" cy="230832"/>
-          </a:xfrm>
-          <a:prstGeom prst="straightConnector1">
-            <a:avLst/>
-          </a:prstGeom>
-          <a:ln>
-            <a:solidFill>
-              <a:srgbClr val="FF0000"/>
-            </a:solidFill>
-            <a:tailEnd type="triangle"/>
-          </a:ln>
-        </p:spPr>
-        <p:style>
-          <a:lnRef idx="2">
-            <a:schemeClr val="accent1"/>
-          </a:lnRef>
-          <a:fillRef idx="0">
-            <a:schemeClr val="accent1"/>
-          </a:fillRef>
-          <a:effectRef idx="1">
-            <a:schemeClr val="accent1"/>
-          </a:effectRef>
-          <a:fontRef idx="minor">
-            <a:schemeClr val="tx1"/>
-          </a:fontRef>
-        </p:style>
-      </p:cxnSp>
-      <p:cxnSp>
-        <p:nvCxnSpPr>
-          <p:cNvPr id="58" name="Straight Arrow Connector 57">
-            <a:extLst>
-              <a:ext uri="{FF2B5EF4-FFF2-40B4-BE49-F238E27FC236}">
-                <a16:creationId xmlns:a16="http://schemas.microsoft.com/office/drawing/2014/main" id="{FC65ADDE-BA27-5782-2BA6-2E54CBD9C0C4}"/>
-              </a:ext>
-            </a:extLst>
-          </p:cNvPr>
           <p:cNvCxnSpPr>
             <a:cxnSpLocks/>
           </p:cNvCxnSpPr>
@@ -10982,8 +10020,8 @@
         </p:nvCxnSpPr>
         <p:spPr>
           <a:xfrm flipV="1">
-            <a:off x="10915967" y="3114188"/>
-            <a:ext cx="0" cy="195214"/>
+            <a:off x="9432653" y="4931909"/>
+            <a:ext cx="0" cy="318976"/>
           </a:xfrm>
           <a:prstGeom prst="straightConnector1">
             <a:avLst/>
@@ -11026,8 +10064,8 @@
         </p:nvCxnSpPr>
         <p:spPr>
           <a:xfrm flipV="1">
-            <a:off x="10776267" y="3233786"/>
-            <a:ext cx="0" cy="195214"/>
+            <a:off x="10822834" y="3193477"/>
+            <a:ext cx="0" cy="616523"/>
           </a:xfrm>
           <a:prstGeom prst="straightConnector1">
             <a:avLst/>
@@ -11235,6 +10273,692 @@
           </p:style>
         </p:cxnSp>
       </p:grpSp>
+      <p:sp>
+        <p:nvSpPr>
+          <p:cNvPr id="34" name="Rectangle 33">
+            <a:extLst>
+              <a:ext uri="{FF2B5EF4-FFF2-40B4-BE49-F238E27FC236}">
+                <a16:creationId xmlns:a16="http://schemas.microsoft.com/office/drawing/2014/main" id="{E089EF47-1FBA-968D-84FC-D9F5ADF229B0}"/>
+              </a:ext>
+            </a:extLst>
+          </p:cNvPr>
+          <p:cNvSpPr/>
+          <p:nvPr/>
+        </p:nvSpPr>
+        <p:spPr>
+          <a:xfrm>
+            <a:off x="9027891" y="3504913"/>
+            <a:ext cx="736311" cy="418585"/>
+          </a:xfrm>
+          <a:prstGeom prst="rect">
+            <a:avLst/>
+          </a:prstGeom>
+          <a:noFill/>
+          <a:ln>
+            <a:solidFill>
+              <a:srgbClr val="0070C0"/>
+            </a:solidFill>
+          </a:ln>
+        </p:spPr>
+        <p:style>
+          <a:lnRef idx="2">
+            <a:schemeClr val="accent1">
+              <a:shade val="15000"/>
+            </a:schemeClr>
+          </a:lnRef>
+          <a:fillRef idx="1">
+            <a:schemeClr val="accent1"/>
+          </a:fillRef>
+          <a:effectRef idx="0">
+            <a:schemeClr val="accent1"/>
+          </a:effectRef>
+          <a:fontRef idx="minor">
+            <a:schemeClr val="lt1"/>
+          </a:fontRef>
+        </p:style>
+        <p:txBody>
+          <a:bodyPr rtlCol="0" anchor="ctr"/>
+          <a:lstStyle/>
+          <a:p>
+            <a:pPr algn="ctr"/>
+            <a:endParaRPr lang="en-US"/>
+          </a:p>
+        </p:txBody>
+      </p:sp>
+      <p:cxnSp>
+        <p:nvCxnSpPr>
+          <p:cNvPr id="47" name="Straight Arrow Connector 46">
+            <a:extLst>
+              <a:ext uri="{FF2B5EF4-FFF2-40B4-BE49-F238E27FC236}">
+                <a16:creationId xmlns:a16="http://schemas.microsoft.com/office/drawing/2014/main" id="{429F048B-FDD6-233F-3053-92BFE74735BF}"/>
+              </a:ext>
+            </a:extLst>
+          </p:cNvPr>
+          <p:cNvCxnSpPr>
+            <a:cxnSpLocks/>
+          </p:cNvCxnSpPr>
+          <p:nvPr/>
+        </p:nvCxnSpPr>
+        <p:spPr>
+          <a:xfrm>
+            <a:off x="9601800" y="3367023"/>
+            <a:ext cx="0" cy="137890"/>
+          </a:xfrm>
+          <a:prstGeom prst="straightConnector1">
+            <a:avLst/>
+          </a:prstGeom>
+          <a:ln>
+            <a:tailEnd type="triangle"/>
+          </a:ln>
+        </p:spPr>
+        <p:style>
+          <a:lnRef idx="2">
+            <a:schemeClr val="accent1"/>
+          </a:lnRef>
+          <a:fillRef idx="0">
+            <a:schemeClr val="accent1"/>
+          </a:fillRef>
+          <a:effectRef idx="1">
+            <a:schemeClr val="accent1"/>
+          </a:effectRef>
+          <a:fontRef idx="minor">
+            <a:schemeClr val="tx1"/>
+          </a:fontRef>
+        </p:style>
+      </p:cxnSp>
+      <p:cxnSp>
+        <p:nvCxnSpPr>
+          <p:cNvPr id="119" name="Straight Arrow Connector 118">
+            <a:extLst>
+              <a:ext uri="{FF2B5EF4-FFF2-40B4-BE49-F238E27FC236}">
+                <a16:creationId xmlns:a16="http://schemas.microsoft.com/office/drawing/2014/main" id="{FAC3FB28-5010-EC3A-6B97-F34204C4FD60}"/>
+              </a:ext>
+            </a:extLst>
+          </p:cNvPr>
+          <p:cNvCxnSpPr>
+            <a:cxnSpLocks/>
+          </p:cNvCxnSpPr>
+          <p:nvPr/>
+        </p:nvCxnSpPr>
+        <p:spPr>
+          <a:xfrm>
+            <a:off x="2148657" y="1919827"/>
+            <a:ext cx="273765" cy="0"/>
+          </a:xfrm>
+          <a:prstGeom prst="straightConnector1">
+            <a:avLst/>
+          </a:prstGeom>
+          <a:ln>
+            <a:tailEnd type="triangle"/>
+          </a:ln>
+        </p:spPr>
+        <p:style>
+          <a:lnRef idx="2">
+            <a:schemeClr val="accent1"/>
+          </a:lnRef>
+          <a:fillRef idx="0">
+            <a:schemeClr val="accent1"/>
+          </a:fillRef>
+          <a:effectRef idx="1">
+            <a:schemeClr val="accent1"/>
+          </a:effectRef>
+          <a:fontRef idx="minor">
+            <a:schemeClr val="tx1"/>
+          </a:fontRef>
+        </p:style>
+      </p:cxnSp>
+      <p:cxnSp>
+        <p:nvCxnSpPr>
+          <p:cNvPr id="131" name="Straight Connector 130">
+            <a:extLst>
+              <a:ext uri="{FF2B5EF4-FFF2-40B4-BE49-F238E27FC236}">
+                <a16:creationId xmlns:a16="http://schemas.microsoft.com/office/drawing/2014/main" id="{2B1DBBEC-DD8F-25CA-25EB-E6913CBC1235}"/>
+              </a:ext>
+            </a:extLst>
+          </p:cNvPr>
+          <p:cNvCxnSpPr>
+            <a:cxnSpLocks/>
+          </p:cNvCxnSpPr>
+          <p:nvPr/>
+        </p:nvCxnSpPr>
+        <p:spPr>
+          <a:xfrm flipH="1">
+            <a:off x="9388685" y="5117831"/>
+            <a:ext cx="85431" cy="62194"/>
+          </a:xfrm>
+          <a:prstGeom prst="line">
+            <a:avLst/>
+          </a:prstGeom>
+        </p:spPr>
+        <p:style>
+          <a:lnRef idx="2">
+            <a:schemeClr val="accent1"/>
+          </a:lnRef>
+          <a:fillRef idx="0">
+            <a:schemeClr val="accent1"/>
+          </a:fillRef>
+          <a:effectRef idx="1">
+            <a:schemeClr val="accent1"/>
+          </a:effectRef>
+          <a:fontRef idx="minor">
+            <a:schemeClr val="tx1"/>
+          </a:fontRef>
+        </p:style>
+      </p:cxnSp>
+      <p:cxnSp>
+        <p:nvCxnSpPr>
+          <p:cNvPr id="134" name="Straight Connector 133">
+            <a:extLst>
+              <a:ext uri="{FF2B5EF4-FFF2-40B4-BE49-F238E27FC236}">
+                <a16:creationId xmlns:a16="http://schemas.microsoft.com/office/drawing/2014/main" id="{CF0B0599-3874-796C-AF55-6F286F9E3343}"/>
+              </a:ext>
+            </a:extLst>
+          </p:cNvPr>
+          <p:cNvCxnSpPr>
+            <a:cxnSpLocks/>
+          </p:cNvCxnSpPr>
+          <p:nvPr/>
+        </p:nvCxnSpPr>
+        <p:spPr>
+          <a:xfrm flipH="1">
+            <a:off x="10772078" y="3608496"/>
+            <a:ext cx="107051" cy="69157"/>
+          </a:xfrm>
+          <a:prstGeom prst="line">
+            <a:avLst/>
+          </a:prstGeom>
+        </p:spPr>
+        <p:style>
+          <a:lnRef idx="2">
+            <a:schemeClr val="accent1"/>
+          </a:lnRef>
+          <a:fillRef idx="0">
+            <a:schemeClr val="accent1"/>
+          </a:fillRef>
+          <a:effectRef idx="1">
+            <a:schemeClr val="accent1"/>
+          </a:effectRef>
+          <a:fontRef idx="minor">
+            <a:schemeClr val="tx1"/>
+          </a:fontRef>
+        </p:style>
+      </p:cxnSp>
+      <p:sp>
+        <p:nvSpPr>
+          <p:cNvPr id="19" name="TextBox 18">
+            <a:extLst>
+              <a:ext uri="{FF2B5EF4-FFF2-40B4-BE49-F238E27FC236}">
+                <a16:creationId xmlns:a16="http://schemas.microsoft.com/office/drawing/2014/main" id="{89294767-9693-12FB-F91B-585DBA590164}"/>
+              </a:ext>
+            </a:extLst>
+          </p:cNvPr>
+          <p:cNvSpPr txBox="1"/>
+          <p:nvPr/>
+        </p:nvSpPr>
+        <p:spPr>
+          <a:xfrm>
+            <a:off x="7818575" y="4116363"/>
+            <a:ext cx="413896" cy="230832"/>
+          </a:xfrm>
+          <a:prstGeom prst="rect">
+            <a:avLst/>
+          </a:prstGeom>
+          <a:noFill/>
+        </p:spPr>
+        <p:txBody>
+          <a:bodyPr wrap="none" rtlCol="0">
+            <a:spAutoFit/>
+          </a:bodyPr>
+          <a:lstStyle/>
+          <a:p>
+            <a:pPr algn="ctr"/>
+            <a:r>
+              <a:rPr lang="en-US" sz="900" dirty="0"/>
+              <a:t>NPC</a:t>
+            </a:r>
+          </a:p>
+        </p:txBody>
+      </p:sp>
+      <p:sp>
+        <p:nvSpPr>
+          <p:cNvPr id="20" name="TextBox 19">
+            <a:extLst>
+              <a:ext uri="{FF2B5EF4-FFF2-40B4-BE49-F238E27FC236}">
+                <a16:creationId xmlns:a16="http://schemas.microsoft.com/office/drawing/2014/main" id="{069E7558-662D-A862-C258-A13675E11FD3}"/>
+              </a:ext>
+            </a:extLst>
+          </p:cNvPr>
+          <p:cNvSpPr txBox="1"/>
+          <p:nvPr/>
+        </p:nvSpPr>
+        <p:spPr>
+          <a:xfrm>
+            <a:off x="7821728" y="4531736"/>
+            <a:ext cx="407484" cy="230832"/>
+          </a:xfrm>
+          <a:prstGeom prst="rect">
+            <a:avLst/>
+          </a:prstGeom>
+          <a:noFill/>
+        </p:spPr>
+        <p:txBody>
+          <a:bodyPr wrap="none" rtlCol="0">
+            <a:spAutoFit/>
+          </a:bodyPr>
+          <a:lstStyle/>
+          <a:p>
+            <a:pPr algn="ctr"/>
+            <a:r>
+              <a:rPr lang="en-US" sz="900" dirty="0" err="1"/>
+              <a:t>imm</a:t>
+            </a:r>
+            <a:endParaRPr lang="en-US" sz="900" dirty="0"/>
+          </a:p>
+        </p:txBody>
+      </p:sp>
+      <p:grpSp>
+        <p:nvGrpSpPr>
+          <p:cNvPr id="21" name="Group 20">
+            <a:extLst>
+              <a:ext uri="{FF2B5EF4-FFF2-40B4-BE49-F238E27FC236}">
+                <a16:creationId xmlns:a16="http://schemas.microsoft.com/office/drawing/2014/main" id="{B6F95654-DFED-E9E7-17A4-3C62565E7F0F}"/>
+              </a:ext>
+            </a:extLst>
+          </p:cNvPr>
+          <p:cNvGrpSpPr/>
+          <p:nvPr/>
+        </p:nvGrpSpPr>
+        <p:grpSpPr>
+          <a:xfrm>
+            <a:off x="8357760" y="4125818"/>
+            <a:ext cx="292770" cy="637674"/>
+            <a:chOff x="1074820" y="1507958"/>
+            <a:chExt cx="292770" cy="637674"/>
+          </a:xfrm>
+        </p:grpSpPr>
+        <p:cxnSp>
+          <p:nvCxnSpPr>
+            <p:cNvPr id="23" name="Straight Connector 22">
+              <a:extLst>
+                <a:ext uri="{FF2B5EF4-FFF2-40B4-BE49-F238E27FC236}">
+                  <a16:creationId xmlns:a16="http://schemas.microsoft.com/office/drawing/2014/main" id="{760B40A2-77E4-F9AB-5352-FD258D2E0425}"/>
+                </a:ext>
+              </a:extLst>
+            </p:cNvPr>
+            <p:cNvCxnSpPr>
+              <a:cxnSpLocks/>
+            </p:cNvCxnSpPr>
+            <p:nvPr/>
+          </p:nvCxnSpPr>
+          <p:spPr>
+            <a:xfrm>
+              <a:off x="1074821" y="1507958"/>
+              <a:ext cx="0" cy="212558"/>
+            </a:xfrm>
+            <a:prstGeom prst="line">
+              <a:avLst/>
+            </a:prstGeom>
+          </p:spPr>
+          <p:style>
+            <a:lnRef idx="2">
+              <a:schemeClr val="accent1"/>
+            </a:lnRef>
+            <a:fillRef idx="0">
+              <a:schemeClr val="accent1"/>
+            </a:fillRef>
+            <a:effectRef idx="1">
+              <a:schemeClr val="accent1"/>
+            </a:effectRef>
+            <a:fontRef idx="minor">
+              <a:schemeClr val="tx1"/>
+            </a:fontRef>
+          </p:style>
+        </p:cxnSp>
+        <p:cxnSp>
+          <p:nvCxnSpPr>
+            <p:cNvPr id="26" name="Straight Connector 25">
+              <a:extLst>
+                <a:ext uri="{FF2B5EF4-FFF2-40B4-BE49-F238E27FC236}">
+                  <a16:creationId xmlns:a16="http://schemas.microsoft.com/office/drawing/2014/main" id="{71486C0B-ABD0-3F3F-1AA3-5AFB250919DE}"/>
+                </a:ext>
+              </a:extLst>
+            </p:cNvPr>
+            <p:cNvCxnSpPr>
+              <a:cxnSpLocks/>
+            </p:cNvCxnSpPr>
+            <p:nvPr/>
+          </p:nvCxnSpPr>
+          <p:spPr>
+            <a:xfrm>
+              <a:off x="1367590" y="1720516"/>
+              <a:ext cx="0" cy="212558"/>
+            </a:xfrm>
+            <a:prstGeom prst="line">
+              <a:avLst/>
+            </a:prstGeom>
+          </p:spPr>
+          <p:style>
+            <a:lnRef idx="2">
+              <a:schemeClr val="accent1"/>
+            </a:lnRef>
+            <a:fillRef idx="0">
+              <a:schemeClr val="accent1"/>
+            </a:fillRef>
+            <a:effectRef idx="1">
+              <a:schemeClr val="accent1"/>
+            </a:effectRef>
+            <a:fontRef idx="minor">
+              <a:schemeClr val="tx1"/>
+            </a:fontRef>
+          </p:style>
+        </p:cxnSp>
+        <p:cxnSp>
+          <p:nvCxnSpPr>
+            <p:cNvPr id="28" name="Straight Connector 27">
+              <a:extLst>
+                <a:ext uri="{FF2B5EF4-FFF2-40B4-BE49-F238E27FC236}">
+                  <a16:creationId xmlns:a16="http://schemas.microsoft.com/office/drawing/2014/main" id="{48A9E97E-CD49-94C9-AAB0-95C96A07115C}"/>
+                </a:ext>
+              </a:extLst>
+            </p:cNvPr>
+            <p:cNvCxnSpPr>
+              <a:cxnSpLocks/>
+            </p:cNvCxnSpPr>
+            <p:nvPr/>
+          </p:nvCxnSpPr>
+          <p:spPr>
+            <a:xfrm>
+              <a:off x="1074821" y="1933074"/>
+              <a:ext cx="0" cy="212558"/>
+            </a:xfrm>
+            <a:prstGeom prst="line">
+              <a:avLst/>
+            </a:prstGeom>
+          </p:spPr>
+          <p:style>
+            <a:lnRef idx="2">
+              <a:schemeClr val="accent1"/>
+            </a:lnRef>
+            <a:fillRef idx="0">
+              <a:schemeClr val="accent1"/>
+            </a:fillRef>
+            <a:effectRef idx="1">
+              <a:schemeClr val="accent1"/>
+            </a:effectRef>
+            <a:fontRef idx="minor">
+              <a:schemeClr val="tx1"/>
+            </a:fontRef>
+          </p:style>
+        </p:cxnSp>
+        <p:cxnSp>
+          <p:nvCxnSpPr>
+            <p:cNvPr id="30" name="Straight Connector 29">
+              <a:extLst>
+                <a:ext uri="{FF2B5EF4-FFF2-40B4-BE49-F238E27FC236}">
+                  <a16:creationId xmlns:a16="http://schemas.microsoft.com/office/drawing/2014/main" id="{BD9D2B64-A65F-417E-BA0D-6C606C967A0F}"/>
+                </a:ext>
+              </a:extLst>
+            </p:cNvPr>
+            <p:cNvCxnSpPr>
+              <a:cxnSpLocks/>
+            </p:cNvCxnSpPr>
+            <p:nvPr/>
+          </p:nvCxnSpPr>
+          <p:spPr>
+            <a:xfrm flipH="1">
+              <a:off x="1074821" y="1936227"/>
+              <a:ext cx="292769" cy="209405"/>
+            </a:xfrm>
+            <a:prstGeom prst="line">
+              <a:avLst/>
+            </a:prstGeom>
+          </p:spPr>
+          <p:style>
+            <a:lnRef idx="2">
+              <a:schemeClr val="accent1"/>
+            </a:lnRef>
+            <a:fillRef idx="0">
+              <a:schemeClr val="accent1"/>
+            </a:fillRef>
+            <a:effectRef idx="1">
+              <a:schemeClr val="accent1"/>
+            </a:effectRef>
+            <a:fontRef idx="minor">
+              <a:schemeClr val="tx1"/>
+            </a:fontRef>
+          </p:style>
+        </p:cxnSp>
+        <p:cxnSp>
+          <p:nvCxnSpPr>
+            <p:cNvPr id="32" name="Straight Connector 31">
+              <a:extLst>
+                <a:ext uri="{FF2B5EF4-FFF2-40B4-BE49-F238E27FC236}">
+                  <a16:creationId xmlns:a16="http://schemas.microsoft.com/office/drawing/2014/main" id="{F0441355-68E2-EB62-442A-63BEF57CC44E}"/>
+                </a:ext>
+              </a:extLst>
+            </p:cNvPr>
+            <p:cNvCxnSpPr>
+              <a:cxnSpLocks/>
+            </p:cNvCxnSpPr>
+            <p:nvPr/>
+          </p:nvCxnSpPr>
+          <p:spPr>
+            <a:xfrm flipH="1" flipV="1">
+              <a:off x="1074821" y="1507958"/>
+              <a:ext cx="292769" cy="215711"/>
+            </a:xfrm>
+            <a:prstGeom prst="line">
+              <a:avLst/>
+            </a:prstGeom>
+          </p:spPr>
+          <p:style>
+            <a:lnRef idx="2">
+              <a:schemeClr val="accent1"/>
+            </a:lnRef>
+            <a:fillRef idx="0">
+              <a:schemeClr val="accent1"/>
+            </a:fillRef>
+            <a:effectRef idx="1">
+              <a:schemeClr val="accent1"/>
+            </a:effectRef>
+            <a:fontRef idx="minor">
+              <a:schemeClr val="tx1"/>
+            </a:fontRef>
+          </p:style>
+        </p:cxnSp>
+        <p:cxnSp>
+          <p:nvCxnSpPr>
+            <p:cNvPr id="39" name="Straight Connector 38">
+              <a:extLst>
+                <a:ext uri="{FF2B5EF4-FFF2-40B4-BE49-F238E27FC236}">
+                  <a16:creationId xmlns:a16="http://schemas.microsoft.com/office/drawing/2014/main" id="{35F2A833-8304-79C4-04DF-BBA86EF3FF81}"/>
+                </a:ext>
+              </a:extLst>
+            </p:cNvPr>
+            <p:cNvCxnSpPr>
+              <a:cxnSpLocks/>
+            </p:cNvCxnSpPr>
+            <p:nvPr/>
+          </p:nvCxnSpPr>
+          <p:spPr>
+            <a:xfrm flipV="1">
+              <a:off x="1074821" y="1829948"/>
+              <a:ext cx="140545" cy="103126"/>
+            </a:xfrm>
+            <a:prstGeom prst="line">
+              <a:avLst/>
+            </a:prstGeom>
+          </p:spPr>
+          <p:style>
+            <a:lnRef idx="2">
+              <a:schemeClr val="accent1"/>
+            </a:lnRef>
+            <a:fillRef idx="0">
+              <a:schemeClr val="accent1"/>
+            </a:fillRef>
+            <a:effectRef idx="1">
+              <a:schemeClr val="accent1"/>
+            </a:effectRef>
+            <a:fontRef idx="minor">
+              <a:schemeClr val="tx1"/>
+            </a:fontRef>
+          </p:style>
+        </p:cxnSp>
+        <p:cxnSp>
+          <p:nvCxnSpPr>
+            <p:cNvPr id="53" name="Straight Connector 52">
+              <a:extLst>
+                <a:ext uri="{FF2B5EF4-FFF2-40B4-BE49-F238E27FC236}">
+                  <a16:creationId xmlns:a16="http://schemas.microsoft.com/office/drawing/2014/main" id="{F920CF19-4346-DB1D-A9CA-98202AA9BD44}"/>
+                </a:ext>
+              </a:extLst>
+            </p:cNvPr>
+            <p:cNvCxnSpPr>
+              <a:cxnSpLocks/>
+            </p:cNvCxnSpPr>
+            <p:nvPr/>
+          </p:nvCxnSpPr>
+          <p:spPr>
+            <a:xfrm>
+              <a:off x="1074820" y="1716505"/>
+              <a:ext cx="140545" cy="107137"/>
+            </a:xfrm>
+            <a:prstGeom prst="line">
+              <a:avLst/>
+            </a:prstGeom>
+          </p:spPr>
+          <p:style>
+            <a:lnRef idx="2">
+              <a:schemeClr val="accent1"/>
+            </a:lnRef>
+            <a:fillRef idx="0">
+              <a:schemeClr val="accent1"/>
+            </a:fillRef>
+            <a:effectRef idx="1">
+              <a:schemeClr val="accent1"/>
+            </a:effectRef>
+            <a:fontRef idx="minor">
+              <a:schemeClr val="tx1"/>
+            </a:fontRef>
+          </p:style>
+        </p:cxnSp>
+      </p:grpSp>
+      <p:cxnSp>
+        <p:nvCxnSpPr>
+          <p:cNvPr id="54" name="Straight Arrow Connector 53">
+            <a:extLst>
+              <a:ext uri="{FF2B5EF4-FFF2-40B4-BE49-F238E27FC236}">
+                <a16:creationId xmlns:a16="http://schemas.microsoft.com/office/drawing/2014/main" id="{703B9A94-DC24-132F-F43C-A3FA7B28C588}"/>
+              </a:ext>
+            </a:extLst>
+          </p:cNvPr>
+          <p:cNvCxnSpPr>
+            <a:cxnSpLocks/>
+          </p:cNvCxnSpPr>
+          <p:nvPr/>
+        </p:nvCxnSpPr>
+        <p:spPr>
+          <a:xfrm>
+            <a:off x="8183825" y="4657213"/>
+            <a:ext cx="173935" cy="0"/>
+          </a:xfrm>
+          <a:prstGeom prst="straightConnector1">
+            <a:avLst/>
+          </a:prstGeom>
+          <a:ln>
+            <a:tailEnd type="triangle"/>
+          </a:ln>
+        </p:spPr>
+        <p:style>
+          <a:lnRef idx="2">
+            <a:schemeClr val="accent1"/>
+          </a:lnRef>
+          <a:fillRef idx="0">
+            <a:schemeClr val="accent1"/>
+          </a:fillRef>
+          <a:effectRef idx="1">
+            <a:schemeClr val="accent1"/>
+          </a:effectRef>
+          <a:fontRef idx="minor">
+            <a:schemeClr val="tx1"/>
+          </a:fontRef>
+        </p:style>
+      </p:cxnSp>
+      <p:cxnSp>
+        <p:nvCxnSpPr>
+          <p:cNvPr id="58" name="Straight Arrow Connector 57">
+            <a:extLst>
+              <a:ext uri="{FF2B5EF4-FFF2-40B4-BE49-F238E27FC236}">
+                <a16:creationId xmlns:a16="http://schemas.microsoft.com/office/drawing/2014/main" id="{2A1832F8-8198-4655-9DC3-8E0FDA0AB61F}"/>
+              </a:ext>
+            </a:extLst>
+          </p:cNvPr>
+          <p:cNvCxnSpPr/>
+          <p:nvPr/>
+        </p:nvCxnSpPr>
+        <p:spPr>
+          <a:xfrm>
+            <a:off x="8179952" y="4232097"/>
+            <a:ext cx="177808" cy="0"/>
+          </a:xfrm>
+          <a:prstGeom prst="straightConnector1">
+            <a:avLst/>
+          </a:prstGeom>
+          <a:ln>
+            <a:tailEnd type="triangle"/>
+          </a:ln>
+        </p:spPr>
+        <p:style>
+          <a:lnRef idx="2">
+            <a:schemeClr val="accent1"/>
+          </a:lnRef>
+          <a:fillRef idx="0">
+            <a:schemeClr val="accent1"/>
+          </a:fillRef>
+          <a:effectRef idx="1">
+            <a:schemeClr val="accent1"/>
+          </a:effectRef>
+          <a:fontRef idx="minor">
+            <a:schemeClr val="tx1"/>
+          </a:fontRef>
+        </p:style>
+      </p:cxnSp>
+      <p:sp>
+        <p:nvSpPr>
+          <p:cNvPr id="61" name="TextBox 60">
+            <a:extLst>
+              <a:ext uri="{FF2B5EF4-FFF2-40B4-BE49-F238E27FC236}">
+                <a16:creationId xmlns:a16="http://schemas.microsoft.com/office/drawing/2014/main" id="{E1A5FDD0-72BB-45F6-DD2E-55830C394C7A}"/>
+              </a:ext>
+            </a:extLst>
+          </p:cNvPr>
+          <p:cNvSpPr txBox="1"/>
+          <p:nvPr/>
+        </p:nvSpPr>
+        <p:spPr>
+          <a:xfrm>
+            <a:off x="8392597" y="4330630"/>
+            <a:ext cx="351378" cy="230832"/>
+          </a:xfrm>
+          <a:prstGeom prst="rect">
+            <a:avLst/>
+          </a:prstGeom>
+          <a:noFill/>
+        </p:spPr>
+        <p:txBody>
+          <a:bodyPr wrap="none" rtlCol="0">
+            <a:spAutoFit/>
+          </a:bodyPr>
+          <a:lstStyle/>
+          <a:p>
+            <a:pPr algn="ctr"/>
+            <a:r>
+              <a:rPr lang="en-US" sz="900" dirty="0"/>
+              <a:t>“+”</a:t>
+            </a:r>
+          </a:p>
+        </p:txBody>
+      </p:sp>
     </p:spTree>
     <p:extLst>
       <p:ext uri="{BB962C8B-B14F-4D97-AF65-F5344CB8AC3E}">
